--- a/figures/Fig8_migratory_strategy_v2.pptx
+++ b/figures/Fig8_migratory_strategy_v2.pptx
@@ -2307,7 +2307,7 @@
           <p:spPr>
             <a:xfrm>
               <a:off x="252469" y="252469"/>
-              <a:ext cx="4973753" cy="3477609"/>
+              <a:ext cx="4954441" cy="3421640"/>
             </a:xfrm>
             <a:prstGeom prst="rect">
               <a:avLst/>
@@ -2317,7 +2317,7 @@
                 <a:alpha val="100000"/>
               </a:srgbClr>
             </a:solidFill>
-            <a:ln w="11086" cap="rnd">
+            <a:ln w="12318" cap="rnd">
               <a:solidFill>
                 <a:srgbClr val="FFFFFF">
                   <a:alpha val="100000"/>
@@ -2341,8 +2341,8 @@
           </p:nvSpPr>
           <p:spPr>
             <a:xfrm>
-              <a:off x="5226222" y="252469"/>
-              <a:ext cx="5311228" cy="3477609"/>
+              <a:off x="5206910" y="252469"/>
+              <a:ext cx="5330540" cy="3421640"/>
             </a:xfrm>
             <a:prstGeom prst="rect">
               <a:avLst/>
@@ -2352,7 +2352,7 @@
                 <a:alpha val="100000"/>
               </a:srgbClr>
             </a:solidFill>
-            <a:ln w="11086" cap="rnd">
+            <a:ln w="12318" cap="rnd">
               <a:solidFill>
                 <a:srgbClr val="FFFFFF">
                   <a:alpha val="100000"/>
@@ -2376,8 +2376,8 @@
           </p:nvSpPr>
           <p:spPr>
             <a:xfrm>
-              <a:off x="640695" y="853121"/>
-              <a:ext cx="1321151" cy="2358039"/>
+              <a:off x="672960" y="911466"/>
+              <a:ext cx="1284423" cy="2193616"/>
             </a:xfrm>
             <a:prstGeom prst="rect">
               <a:avLst/>
@@ -2402,21 +2402,21 @@
           </p:nvSpPr>
           <p:spPr>
             <a:xfrm>
-              <a:off x="640695" y="3211160"/>
-              <a:ext cx="1321151" cy="0"/>
+              <a:off x="672960" y="3105082"/>
+              <a:ext cx="1284423" cy="0"/>
             </a:xfrm>
             <a:custGeom>
               <a:avLst/>
               <a:pathLst>
-                <a:path w="1321151" h="0">
+                <a:path w="1284423" h="0">
                   <a:moveTo>
                     <a:pt x="0" y="0"/>
                   </a:moveTo>
                   <a:lnTo>
-                    <a:pt x="1321151" y="0"/>
+                    <a:pt x="1284423" y="0"/>
                   </a:lnTo>
                   <a:lnTo>
-                    <a:pt x="1321151" y="0"/>
+                    <a:pt x="1284423" y="0"/>
                   </a:lnTo>
                 </a:path>
               </a:pathLst>
@@ -2445,21 +2445,21 @@
           </p:nvSpPr>
           <p:spPr>
             <a:xfrm>
-              <a:off x="640695" y="2597802"/>
-              <a:ext cx="1321151" cy="0"/>
+              <a:off x="672960" y="2534492"/>
+              <a:ext cx="1284423" cy="0"/>
             </a:xfrm>
             <a:custGeom>
               <a:avLst/>
               <a:pathLst>
-                <a:path w="1321151" h="0">
+                <a:path w="1284423" h="0">
                   <a:moveTo>
                     <a:pt x="0" y="0"/>
                   </a:moveTo>
                   <a:lnTo>
-                    <a:pt x="1321151" y="0"/>
+                    <a:pt x="1284423" y="0"/>
                   </a:lnTo>
                   <a:lnTo>
-                    <a:pt x="1321151" y="0"/>
+                    <a:pt x="1284423" y="0"/>
                   </a:lnTo>
                 </a:path>
               </a:pathLst>
@@ -2488,21 +2488,21 @@
           </p:nvSpPr>
           <p:spPr>
             <a:xfrm>
-              <a:off x="640695" y="1984443"/>
-              <a:ext cx="1321151" cy="0"/>
+              <a:off x="672960" y="1963903"/>
+              <a:ext cx="1284423" cy="0"/>
             </a:xfrm>
             <a:custGeom>
               <a:avLst/>
               <a:pathLst>
-                <a:path w="1321151" h="0">
+                <a:path w="1284423" h="0">
                   <a:moveTo>
                     <a:pt x="0" y="0"/>
                   </a:moveTo>
                   <a:lnTo>
-                    <a:pt x="1321151" y="0"/>
+                    <a:pt x="1284423" y="0"/>
                   </a:lnTo>
                   <a:lnTo>
-                    <a:pt x="1321151" y="0"/>
+                    <a:pt x="1284423" y="0"/>
                   </a:lnTo>
                 </a:path>
               </a:pathLst>
@@ -2531,21 +2531,21 @@
           </p:nvSpPr>
           <p:spPr>
             <a:xfrm>
-              <a:off x="640695" y="1371085"/>
-              <a:ext cx="1321151" cy="0"/>
+              <a:off x="672960" y="1393313"/>
+              <a:ext cx="1284423" cy="0"/>
             </a:xfrm>
             <a:custGeom>
               <a:avLst/>
               <a:pathLst>
-                <a:path w="1321151" h="0">
+                <a:path w="1284423" h="0">
                   <a:moveTo>
                     <a:pt x="0" y="0"/>
                   </a:moveTo>
                   <a:lnTo>
-                    <a:pt x="1321151" y="0"/>
+                    <a:pt x="1284423" y="0"/>
                   </a:lnTo>
                   <a:lnTo>
-                    <a:pt x="1321151" y="0"/>
+                    <a:pt x="1284423" y="0"/>
                   </a:lnTo>
                 </a:path>
               </a:pathLst>
@@ -2574,8 +2574,8 @@
           </p:nvSpPr>
           <p:spPr>
             <a:xfrm>
-              <a:off x="760424" y="1178368"/>
-              <a:ext cx="255973" cy="2032792"/>
+              <a:off x="789361" y="1214033"/>
+              <a:ext cx="248857" cy="1891048"/>
             </a:xfrm>
             <a:prstGeom prst="rect">
               <a:avLst/>
@@ -2600,8 +2600,8 @@
           </p:nvSpPr>
           <p:spPr>
             <a:xfrm>
-              <a:off x="1173284" y="2064763"/>
-              <a:ext cx="255973" cy="1146397"/>
+              <a:off x="1190743" y="2038621"/>
+              <a:ext cx="248857" cy="1066460"/>
             </a:xfrm>
             <a:prstGeom prst="rect">
               <a:avLst/>
@@ -2626,8 +2626,8 @@
           </p:nvSpPr>
           <p:spPr>
             <a:xfrm>
-              <a:off x="1586143" y="1383689"/>
-              <a:ext cx="255973" cy="1827470"/>
+              <a:off x="1592126" y="1405038"/>
+              <a:ext cx="248857" cy="1700043"/>
             </a:xfrm>
             <a:prstGeom prst="rect">
               <a:avLst/>
@@ -2652,7 +2652,7 @@
           </p:nvSpPr>
           <p:spPr>
             <a:xfrm>
-              <a:off x="815624" y="1091093"/>
+              <a:off x="841003" y="1126759"/>
               <a:ext cx="145572" cy="64648"/>
             </a:xfrm>
             <a:prstGeom prst="rect">
@@ -2695,7 +2695,7 @@
           </p:nvSpPr>
           <p:spPr>
             <a:xfrm>
-              <a:off x="1228484" y="1977488"/>
+              <a:off x="1242386" y="1951346"/>
               <a:ext cx="145572" cy="64648"/>
             </a:xfrm>
             <a:prstGeom prst="rect">
@@ -2738,7 +2738,7 @@
           </p:nvSpPr>
           <p:spPr>
             <a:xfrm>
-              <a:off x="1641344" y="1296414"/>
+              <a:off x="1643768" y="1317763"/>
               <a:ext cx="145572" cy="64648"/>
             </a:xfrm>
             <a:prstGeom prst="rect">
@@ -2781,8 +2781,8 @@
           </p:nvSpPr>
           <p:spPr>
             <a:xfrm>
-              <a:off x="2222273" y="853121"/>
-              <a:ext cx="1321151" cy="2358039"/>
+              <a:off x="2247113" y="911466"/>
+              <a:ext cx="1284423" cy="2193616"/>
             </a:xfrm>
             <a:prstGeom prst="rect">
               <a:avLst/>
@@ -2807,21 +2807,21 @@
           </p:nvSpPr>
           <p:spPr>
             <a:xfrm>
-              <a:off x="2222273" y="3211160"/>
-              <a:ext cx="1321151" cy="0"/>
+              <a:off x="2247113" y="3105082"/>
+              <a:ext cx="1284423" cy="0"/>
             </a:xfrm>
             <a:custGeom>
               <a:avLst/>
               <a:pathLst>
-                <a:path w="1321151" h="0">
+                <a:path w="1284423" h="0">
                   <a:moveTo>
                     <a:pt x="0" y="0"/>
                   </a:moveTo>
                   <a:lnTo>
-                    <a:pt x="1321151" y="0"/>
+                    <a:pt x="1284423" y="0"/>
                   </a:lnTo>
                   <a:lnTo>
-                    <a:pt x="1321151" y="0"/>
+                    <a:pt x="1284423" y="0"/>
                   </a:lnTo>
                 </a:path>
               </a:pathLst>
@@ -2850,21 +2850,21 @@
           </p:nvSpPr>
           <p:spPr>
             <a:xfrm>
-              <a:off x="2222273" y="2744923"/>
-              <a:ext cx="1321151" cy="0"/>
+              <a:off x="2247113" y="2671355"/>
+              <a:ext cx="1284423" cy="0"/>
             </a:xfrm>
             <a:custGeom>
               <a:avLst/>
               <a:pathLst>
-                <a:path w="1321151" h="0">
+                <a:path w="1284423" h="0">
                   <a:moveTo>
                     <a:pt x="0" y="0"/>
                   </a:moveTo>
                   <a:lnTo>
-                    <a:pt x="1321151" y="0"/>
+                    <a:pt x="1284423" y="0"/>
                   </a:lnTo>
                   <a:lnTo>
-                    <a:pt x="1321151" y="0"/>
+                    <a:pt x="1284423" y="0"/>
                   </a:lnTo>
                 </a:path>
               </a:pathLst>
@@ -2893,21 +2893,21 @@
           </p:nvSpPr>
           <p:spPr>
             <a:xfrm>
-              <a:off x="2222273" y="2278687"/>
-              <a:ext cx="1321151" cy="0"/>
+              <a:off x="2247113" y="2237629"/>
+              <a:ext cx="1284423" cy="0"/>
             </a:xfrm>
             <a:custGeom>
               <a:avLst/>
               <a:pathLst>
-                <a:path w="1321151" h="0">
+                <a:path w="1284423" h="0">
                   <a:moveTo>
                     <a:pt x="0" y="0"/>
                   </a:moveTo>
                   <a:lnTo>
-                    <a:pt x="1321151" y="0"/>
+                    <a:pt x="1284423" y="0"/>
                   </a:lnTo>
                   <a:lnTo>
-                    <a:pt x="1321151" y="0"/>
+                    <a:pt x="1284423" y="0"/>
                   </a:lnTo>
                 </a:path>
               </a:pathLst>
@@ -2936,21 +2936,21 @@
           </p:nvSpPr>
           <p:spPr>
             <a:xfrm>
-              <a:off x="2222273" y="1812450"/>
-              <a:ext cx="1321151" cy="0"/>
+              <a:off x="2247113" y="1803902"/>
+              <a:ext cx="1284423" cy="0"/>
             </a:xfrm>
             <a:custGeom>
               <a:avLst/>
               <a:pathLst>
-                <a:path w="1321151" h="0">
+                <a:path w="1284423" h="0">
                   <a:moveTo>
                     <a:pt x="0" y="0"/>
                   </a:moveTo>
                   <a:lnTo>
-                    <a:pt x="1321151" y="0"/>
+                    <a:pt x="1284423" y="0"/>
                   </a:lnTo>
                   <a:lnTo>
-                    <a:pt x="1321151" y="0"/>
+                    <a:pt x="1284423" y="0"/>
                   </a:lnTo>
                 </a:path>
               </a:pathLst>
@@ -2979,21 +2979,21 @@
           </p:nvSpPr>
           <p:spPr>
             <a:xfrm>
-              <a:off x="2222273" y="1346213"/>
-              <a:ext cx="1321151" cy="0"/>
+              <a:off x="2247113" y="1370175"/>
+              <a:ext cx="1284423" cy="0"/>
             </a:xfrm>
             <a:custGeom>
               <a:avLst/>
               <a:pathLst>
-                <a:path w="1321151" h="0">
+                <a:path w="1284423" h="0">
                   <a:moveTo>
                     <a:pt x="0" y="0"/>
                   </a:moveTo>
                   <a:lnTo>
-                    <a:pt x="1321151" y="0"/>
+                    <a:pt x="1284423" y="0"/>
                   </a:lnTo>
                   <a:lnTo>
-                    <a:pt x="1321151" y="0"/>
+                    <a:pt x="1284423" y="0"/>
                   </a:lnTo>
                 </a:path>
               </a:pathLst>
@@ -3022,21 +3022,21 @@
           </p:nvSpPr>
           <p:spPr>
             <a:xfrm>
-              <a:off x="2222273" y="879976"/>
-              <a:ext cx="1321151" cy="0"/>
+              <a:off x="2247113" y="936448"/>
+              <a:ext cx="1284423" cy="0"/>
             </a:xfrm>
             <a:custGeom>
               <a:avLst/>
               <a:pathLst>
-                <a:path w="1321151" h="0">
+                <a:path w="1284423" h="0">
                   <a:moveTo>
                     <a:pt x="0" y="0"/>
                   </a:moveTo>
                   <a:lnTo>
-                    <a:pt x="1321151" y="0"/>
+                    <a:pt x="1284423" y="0"/>
                   </a:lnTo>
                   <a:lnTo>
-                    <a:pt x="1321151" y="0"/>
+                    <a:pt x="1284423" y="0"/>
                   </a:lnTo>
                 </a:path>
               </a:pathLst>
@@ -3065,8 +3065,8 @@
           </p:nvSpPr>
           <p:spPr>
             <a:xfrm>
-              <a:off x="2342002" y="1178368"/>
-              <a:ext cx="255973" cy="2032792"/>
+              <a:off x="2363514" y="1214033"/>
+              <a:ext cx="248857" cy="1891048"/>
             </a:xfrm>
             <a:prstGeom prst="rect">
               <a:avLst/>
@@ -3091,8 +3091,8 @@
           </p:nvSpPr>
           <p:spPr>
             <a:xfrm>
-              <a:off x="2754862" y="1756501"/>
-              <a:ext cx="255973" cy="1454658"/>
+              <a:off x="2764896" y="1751855"/>
+              <a:ext cx="248857" cy="1353227"/>
             </a:xfrm>
             <a:prstGeom prst="rect">
               <a:avLst/>
@@ -3117,8 +3117,8 @@
           </p:nvSpPr>
           <p:spPr>
             <a:xfrm>
-              <a:off x="3167721" y="1579331"/>
-              <a:ext cx="255973" cy="1631828"/>
+              <a:off x="3166278" y="1587038"/>
+              <a:ext cx="248857" cy="1518043"/>
             </a:xfrm>
             <a:prstGeom prst="rect">
               <a:avLst/>
@@ -3143,7 +3143,7 @@
           </p:nvSpPr>
           <p:spPr>
             <a:xfrm>
-              <a:off x="2394688" y="1091093"/>
+              <a:off x="2412641" y="1126759"/>
               <a:ext cx="150601" cy="64648"/>
             </a:xfrm>
             <a:prstGeom prst="rect">
@@ -3186,7 +3186,7 @@
           </p:nvSpPr>
           <p:spPr>
             <a:xfrm>
-              <a:off x="2807547" y="1669226"/>
+              <a:off x="2814024" y="1664580"/>
               <a:ext cx="150601" cy="64648"/>
             </a:xfrm>
             <a:prstGeom prst="rect">
@@ -3229,7 +3229,7 @@
           </p:nvSpPr>
           <p:spPr>
             <a:xfrm>
-              <a:off x="3220407" y="1492056"/>
+              <a:off x="3215406" y="1499764"/>
               <a:ext cx="150601" cy="64648"/>
             </a:xfrm>
             <a:prstGeom prst="rect">
@@ -3272,8 +3272,8 @@
           </p:nvSpPr>
           <p:spPr>
             <a:xfrm>
-              <a:off x="3803851" y="853121"/>
-              <a:ext cx="1321151" cy="2358039"/>
+              <a:off x="3821266" y="911466"/>
+              <a:ext cx="1284423" cy="2193616"/>
             </a:xfrm>
             <a:prstGeom prst="rect">
               <a:avLst/>
@@ -3298,21 +3298,21 @@
           </p:nvSpPr>
           <p:spPr>
             <a:xfrm>
-              <a:off x="3803851" y="3211160"/>
-              <a:ext cx="1321151" cy="0"/>
+              <a:off x="3821266" y="3105082"/>
+              <a:ext cx="1284423" cy="0"/>
             </a:xfrm>
             <a:custGeom>
               <a:avLst/>
               <a:pathLst>
-                <a:path w="1321151" h="0">
+                <a:path w="1284423" h="0">
                   <a:moveTo>
                     <a:pt x="0" y="0"/>
                   </a:moveTo>
                   <a:lnTo>
-                    <a:pt x="1321151" y="0"/>
+                    <a:pt x="1284423" y="0"/>
                   </a:lnTo>
                   <a:lnTo>
-                    <a:pt x="1321151" y="0"/>
+                    <a:pt x="1284423" y="0"/>
                   </a:lnTo>
                 </a:path>
               </a:pathLst>
@@ -3341,21 +3341,21 @@
           </p:nvSpPr>
           <p:spPr>
             <a:xfrm>
-              <a:off x="3803851" y="2617644"/>
-              <a:ext cx="1321151" cy="0"/>
+              <a:off x="3821266" y="2552951"/>
+              <a:ext cx="1284423" cy="0"/>
             </a:xfrm>
             <a:custGeom>
               <a:avLst/>
               <a:pathLst>
-                <a:path w="1321151" h="0">
+                <a:path w="1284423" h="0">
                   <a:moveTo>
                     <a:pt x="0" y="0"/>
                   </a:moveTo>
                   <a:lnTo>
-                    <a:pt x="1321151" y="0"/>
+                    <a:pt x="1284423" y="0"/>
                   </a:lnTo>
                   <a:lnTo>
-                    <a:pt x="1321151" y="0"/>
+                    <a:pt x="1284423" y="0"/>
                   </a:lnTo>
                 </a:path>
               </a:pathLst>
@@ -3384,21 +3384,21 @@
           </p:nvSpPr>
           <p:spPr>
             <a:xfrm>
-              <a:off x="3803851" y="2024128"/>
-              <a:ext cx="1321151" cy="0"/>
+              <a:off x="3821266" y="2000820"/>
+              <a:ext cx="1284423" cy="0"/>
             </a:xfrm>
             <a:custGeom>
               <a:avLst/>
               <a:pathLst>
-                <a:path w="1321151" h="0">
+                <a:path w="1284423" h="0">
                   <a:moveTo>
                     <a:pt x="0" y="0"/>
                   </a:moveTo>
                   <a:lnTo>
-                    <a:pt x="1321151" y="0"/>
+                    <a:pt x="1284423" y="0"/>
                   </a:lnTo>
                   <a:lnTo>
-                    <a:pt x="1321151" y="0"/>
+                    <a:pt x="1284423" y="0"/>
                   </a:lnTo>
                 </a:path>
               </a:pathLst>
@@ -3427,21 +3427,21 @@
           </p:nvSpPr>
           <p:spPr>
             <a:xfrm>
-              <a:off x="3803851" y="1430612"/>
-              <a:ext cx="1321151" cy="0"/>
+              <a:off x="3821266" y="1448689"/>
+              <a:ext cx="1284423" cy="0"/>
             </a:xfrm>
             <a:custGeom>
               <a:avLst/>
               <a:pathLst>
-                <a:path w="1321151" h="0">
+                <a:path w="1284423" h="0">
                   <a:moveTo>
                     <a:pt x="0" y="0"/>
                   </a:moveTo>
                   <a:lnTo>
-                    <a:pt x="1321151" y="0"/>
+                    <a:pt x="1284423" y="0"/>
                   </a:lnTo>
                   <a:lnTo>
-                    <a:pt x="1321151" y="0"/>
+                    <a:pt x="1284423" y="0"/>
                   </a:lnTo>
                 </a:path>
               </a:pathLst>
@@ -3470,8 +3470,8 @@
           </p:nvSpPr>
           <p:spPr>
             <a:xfrm>
-              <a:off x="3923580" y="1178368"/>
-              <a:ext cx="255973" cy="2032792"/>
+              <a:off x="3937666" y="1214033"/>
+              <a:ext cx="248857" cy="1891048"/>
             </a:xfrm>
             <a:prstGeom prst="rect">
               <a:avLst/>
@@ -3496,8 +3496,8 @@
           </p:nvSpPr>
           <p:spPr>
             <a:xfrm>
-              <a:off x="4336440" y="2142831"/>
-              <a:ext cx="255973" cy="1068328"/>
+              <a:off x="4339049" y="2111246"/>
+              <a:ext cx="248857" cy="993835"/>
             </a:xfrm>
             <a:prstGeom prst="rect">
               <a:avLst/>
@@ -3522,8 +3522,8 @@
           </p:nvSpPr>
           <p:spPr>
             <a:xfrm>
-              <a:off x="4749299" y="1623505"/>
-              <a:ext cx="255973" cy="1587655"/>
+              <a:off x="4740431" y="1628132"/>
+              <a:ext cx="248857" cy="1476950"/>
             </a:xfrm>
             <a:prstGeom prst="rect">
               <a:avLst/>
@@ -3548,7 +3548,7 @@
           </p:nvSpPr>
           <p:spPr>
             <a:xfrm>
-              <a:off x="3976266" y="1091093"/>
+              <a:off x="3986794" y="1126759"/>
               <a:ext cx="150601" cy="64648"/>
             </a:xfrm>
             <a:prstGeom prst="rect">
@@ -3591,7 +3591,7 @@
           </p:nvSpPr>
           <p:spPr>
             <a:xfrm>
-              <a:off x="4414226" y="2055556"/>
+              <a:off x="4413277" y="2023971"/>
               <a:ext cx="100401" cy="64648"/>
             </a:xfrm>
             <a:prstGeom prst="rect">
@@ -3634,7 +3634,7 @@
           </p:nvSpPr>
           <p:spPr>
             <a:xfrm>
-              <a:off x="4801985" y="1536230"/>
+              <a:off x="4789559" y="1540857"/>
               <a:ext cx="150601" cy="64648"/>
             </a:xfrm>
             <a:prstGeom prst="rect">
@@ -3677,15 +3677,15 @@
           </p:nvSpPr>
           <p:spPr>
             <a:xfrm>
-              <a:off x="3803851" y="853121"/>
-              <a:ext cx="0" cy="2358039"/>
+              <a:off x="3821266" y="911466"/>
+              <a:ext cx="0" cy="2193616"/>
             </a:xfrm>
             <a:custGeom>
               <a:avLst/>
               <a:pathLst>
-                <a:path w="0" h="2358039">
+                <a:path w="0" h="2193616">
                   <a:moveTo>
-                    <a:pt x="0" y="2358039"/>
+                    <a:pt x="0" y="2193616"/>
                   </a:moveTo>
                   <a:lnTo>
                     <a:pt x="0" y="0"/>
@@ -3717,8 +3717,8 @@
           </p:nvSpPr>
           <p:spPr>
             <a:xfrm>
-              <a:off x="3701859" y="3178470"/>
-              <a:ext cx="50749" cy="65379"/>
+              <a:off x="3707819" y="3068689"/>
+              <a:ext cx="56509" cy="72786"/>
             </a:xfrm>
             <a:prstGeom prst="rect">
               <a:avLst/>
@@ -3738,7 +3738,7 @@
                 </a:spcAft>
               </a:pPr>
               <a:r>
-                <a:rPr sz="720" i="0" b="0">
+                <a:rPr sz="800" i="0" b="0">
                   <a:solidFill>
                     <a:srgbClr val="262626">
                       <a:alpha val="100000"/>
@@ -3760,8 +3760,8 @@
           </p:nvSpPr>
           <p:spPr>
             <a:xfrm>
-              <a:off x="3651109" y="2584954"/>
-              <a:ext cx="101498" cy="65379"/>
+              <a:off x="3651309" y="2516558"/>
+              <a:ext cx="113019" cy="72786"/>
             </a:xfrm>
             <a:prstGeom prst="rect">
               <a:avLst/>
@@ -3781,7 +3781,7 @@
                 </a:spcAft>
               </a:pPr>
               <a:r>
-                <a:rPr sz="720" i="0" b="0">
+                <a:rPr sz="800" i="0" b="0">
                   <a:solidFill>
                     <a:srgbClr val="262626">
                       <a:alpha val="100000"/>
@@ -3803,8 +3803,8 @@
           </p:nvSpPr>
           <p:spPr>
             <a:xfrm>
-              <a:off x="3651109" y="1991438"/>
-              <a:ext cx="101498" cy="65379"/>
+              <a:off x="3651309" y="1964427"/>
+              <a:ext cx="113019" cy="72786"/>
             </a:xfrm>
             <a:prstGeom prst="rect">
               <a:avLst/>
@@ -3824,7 +3824,7 @@
                 </a:spcAft>
               </a:pPr>
               <a:r>
-                <a:rPr sz="720" i="0" b="0">
+                <a:rPr sz="800" i="0" b="0">
                   <a:solidFill>
                     <a:srgbClr val="262626">
                       <a:alpha val="100000"/>
@@ -3846,8 +3846,8 @@
           </p:nvSpPr>
           <p:spPr>
             <a:xfrm>
-              <a:off x="3600360" y="1397922"/>
-              <a:ext cx="152247" cy="65379"/>
+              <a:off x="3594799" y="1412296"/>
+              <a:ext cx="169529" cy="72786"/>
             </a:xfrm>
             <a:prstGeom prst="rect">
               <a:avLst/>
@@ -3867,7 +3867,7 @@
                 </a:spcAft>
               </a:pPr>
               <a:r>
-                <a:rPr sz="720" i="0" b="0">
+                <a:rPr sz="800" i="0" b="0">
                   <a:solidFill>
                     <a:srgbClr val="262626">
                       <a:alpha val="100000"/>
@@ -3889,18 +3889,18 @@
           </p:nvSpPr>
           <p:spPr>
             <a:xfrm>
-              <a:off x="3775382" y="3211160"/>
-              <a:ext cx="28468" cy="0"/>
+              <a:off x="3789634" y="3105082"/>
+              <a:ext cx="31631" cy="0"/>
             </a:xfrm>
             <a:custGeom>
               <a:avLst/>
               <a:pathLst>
-                <a:path w="28468" h="0">
+                <a:path w="31631" h="0">
                   <a:moveTo>
                     <a:pt x="0" y="0"/>
                   </a:moveTo>
                   <a:lnTo>
-                    <a:pt x="28468" y="0"/>
+                    <a:pt x="31631" y="0"/>
                   </a:lnTo>
                 </a:path>
               </a:pathLst>
@@ -3929,18 +3929,18 @@
           </p:nvSpPr>
           <p:spPr>
             <a:xfrm>
-              <a:off x="3775382" y="2617644"/>
-              <a:ext cx="28468" cy="0"/>
+              <a:off x="3789634" y="2552951"/>
+              <a:ext cx="31631" cy="0"/>
             </a:xfrm>
             <a:custGeom>
               <a:avLst/>
               <a:pathLst>
-                <a:path w="28468" h="0">
+                <a:path w="31631" h="0">
                   <a:moveTo>
                     <a:pt x="0" y="0"/>
                   </a:moveTo>
                   <a:lnTo>
-                    <a:pt x="28468" y="0"/>
+                    <a:pt x="31631" y="0"/>
                   </a:lnTo>
                 </a:path>
               </a:pathLst>
@@ -3969,18 +3969,18 @@
           </p:nvSpPr>
           <p:spPr>
             <a:xfrm>
-              <a:off x="3775382" y="2024128"/>
-              <a:ext cx="28468" cy="0"/>
+              <a:off x="3789634" y="2000820"/>
+              <a:ext cx="31631" cy="0"/>
             </a:xfrm>
             <a:custGeom>
               <a:avLst/>
               <a:pathLst>
-                <a:path w="28468" h="0">
+                <a:path w="31631" h="0">
                   <a:moveTo>
                     <a:pt x="0" y="0"/>
                   </a:moveTo>
                   <a:lnTo>
-                    <a:pt x="28468" y="0"/>
+                    <a:pt x="31631" y="0"/>
                   </a:lnTo>
                 </a:path>
               </a:pathLst>
@@ -4009,18 +4009,18 @@
           </p:nvSpPr>
           <p:spPr>
             <a:xfrm>
-              <a:off x="3775382" y="1430612"/>
-              <a:ext cx="28468" cy="0"/>
+              <a:off x="3789634" y="1448689"/>
+              <a:ext cx="31631" cy="0"/>
             </a:xfrm>
             <a:custGeom>
               <a:avLst/>
               <a:pathLst>
-                <a:path w="28468" h="0">
+                <a:path w="31631" h="0">
                   <a:moveTo>
                     <a:pt x="0" y="0"/>
                   </a:moveTo>
                   <a:lnTo>
-                    <a:pt x="28468" y="0"/>
+                    <a:pt x="31631" y="0"/>
                   </a:lnTo>
                 </a:path>
               </a:pathLst>
@@ -4049,15 +4049,15 @@
           </p:nvSpPr>
           <p:spPr>
             <a:xfrm>
-              <a:off x="2222273" y="853121"/>
-              <a:ext cx="0" cy="2358039"/>
+              <a:off x="2247113" y="911466"/>
+              <a:ext cx="0" cy="2193616"/>
             </a:xfrm>
             <a:custGeom>
               <a:avLst/>
               <a:pathLst>
-                <a:path w="0" h="2358039">
+                <a:path w="0" h="2193616">
                   <a:moveTo>
-                    <a:pt x="0" y="2358039"/>
+                    <a:pt x="0" y="2193616"/>
                   </a:moveTo>
                   <a:lnTo>
                     <a:pt x="0" y="0"/>
@@ -4089,8 +4089,8 @@
           </p:nvSpPr>
           <p:spPr>
             <a:xfrm>
-              <a:off x="2120281" y="3178470"/>
-              <a:ext cx="50749" cy="65379"/>
+              <a:off x="2133666" y="3068689"/>
+              <a:ext cx="56509" cy="72786"/>
             </a:xfrm>
             <a:prstGeom prst="rect">
               <a:avLst/>
@@ -4110,7 +4110,7 @@
                 </a:spcAft>
               </a:pPr>
               <a:r>
-                <a:rPr sz="720" i="0" b="0">
+                <a:rPr sz="800" i="0" b="0">
                   <a:solidFill>
                     <a:srgbClr val="262626">
                       <a:alpha val="100000"/>
@@ -4132,8 +4132,8 @@
           </p:nvSpPr>
           <p:spPr>
             <a:xfrm>
-              <a:off x="2069531" y="2712233"/>
-              <a:ext cx="101498" cy="65379"/>
+              <a:off x="2077156" y="2634962"/>
+              <a:ext cx="113019" cy="72786"/>
             </a:xfrm>
             <a:prstGeom prst="rect">
               <a:avLst/>
@@ -4153,7 +4153,7 @@
                 </a:spcAft>
               </a:pPr>
               <a:r>
-                <a:rPr sz="720" i="0" b="0">
+                <a:rPr sz="800" i="0" b="0">
                   <a:solidFill>
                     <a:srgbClr val="262626">
                       <a:alpha val="100000"/>
@@ -4175,8 +4175,8 @@
           </p:nvSpPr>
           <p:spPr>
             <a:xfrm>
-              <a:off x="2018782" y="2245997"/>
-              <a:ext cx="152247" cy="65379"/>
+              <a:off x="2020646" y="2201236"/>
+              <a:ext cx="169529" cy="72786"/>
             </a:xfrm>
             <a:prstGeom prst="rect">
               <a:avLst/>
@@ -4196,7 +4196,7 @@
                 </a:spcAft>
               </a:pPr>
               <a:r>
-                <a:rPr sz="720" i="0" b="0">
+                <a:rPr sz="800" i="0" b="0">
                   <a:solidFill>
                     <a:srgbClr val="262626">
                       <a:alpha val="100000"/>
@@ -4218,8 +4218,8 @@
           </p:nvSpPr>
           <p:spPr>
             <a:xfrm>
-              <a:off x="2018782" y="1779760"/>
-              <a:ext cx="152247" cy="65379"/>
+              <a:off x="2020646" y="1767509"/>
+              <a:ext cx="169529" cy="72786"/>
             </a:xfrm>
             <a:prstGeom prst="rect">
               <a:avLst/>
@@ -4239,7 +4239,7 @@
                 </a:spcAft>
               </a:pPr>
               <a:r>
-                <a:rPr sz="720" i="0" b="0">
+                <a:rPr sz="800" i="0" b="0">
                   <a:solidFill>
                     <a:srgbClr val="262626">
                       <a:alpha val="100000"/>
@@ -4261,8 +4261,8 @@
           </p:nvSpPr>
           <p:spPr>
             <a:xfrm>
-              <a:off x="2018782" y="1313523"/>
-              <a:ext cx="152247" cy="65379"/>
+              <a:off x="2020646" y="1333782"/>
+              <a:ext cx="169529" cy="72786"/>
             </a:xfrm>
             <a:prstGeom prst="rect">
               <a:avLst/>
@@ -4282,7 +4282,7 @@
                 </a:spcAft>
               </a:pPr>
               <a:r>
-                <a:rPr sz="720" i="0" b="0">
+                <a:rPr sz="800" i="0" b="0">
                   <a:solidFill>
                     <a:srgbClr val="262626">
                       <a:alpha val="100000"/>
@@ -4304,8 +4304,8 @@
           </p:nvSpPr>
           <p:spPr>
             <a:xfrm>
-              <a:off x="2018782" y="847286"/>
-              <a:ext cx="152247" cy="65379"/>
+              <a:off x="2020646" y="900055"/>
+              <a:ext cx="169529" cy="72786"/>
             </a:xfrm>
             <a:prstGeom prst="rect">
               <a:avLst/>
@@ -4325,7 +4325,7 @@
                 </a:spcAft>
               </a:pPr>
               <a:r>
-                <a:rPr sz="720" i="0" b="0">
+                <a:rPr sz="800" i="0" b="0">
                   <a:solidFill>
                     <a:srgbClr val="262626">
                       <a:alpha val="100000"/>
@@ -4347,18 +4347,18 @@
           </p:nvSpPr>
           <p:spPr>
             <a:xfrm>
-              <a:off x="2193804" y="3211160"/>
-              <a:ext cx="28468" cy="0"/>
+              <a:off x="2215481" y="3105082"/>
+              <a:ext cx="31631" cy="0"/>
             </a:xfrm>
             <a:custGeom>
               <a:avLst/>
               <a:pathLst>
-                <a:path w="28468" h="0">
+                <a:path w="31631" h="0">
                   <a:moveTo>
                     <a:pt x="0" y="0"/>
                   </a:moveTo>
                   <a:lnTo>
-                    <a:pt x="28468" y="0"/>
+                    <a:pt x="31631" y="0"/>
                   </a:lnTo>
                 </a:path>
               </a:pathLst>
@@ -4387,18 +4387,18 @@
           </p:nvSpPr>
           <p:spPr>
             <a:xfrm>
-              <a:off x="2193804" y="2744923"/>
-              <a:ext cx="28468" cy="0"/>
+              <a:off x="2215481" y="2671355"/>
+              <a:ext cx="31631" cy="0"/>
             </a:xfrm>
             <a:custGeom>
               <a:avLst/>
               <a:pathLst>
-                <a:path w="28468" h="0">
+                <a:path w="31631" h="0">
                   <a:moveTo>
                     <a:pt x="0" y="0"/>
                   </a:moveTo>
                   <a:lnTo>
-                    <a:pt x="28468" y="0"/>
+                    <a:pt x="31631" y="0"/>
                   </a:lnTo>
                 </a:path>
               </a:pathLst>
@@ -4427,18 +4427,18 @@
           </p:nvSpPr>
           <p:spPr>
             <a:xfrm>
-              <a:off x="2193804" y="2278687"/>
-              <a:ext cx="28468" cy="0"/>
+              <a:off x="2215481" y="2237629"/>
+              <a:ext cx="31631" cy="0"/>
             </a:xfrm>
             <a:custGeom>
               <a:avLst/>
               <a:pathLst>
-                <a:path w="28468" h="0">
+                <a:path w="31631" h="0">
                   <a:moveTo>
                     <a:pt x="0" y="0"/>
                   </a:moveTo>
                   <a:lnTo>
-                    <a:pt x="28468" y="0"/>
+                    <a:pt x="31631" y="0"/>
                   </a:lnTo>
                 </a:path>
               </a:pathLst>
@@ -4467,18 +4467,18 @@
           </p:nvSpPr>
           <p:spPr>
             <a:xfrm>
-              <a:off x="2193804" y="1812450"/>
-              <a:ext cx="28468" cy="0"/>
+              <a:off x="2215481" y="1803902"/>
+              <a:ext cx="31631" cy="0"/>
             </a:xfrm>
             <a:custGeom>
               <a:avLst/>
               <a:pathLst>
-                <a:path w="28468" h="0">
+                <a:path w="31631" h="0">
                   <a:moveTo>
                     <a:pt x="0" y="0"/>
                   </a:moveTo>
                   <a:lnTo>
-                    <a:pt x="28468" y="0"/>
+                    <a:pt x="31631" y="0"/>
                   </a:lnTo>
                 </a:path>
               </a:pathLst>
@@ -4507,18 +4507,18 @@
           </p:nvSpPr>
           <p:spPr>
             <a:xfrm>
-              <a:off x="2193804" y="1346213"/>
-              <a:ext cx="28468" cy="0"/>
+              <a:off x="2215481" y="1370175"/>
+              <a:ext cx="31631" cy="0"/>
             </a:xfrm>
             <a:custGeom>
               <a:avLst/>
               <a:pathLst>
-                <a:path w="28468" h="0">
+                <a:path w="31631" h="0">
                   <a:moveTo>
                     <a:pt x="0" y="0"/>
                   </a:moveTo>
                   <a:lnTo>
-                    <a:pt x="28468" y="0"/>
+                    <a:pt x="31631" y="0"/>
                   </a:lnTo>
                 </a:path>
               </a:pathLst>
@@ -4547,18 +4547,18 @@
           </p:nvSpPr>
           <p:spPr>
             <a:xfrm>
-              <a:off x="2193804" y="879976"/>
-              <a:ext cx="28468" cy="0"/>
+              <a:off x="2215481" y="936448"/>
+              <a:ext cx="31631" cy="0"/>
             </a:xfrm>
             <a:custGeom>
               <a:avLst/>
               <a:pathLst>
-                <a:path w="28468" h="0">
+                <a:path w="31631" h="0">
                   <a:moveTo>
                     <a:pt x="0" y="0"/>
                   </a:moveTo>
                   <a:lnTo>
-                    <a:pt x="28468" y="0"/>
+                    <a:pt x="31631" y="0"/>
                   </a:lnTo>
                 </a:path>
               </a:pathLst>
@@ -4587,8 +4587,8 @@
           </p:nvSpPr>
           <p:spPr>
             <a:xfrm>
-              <a:off x="686244" y="713754"/>
-              <a:ext cx="1105052" cy="81838"/>
+              <a:off x="723570" y="756522"/>
+              <a:ext cx="1228862" cy="90982"/>
             </a:xfrm>
             <a:prstGeom prst="rect">
               <a:avLst/>
@@ -4608,7 +4608,7 @@
                 </a:spcAft>
               </a:pPr>
               <a:r>
-                <a:rPr sz="900" i="0" b="1">
+                <a:rPr sz="1000" i="0" b="1">
                   <a:solidFill>
                     <a:srgbClr val="1A1A1A">
                       <a:alpha val="100000"/>
@@ -4630,8 +4630,8 @@
           </p:nvSpPr>
           <p:spPr>
             <a:xfrm>
-              <a:off x="2267822" y="713754"/>
-              <a:ext cx="374812" cy="81838"/>
+              <a:off x="2297723" y="756522"/>
+              <a:ext cx="416600" cy="90982"/>
             </a:xfrm>
             <a:prstGeom prst="rect">
               <a:avLst/>
@@ -4651,7 +4651,7 @@
                 </a:spcAft>
               </a:pPr>
               <a:r>
-                <a:rPr sz="900" i="0" b="1">
+                <a:rPr sz="1000" i="0" b="1">
                   <a:solidFill>
                     <a:srgbClr val="1A1A1A">
                       <a:alpha val="100000"/>
@@ -4673,8 +4673,8 @@
           </p:nvSpPr>
           <p:spPr>
             <a:xfrm>
-              <a:off x="3849400" y="713754"/>
-              <a:ext cx="432054" cy="81838"/>
+              <a:off x="3871876" y="756522"/>
+              <a:ext cx="480242" cy="90982"/>
             </a:xfrm>
             <a:prstGeom prst="rect">
               <a:avLst/>
@@ -4694,7 +4694,7 @@
                 </a:spcAft>
               </a:pPr>
               <a:r>
-                <a:rPr sz="900" i="0" b="1">
+                <a:rPr sz="1000" i="0" b="1">
                   <a:solidFill>
                     <a:srgbClr val="1A1A1A">
                       <a:alpha val="100000"/>
@@ -4716,18 +4716,18 @@
           </p:nvSpPr>
           <p:spPr>
             <a:xfrm>
-              <a:off x="640695" y="3211160"/>
-              <a:ext cx="1321151" cy="0"/>
+              <a:off x="672960" y="3105082"/>
+              <a:ext cx="1284423" cy="0"/>
             </a:xfrm>
             <a:custGeom>
               <a:avLst/>
               <a:pathLst>
-                <a:path w="1321151" h="0">
+                <a:path w="1284423" h="0">
                   <a:moveTo>
                     <a:pt x="0" y="0"/>
                   </a:moveTo>
                   <a:lnTo>
-                    <a:pt x="1321151" y="0"/>
+                    <a:pt x="1284423" y="0"/>
                   </a:lnTo>
                 </a:path>
               </a:pathLst>
@@ -4756,15 +4756,15 @@
           </p:nvSpPr>
           <p:spPr>
             <a:xfrm>
-              <a:off x="888410" y="3211160"/>
-              <a:ext cx="0" cy="28468"/>
+              <a:off x="913789" y="3105082"/>
+              <a:ext cx="0" cy="31631"/>
             </a:xfrm>
             <a:custGeom>
               <a:avLst/>
               <a:pathLst>
-                <a:path w="0" h="28468">
+                <a:path w="0" h="31631">
                   <a:moveTo>
-                    <a:pt x="0" y="28468"/>
+                    <a:pt x="0" y="31631"/>
                   </a:moveTo>
                   <a:lnTo>
                     <a:pt x="0" y="0"/>
@@ -4796,15 +4796,15 @@
           </p:nvSpPr>
           <p:spPr>
             <a:xfrm>
-              <a:off x="1301270" y="3211160"/>
-              <a:ext cx="0" cy="28468"/>
+              <a:off x="1315172" y="3105082"/>
+              <a:ext cx="0" cy="31631"/>
             </a:xfrm>
             <a:custGeom>
               <a:avLst/>
               <a:pathLst>
-                <a:path w="0" h="28468">
+                <a:path w="0" h="31631">
                   <a:moveTo>
-                    <a:pt x="0" y="28468"/>
+                    <a:pt x="0" y="31631"/>
                   </a:moveTo>
                   <a:lnTo>
                     <a:pt x="0" y="0"/>
@@ -4836,15 +4836,15 @@
           </p:nvSpPr>
           <p:spPr>
             <a:xfrm>
-              <a:off x="1714130" y="3211160"/>
-              <a:ext cx="0" cy="28468"/>
+              <a:off x="1716554" y="3105082"/>
+              <a:ext cx="0" cy="31631"/>
             </a:xfrm>
             <a:custGeom>
               <a:avLst/>
               <a:pathLst>
-                <a:path w="0" h="28468">
+                <a:path w="0" h="31631">
                   <a:moveTo>
-                    <a:pt x="0" y="28468"/>
+                    <a:pt x="0" y="31631"/>
                   </a:moveTo>
                   <a:lnTo>
                     <a:pt x="0" y="0"/>
@@ -4876,8 +4876,8 @@
           </p:nvSpPr>
           <p:spPr>
             <a:xfrm rot="-1080000">
-              <a:off x="547144" y="3316454"/>
-              <a:ext cx="360182" cy="65379"/>
+              <a:off x="533794" y="3222204"/>
+              <a:ext cx="401055" cy="72786"/>
             </a:xfrm>
             <a:prstGeom prst="rect">
               <a:avLst/>
@@ -4897,7 +4897,7 @@
                 </a:spcAft>
               </a:pPr>
               <a:r>
-                <a:rPr sz="720" i="0" b="0">
+                <a:rPr sz="800" i="0" b="0">
                   <a:solidFill>
                     <a:srgbClr val="262626">
                       <a:alpha val="100000"/>
@@ -4919,8 +4919,8 @@
           </p:nvSpPr>
           <p:spPr>
             <a:xfrm rot="-1080000">
-              <a:off x="1059018" y="3300772"/>
-              <a:ext cx="258683" cy="65379"/>
+              <a:off x="1045431" y="3204742"/>
+              <a:ext cx="288036" cy="72786"/>
             </a:xfrm>
             <a:prstGeom prst="rect">
               <a:avLst/>
@@ -4940,7 +4940,7 @@
                 </a:spcAft>
               </a:pPr>
               <a:r>
-                <a:rPr sz="720" i="0" b="0">
+                <a:rPr sz="800" i="0" b="0">
                   <a:solidFill>
                     <a:srgbClr val="262626">
                       <a:alpha val="100000"/>
@@ -4962,8 +4962,8 @@
           </p:nvSpPr>
           <p:spPr>
             <a:xfrm rot="-1080000">
-              <a:off x="1165022" y="3349373"/>
-              <a:ext cx="573237" cy="65379"/>
+              <a:off x="1104990" y="3258881"/>
+              <a:ext cx="638434" cy="72786"/>
             </a:xfrm>
             <a:prstGeom prst="rect">
               <a:avLst/>
@@ -4983,7 +4983,7 @@
                 </a:spcAft>
               </a:pPr>
               <a:r>
-                <a:rPr sz="720" i="0" b="0">
+                <a:rPr sz="800" i="0" b="0">
                   <a:solidFill>
                     <a:srgbClr val="262626">
                       <a:alpha val="100000"/>
@@ -5005,18 +5005,18 @@
           </p:nvSpPr>
           <p:spPr>
             <a:xfrm>
-              <a:off x="2222273" y="3211160"/>
-              <a:ext cx="1321151" cy="0"/>
+              <a:off x="2247113" y="3105082"/>
+              <a:ext cx="1284423" cy="0"/>
             </a:xfrm>
             <a:custGeom>
               <a:avLst/>
               <a:pathLst>
-                <a:path w="1321151" h="0">
+                <a:path w="1284423" h="0">
                   <a:moveTo>
                     <a:pt x="0" y="0"/>
                   </a:moveTo>
                   <a:lnTo>
-                    <a:pt x="1321151" y="0"/>
+                    <a:pt x="1284423" y="0"/>
                   </a:lnTo>
                 </a:path>
               </a:pathLst>
@@ -5045,15 +5045,15 @@
           </p:nvSpPr>
           <p:spPr>
             <a:xfrm>
-              <a:off x="2469988" y="3211160"/>
-              <a:ext cx="0" cy="28468"/>
+              <a:off x="2487942" y="3105082"/>
+              <a:ext cx="0" cy="31631"/>
             </a:xfrm>
             <a:custGeom>
               <a:avLst/>
               <a:pathLst>
-                <a:path w="0" h="28468">
+                <a:path w="0" h="31631">
                   <a:moveTo>
-                    <a:pt x="0" y="28468"/>
+                    <a:pt x="0" y="31631"/>
                   </a:moveTo>
                   <a:lnTo>
                     <a:pt x="0" y="0"/>
@@ -5085,15 +5085,15 @@
           </p:nvSpPr>
           <p:spPr>
             <a:xfrm>
-              <a:off x="2882848" y="3211160"/>
-              <a:ext cx="0" cy="28468"/>
+              <a:off x="2889325" y="3105082"/>
+              <a:ext cx="0" cy="31631"/>
             </a:xfrm>
             <a:custGeom>
               <a:avLst/>
               <a:pathLst>
-                <a:path w="0" h="28468">
+                <a:path w="0" h="31631">
                   <a:moveTo>
-                    <a:pt x="0" y="28468"/>
+                    <a:pt x="0" y="31631"/>
                   </a:moveTo>
                   <a:lnTo>
                     <a:pt x="0" y="0"/>
@@ -5125,15 +5125,15 @@
           </p:nvSpPr>
           <p:spPr>
             <a:xfrm>
-              <a:off x="3295708" y="3211160"/>
-              <a:ext cx="0" cy="28468"/>
+              <a:off x="3290707" y="3105082"/>
+              <a:ext cx="0" cy="31631"/>
             </a:xfrm>
             <a:custGeom>
               <a:avLst/>
               <a:pathLst>
-                <a:path w="0" h="28468">
+                <a:path w="0" h="31631">
                   <a:moveTo>
-                    <a:pt x="0" y="28468"/>
+                    <a:pt x="0" y="31631"/>
                   </a:moveTo>
                   <a:lnTo>
                     <a:pt x="0" y="0"/>
@@ -5165,8 +5165,8 @@
           </p:nvSpPr>
           <p:spPr>
             <a:xfrm rot="-1080000">
-              <a:off x="2128722" y="3316454"/>
-              <a:ext cx="360182" cy="65379"/>
+              <a:off x="2107947" y="3222204"/>
+              <a:ext cx="401055" cy="72786"/>
             </a:xfrm>
             <a:prstGeom prst="rect">
               <a:avLst/>
@@ -5186,7 +5186,7 @@
                 </a:spcAft>
               </a:pPr>
               <a:r>
-                <a:rPr sz="720" i="0" b="0">
+                <a:rPr sz="800" i="0" b="0">
                   <a:solidFill>
                     <a:srgbClr val="262626">
                       <a:alpha val="100000"/>
@@ -5208,8 +5208,8 @@
           </p:nvSpPr>
           <p:spPr>
             <a:xfrm rot="-1080000">
-              <a:off x="2640597" y="3300772"/>
-              <a:ext cx="258683" cy="65379"/>
+              <a:off x="2619583" y="3204742"/>
+              <a:ext cx="288036" cy="72786"/>
             </a:xfrm>
             <a:prstGeom prst="rect">
               <a:avLst/>
@@ -5229,7 +5229,7 @@
                 </a:spcAft>
               </a:pPr>
               <a:r>
-                <a:rPr sz="720" i="0" b="0">
+                <a:rPr sz="800" i="0" b="0">
                   <a:solidFill>
                     <a:srgbClr val="262626">
                       <a:alpha val="100000"/>
@@ -5251,8 +5251,8 @@
           </p:nvSpPr>
           <p:spPr>
             <a:xfrm rot="-1080000">
-              <a:off x="2746600" y="3349373"/>
-              <a:ext cx="573237" cy="65379"/>
+              <a:off x="2679143" y="3258881"/>
+              <a:ext cx="638434" cy="72786"/>
             </a:xfrm>
             <a:prstGeom prst="rect">
               <a:avLst/>
@@ -5272,7 +5272,7 @@
                 </a:spcAft>
               </a:pPr>
               <a:r>
-                <a:rPr sz="720" i="0" b="0">
+                <a:rPr sz="800" i="0" b="0">
                   <a:solidFill>
                     <a:srgbClr val="262626">
                       <a:alpha val="100000"/>
@@ -5294,18 +5294,18 @@
           </p:nvSpPr>
           <p:spPr>
             <a:xfrm>
-              <a:off x="3803851" y="3211160"/>
-              <a:ext cx="1321151" cy="0"/>
+              <a:off x="3821266" y="3105082"/>
+              <a:ext cx="1284423" cy="0"/>
             </a:xfrm>
             <a:custGeom>
               <a:avLst/>
               <a:pathLst>
-                <a:path w="1321151" h="0">
+                <a:path w="1284423" h="0">
                   <a:moveTo>
                     <a:pt x="0" y="0"/>
                   </a:moveTo>
                   <a:lnTo>
-                    <a:pt x="1321151" y="0"/>
+                    <a:pt x="1284423" y="0"/>
                   </a:lnTo>
                 </a:path>
               </a:pathLst>
@@ -5334,15 +5334,15 @@
           </p:nvSpPr>
           <p:spPr>
             <a:xfrm>
-              <a:off x="4051566" y="3211160"/>
-              <a:ext cx="0" cy="28468"/>
+              <a:off x="4062095" y="3105082"/>
+              <a:ext cx="0" cy="31631"/>
             </a:xfrm>
             <a:custGeom>
               <a:avLst/>
               <a:pathLst>
-                <a:path w="0" h="28468">
+                <a:path w="0" h="31631">
                   <a:moveTo>
-                    <a:pt x="0" y="28468"/>
+                    <a:pt x="0" y="31631"/>
                   </a:moveTo>
                   <a:lnTo>
                     <a:pt x="0" y="0"/>
@@ -5374,15 +5374,15 @@
           </p:nvSpPr>
           <p:spPr>
             <a:xfrm>
-              <a:off x="4464426" y="3211160"/>
-              <a:ext cx="0" cy="28468"/>
+              <a:off x="4463477" y="3105082"/>
+              <a:ext cx="0" cy="31631"/>
             </a:xfrm>
             <a:custGeom>
               <a:avLst/>
               <a:pathLst>
-                <a:path w="0" h="28468">
+                <a:path w="0" h="31631">
                   <a:moveTo>
-                    <a:pt x="0" y="28468"/>
+                    <a:pt x="0" y="31631"/>
                   </a:moveTo>
                   <a:lnTo>
                     <a:pt x="0" y="0"/>
@@ -5414,15 +5414,15 @@
           </p:nvSpPr>
           <p:spPr>
             <a:xfrm>
-              <a:off x="4877286" y="3211160"/>
-              <a:ext cx="0" cy="28468"/>
+              <a:off x="4864860" y="3105082"/>
+              <a:ext cx="0" cy="31631"/>
             </a:xfrm>
             <a:custGeom>
               <a:avLst/>
               <a:pathLst>
-                <a:path w="0" h="28468">
+                <a:path w="0" h="31631">
                   <a:moveTo>
-                    <a:pt x="0" y="28468"/>
+                    <a:pt x="0" y="31631"/>
                   </a:moveTo>
                   <a:lnTo>
                     <a:pt x="0" y="0"/>
@@ -5454,8 +5454,8 @@
           </p:nvSpPr>
           <p:spPr>
             <a:xfrm rot="-1080000">
-              <a:off x="3710300" y="3316454"/>
-              <a:ext cx="360182" cy="65379"/>
+              <a:off x="3682100" y="3222204"/>
+              <a:ext cx="401055" cy="72786"/>
             </a:xfrm>
             <a:prstGeom prst="rect">
               <a:avLst/>
@@ -5475,7 +5475,7 @@
                 </a:spcAft>
               </a:pPr>
               <a:r>
-                <a:rPr sz="720" i="0" b="0">
+                <a:rPr sz="800" i="0" b="0">
                   <a:solidFill>
                     <a:srgbClr val="262626">
                       <a:alpha val="100000"/>
@@ -5497,8 +5497,8 @@
           </p:nvSpPr>
           <p:spPr>
             <a:xfrm rot="-1080000">
-              <a:off x="4222175" y="3300772"/>
-              <a:ext cx="258683" cy="65379"/>
+              <a:off x="4193736" y="3204742"/>
+              <a:ext cx="288036" cy="72786"/>
             </a:xfrm>
             <a:prstGeom prst="rect">
               <a:avLst/>
@@ -5518,7 +5518,7 @@
                 </a:spcAft>
               </a:pPr>
               <a:r>
-                <a:rPr sz="720" i="0" b="0">
+                <a:rPr sz="800" i="0" b="0">
                   <a:solidFill>
                     <a:srgbClr val="262626">
                       <a:alpha val="100000"/>
@@ -5540,8 +5540,8 @@
           </p:nvSpPr>
           <p:spPr>
             <a:xfrm rot="-1080000">
-              <a:off x="4328178" y="3349373"/>
-              <a:ext cx="573237" cy="65379"/>
+              <a:off x="4253295" y="3258881"/>
+              <a:ext cx="638434" cy="72786"/>
             </a:xfrm>
             <a:prstGeom prst="rect">
               <a:avLst/>
@@ -5561,7 +5561,7 @@
                 </a:spcAft>
               </a:pPr>
               <a:r>
-                <a:rPr sz="720" i="0" b="0">
+                <a:rPr sz="800" i="0" b="0">
                   <a:solidFill>
                     <a:srgbClr val="262626">
                       <a:alpha val="100000"/>
@@ -5583,15 +5583,15 @@
           </p:nvSpPr>
           <p:spPr>
             <a:xfrm>
-              <a:off x="640695" y="853121"/>
-              <a:ext cx="0" cy="2358039"/>
+              <a:off x="672960" y="911466"/>
+              <a:ext cx="0" cy="2193616"/>
             </a:xfrm>
             <a:custGeom>
               <a:avLst/>
               <a:pathLst>
-                <a:path w="0" h="2358039">
+                <a:path w="0" h="2193616">
                   <a:moveTo>
-                    <a:pt x="0" y="2358039"/>
+                    <a:pt x="0" y="2193616"/>
                   </a:moveTo>
                   <a:lnTo>
                     <a:pt x="0" y="0"/>
@@ -5623,8 +5623,8 @@
           </p:nvSpPr>
           <p:spPr>
             <a:xfrm>
-              <a:off x="538702" y="3178470"/>
-              <a:ext cx="50749" cy="65379"/>
+              <a:off x="559514" y="3068689"/>
+              <a:ext cx="56509" cy="72786"/>
             </a:xfrm>
             <a:prstGeom prst="rect">
               <a:avLst/>
@@ -5644,7 +5644,7 @@
                 </a:spcAft>
               </a:pPr>
               <a:r>
-                <a:rPr sz="720" i="0" b="0">
+                <a:rPr sz="800" i="0" b="0">
                   <a:solidFill>
                     <a:srgbClr val="262626">
                       <a:alpha val="100000"/>
@@ -5666,8 +5666,8 @@
           </p:nvSpPr>
           <p:spPr>
             <a:xfrm>
-              <a:off x="487953" y="2565112"/>
-              <a:ext cx="101498" cy="65379"/>
+              <a:off x="503004" y="2498099"/>
+              <a:ext cx="113019" cy="72786"/>
             </a:xfrm>
             <a:prstGeom prst="rect">
               <a:avLst/>
@@ -5687,7 +5687,7 @@
                 </a:spcAft>
               </a:pPr>
               <a:r>
-                <a:rPr sz="720" i="0" b="0">
+                <a:rPr sz="800" i="0" b="0">
                   <a:solidFill>
                     <a:srgbClr val="262626">
                       <a:alpha val="100000"/>
@@ -5709,8 +5709,8 @@
           </p:nvSpPr>
           <p:spPr>
             <a:xfrm>
-              <a:off x="487953" y="1951753"/>
-              <a:ext cx="101498" cy="65379"/>
+              <a:off x="503004" y="1927509"/>
+              <a:ext cx="113019" cy="72786"/>
             </a:xfrm>
             <a:prstGeom prst="rect">
               <a:avLst/>
@@ -5730,7 +5730,7 @@
                 </a:spcAft>
               </a:pPr>
               <a:r>
-                <a:rPr sz="720" i="0" b="0">
+                <a:rPr sz="800" i="0" b="0">
                   <a:solidFill>
                     <a:srgbClr val="262626">
                       <a:alpha val="100000"/>
@@ -5752,8 +5752,8 @@
           </p:nvSpPr>
           <p:spPr>
             <a:xfrm>
-              <a:off x="487953" y="1338395"/>
-              <a:ext cx="101498" cy="65379"/>
+              <a:off x="503004" y="1356920"/>
+              <a:ext cx="113019" cy="72786"/>
             </a:xfrm>
             <a:prstGeom prst="rect">
               <a:avLst/>
@@ -5773,7 +5773,7 @@
                 </a:spcAft>
               </a:pPr>
               <a:r>
-                <a:rPr sz="720" i="0" b="0">
+                <a:rPr sz="800" i="0" b="0">
                   <a:solidFill>
                     <a:srgbClr val="262626">
                       <a:alpha val="100000"/>
@@ -5795,18 +5795,18 @@
           </p:nvSpPr>
           <p:spPr>
             <a:xfrm>
-              <a:off x="612226" y="3211160"/>
-              <a:ext cx="28468" cy="0"/>
+              <a:off x="641329" y="3105082"/>
+              <a:ext cx="31631" cy="0"/>
             </a:xfrm>
             <a:custGeom>
               <a:avLst/>
               <a:pathLst>
-                <a:path w="28468" h="0">
+                <a:path w="31631" h="0">
                   <a:moveTo>
                     <a:pt x="0" y="0"/>
                   </a:moveTo>
                   <a:lnTo>
-                    <a:pt x="28468" y="0"/>
+                    <a:pt x="31631" y="0"/>
                   </a:lnTo>
                 </a:path>
               </a:pathLst>
@@ -5835,18 +5835,18 @@
           </p:nvSpPr>
           <p:spPr>
             <a:xfrm>
-              <a:off x="612226" y="2597802"/>
-              <a:ext cx="28468" cy="0"/>
+              <a:off x="641329" y="2534492"/>
+              <a:ext cx="31631" cy="0"/>
             </a:xfrm>
             <a:custGeom>
               <a:avLst/>
               <a:pathLst>
-                <a:path w="28468" h="0">
+                <a:path w="31631" h="0">
                   <a:moveTo>
                     <a:pt x="0" y="0"/>
                   </a:moveTo>
                   <a:lnTo>
-                    <a:pt x="28468" y="0"/>
+                    <a:pt x="31631" y="0"/>
                   </a:lnTo>
                 </a:path>
               </a:pathLst>
@@ -5875,18 +5875,18 @@
           </p:nvSpPr>
           <p:spPr>
             <a:xfrm>
-              <a:off x="612226" y="1984443"/>
-              <a:ext cx="28468" cy="0"/>
+              <a:off x="641329" y="1963903"/>
+              <a:ext cx="31631" cy="0"/>
             </a:xfrm>
             <a:custGeom>
               <a:avLst/>
               <a:pathLst>
-                <a:path w="28468" h="0">
+                <a:path w="31631" h="0">
                   <a:moveTo>
                     <a:pt x="0" y="0"/>
                   </a:moveTo>
                   <a:lnTo>
-                    <a:pt x="28468" y="0"/>
+                    <a:pt x="31631" y="0"/>
                   </a:lnTo>
                 </a:path>
               </a:pathLst>
@@ -5915,18 +5915,18 @@
           </p:nvSpPr>
           <p:spPr>
             <a:xfrm>
-              <a:off x="612226" y="1371085"/>
-              <a:ext cx="28468" cy="0"/>
+              <a:off x="641329" y="1393313"/>
+              <a:ext cx="31631" cy="0"/>
             </a:xfrm>
             <a:custGeom>
               <a:avLst/>
               <a:pathLst>
-                <a:path w="28468" h="0">
+                <a:path w="31631" h="0">
                   <a:moveTo>
                     <a:pt x="0" y="0"/>
                   </a:moveTo>
                   <a:lnTo>
-                    <a:pt x="28468" y="0"/>
+                    <a:pt x="31631" y="0"/>
                   </a:lnTo>
                 </a:path>
               </a:pathLst>
@@ -5955,8 +5955,8 @@
           </p:nvSpPr>
           <p:spPr>
             <a:xfrm>
-              <a:off x="640695" y="503004"/>
-              <a:ext cx="3132368" cy="74432"/>
+              <a:off x="672960" y="521126"/>
+              <a:ext cx="3516873" cy="83576"/>
             </a:xfrm>
             <a:prstGeom prst="rect">
               <a:avLst/>
@@ -5976,7 +5976,7 @@
                 </a:spcAft>
               </a:pPr>
               <a:r>
-                <a:rPr sz="819" i="0" b="0">
+                <a:rPr sz="919" i="0" b="0">
                   <a:solidFill>
                     <a:srgbClr val="4D4D4D">
                       <a:alpha val="100000"/>
@@ -5998,8 +5998,8 @@
           </p:nvSpPr>
           <p:spPr>
             <a:xfrm>
-              <a:off x="640695" y="328384"/>
-              <a:ext cx="2124699" cy="90982"/>
+              <a:off x="672960" y="328384"/>
+              <a:ext cx="2337480" cy="100035"/>
             </a:xfrm>
             <a:prstGeom prst="rect">
               <a:avLst/>
@@ -6019,7 +6019,7 @@
                 </a:spcAft>
               </a:pPr>
               <a:r>
-                <a:rPr sz="1000" i="0" b="1">
+                <a:rPr sz="1100" i="0" b="1">
                   <a:solidFill>
                     <a:srgbClr val="000000">
                       <a:alpha val="100000"/>
@@ -6041,8 +6041,8 @@
           </p:nvSpPr>
           <p:spPr>
             <a:xfrm>
-              <a:off x="335163" y="323681"/>
-              <a:ext cx="84764" cy="109179"/>
+              <a:off x="331546" y="318315"/>
+              <a:ext cx="91805" cy="118231"/>
             </a:xfrm>
             <a:prstGeom prst="rect">
               <a:avLst/>
@@ -6062,7 +6062,7 @@
                 </a:spcAft>
               </a:pPr>
               <a:r>
-                <a:rPr sz="1200" i="0" b="1">
+                <a:rPr sz="1300" i="0" b="1">
                   <a:solidFill>
                     <a:srgbClr val="000000">
                       <a:alpha val="100000"/>
@@ -6084,8 +6084,8 @@
           </p:nvSpPr>
           <p:spPr>
             <a:xfrm>
-              <a:off x="5951923" y="853121"/>
-              <a:ext cx="2213685" cy="2358039"/>
+              <a:off x="6003501" y="911466"/>
+              <a:ext cx="2184733" cy="2193616"/>
             </a:xfrm>
             <a:prstGeom prst="rect">
               <a:avLst/>
@@ -6110,15 +6110,15 @@
           </p:nvSpPr>
           <p:spPr>
             <a:xfrm>
-              <a:off x="6052545" y="853121"/>
-              <a:ext cx="0" cy="2358039"/>
+              <a:off x="6102807" y="911466"/>
+              <a:ext cx="0" cy="2193616"/>
             </a:xfrm>
             <a:custGeom>
               <a:avLst/>
               <a:pathLst>
-                <a:path w="0" h="2358039">
+                <a:path w="0" h="2193616">
                   <a:moveTo>
-                    <a:pt x="0" y="2358039"/>
+                    <a:pt x="0" y="2193616"/>
                   </a:moveTo>
                   <a:lnTo>
                     <a:pt x="0" y="0"/>
@@ -6153,18 +6153,18 @@
           </p:nvSpPr>
           <p:spPr>
             <a:xfrm>
-              <a:off x="6437195" y="2769028"/>
-              <a:ext cx="1088899" cy="0"/>
+              <a:off x="6482426" y="2693779"/>
+              <a:ext cx="1074657" cy="0"/>
             </a:xfrm>
             <a:custGeom>
               <a:avLst/>
               <a:pathLst>
-                <a:path w="1088899" h="0">
+                <a:path w="1074657" h="0">
                   <a:moveTo>
                     <a:pt x="0" y="0"/>
                   </a:moveTo>
                   <a:lnTo>
-                    <a:pt x="1088899" y="0"/>
+                    <a:pt x="1074657" y="0"/>
                   </a:lnTo>
                 </a:path>
               </a:pathLst>
@@ -6193,18 +6193,18 @@
           </p:nvSpPr>
           <p:spPr>
             <a:xfrm>
-              <a:off x="6648441" y="2032140"/>
-              <a:ext cx="1416545" cy="0"/>
+              <a:off x="6690909" y="2008274"/>
+              <a:ext cx="1398018" cy="0"/>
             </a:xfrm>
             <a:custGeom>
               <a:avLst/>
               <a:pathLst>
-                <a:path w="1416545" h="0">
+                <a:path w="1398018" h="0">
                   <a:moveTo>
                     <a:pt x="0" y="0"/>
                   </a:moveTo>
                   <a:lnTo>
-                    <a:pt x="1416545" y="0"/>
+                    <a:pt x="1398018" y="0"/>
                   </a:lnTo>
                 </a:path>
               </a:pathLst>
@@ -6233,18 +6233,18 @@
           </p:nvSpPr>
           <p:spPr>
             <a:xfrm>
-              <a:off x="6698200" y="1295253"/>
-              <a:ext cx="1334202" cy="0"/>
+              <a:off x="6740018" y="1322769"/>
+              <a:ext cx="1316752" cy="0"/>
             </a:xfrm>
             <a:custGeom>
               <a:avLst/>
               <a:pathLst>
-                <a:path w="1334202" h="0">
+                <a:path w="1316752" h="0">
                   <a:moveTo>
                     <a:pt x="0" y="0"/>
                   </a:moveTo>
                   <a:lnTo>
-                    <a:pt x="1334202" y="0"/>
+                    <a:pt x="1316752" y="0"/>
                   </a:lnTo>
                 </a:path>
               </a:pathLst>
@@ -6273,8 +6273,8 @@
           </p:nvSpPr>
           <p:spPr>
             <a:xfrm>
-              <a:off x="6905186" y="2736890"/>
-              <a:ext cx="64276" cy="64276"/>
+              <a:off x="6943467" y="2661232"/>
+              <a:ext cx="65094" cy="65094"/>
             </a:xfrm>
             <a:prstGeom prst="ellipse">
               <a:avLst/>
@@ -6284,7 +6284,7 @@
                 <a:alpha val="100000"/>
               </a:srgbClr>
             </a:solidFill>
-            <a:ln w="7363" cap="rnd">
+            <a:ln w="8181" cap="rnd">
               <a:solidFill>
                 <a:srgbClr val="009E73">
                   <a:alpha val="100000"/>
@@ -6308,8 +6308,8 @@
           </p:nvSpPr>
           <p:spPr>
             <a:xfrm>
-              <a:off x="7256923" y="2000002"/>
-              <a:ext cx="64276" cy="64276"/>
+              <a:off x="7290604" y="1975727"/>
+              <a:ext cx="65094" cy="65094"/>
             </a:xfrm>
             <a:prstGeom prst="ellipse">
               <a:avLst/>
@@ -6319,7 +6319,7 @@
                 <a:alpha val="100000"/>
               </a:srgbClr>
             </a:solidFill>
-            <a:ln w="7363" cap="rnd">
+            <a:ln w="8181" cap="rnd">
               <a:solidFill>
                 <a:srgbClr val="E69F00">
                   <a:alpha val="100000"/>
@@ -6343,8 +6343,8 @@
           </p:nvSpPr>
           <p:spPr>
             <a:xfrm>
-              <a:off x="7273349" y="1263115"/>
-              <a:ext cx="64276" cy="64276"/>
+              <a:off x="7306815" y="1290222"/>
+              <a:ext cx="65094" cy="65094"/>
             </a:xfrm>
             <a:prstGeom prst="ellipse">
               <a:avLst/>
@@ -6354,7 +6354,7 @@
                 <a:alpha val="100000"/>
               </a:srgbClr>
             </a:solidFill>
-            <a:ln w="7363" cap="rnd">
+            <a:ln w="8181" cap="rnd">
               <a:solidFill>
                 <a:srgbClr val="0072B2">
                   <a:alpha val="100000"/>
@@ -6378,7 +6378,7 @@
           </p:nvSpPr>
           <p:spPr>
             <a:xfrm>
-              <a:off x="6853017" y="2644852"/>
+              <a:off x="6891707" y="2569604"/>
               <a:ext cx="168615" cy="62087"/>
             </a:xfrm>
             <a:prstGeom prst="rect">
@@ -6421,7 +6421,7 @@
           </p:nvSpPr>
           <p:spPr>
             <a:xfrm>
-              <a:off x="7204753" y="1907965"/>
+              <a:off x="7238843" y="1884098"/>
               <a:ext cx="168615" cy="62087"/>
             </a:xfrm>
             <a:prstGeom prst="rect">
@@ -6464,7 +6464,7 @@
           </p:nvSpPr>
           <p:spPr>
             <a:xfrm>
-              <a:off x="7221180" y="1171078"/>
+              <a:off x="7255055" y="1198593"/>
               <a:ext cx="168615" cy="62087"/>
             </a:xfrm>
             <a:prstGeom prst="rect">
@@ -6507,8 +6507,8 @@
           </p:nvSpPr>
           <p:spPr>
             <a:xfrm>
-              <a:off x="8222545" y="853121"/>
-              <a:ext cx="2213685" cy="2358039"/>
+              <a:off x="8251497" y="911466"/>
+              <a:ext cx="2184733" cy="2193616"/>
             </a:xfrm>
             <a:prstGeom prst="rect">
               <a:avLst/>
@@ -6533,15 +6533,15 @@
           </p:nvSpPr>
           <p:spPr>
             <a:xfrm>
-              <a:off x="8323167" y="853121"/>
-              <a:ext cx="0" cy="2358039"/>
+              <a:off x="8350803" y="911466"/>
+              <a:ext cx="0" cy="2193616"/>
             </a:xfrm>
             <a:custGeom>
               <a:avLst/>
               <a:pathLst>
-                <a:path w="0" h="2358039">
+                <a:path w="0" h="2193616">
                   <a:moveTo>
-                    <a:pt x="0" y="2358039"/>
+                    <a:pt x="0" y="2193616"/>
                   </a:moveTo>
                   <a:lnTo>
                     <a:pt x="0" y="0"/>
@@ -6576,18 +6576,18 @@
           </p:nvSpPr>
           <p:spPr>
             <a:xfrm>
-              <a:off x="8591578" y="2769028"/>
-              <a:ext cx="965877" cy="0"/>
+              <a:off x="8615703" y="2693779"/>
+              <a:ext cx="953244" cy="0"/>
             </a:xfrm>
             <a:custGeom>
               <a:avLst/>
               <a:pathLst>
-                <a:path w="965877" h="0">
+                <a:path w="953244" h="0">
                   <a:moveTo>
                     <a:pt x="0" y="0"/>
                   </a:moveTo>
                   <a:lnTo>
-                    <a:pt x="965877" y="0"/>
+                    <a:pt x="953244" y="0"/>
                   </a:lnTo>
                 </a:path>
               </a:pathLst>
@@ -6616,18 +6616,18 @@
           </p:nvSpPr>
           <p:spPr>
             <a:xfrm>
-              <a:off x="8396541" y="2032140"/>
-              <a:ext cx="1307006" cy="0"/>
+              <a:off x="8423218" y="2008274"/>
+              <a:ext cx="1289912" cy="0"/>
             </a:xfrm>
             <a:custGeom>
               <a:avLst/>
               <a:pathLst>
-                <a:path w="1307006" h="0">
+                <a:path w="1289912" h="0">
                   <a:moveTo>
                     <a:pt x="0" y="0"/>
                   </a:moveTo>
                   <a:lnTo>
-                    <a:pt x="1307006" y="0"/>
+                    <a:pt x="1289912" y="0"/>
                   </a:lnTo>
                 </a:path>
               </a:pathLst>
@@ -6656,18 +6656,18 @@
           </p:nvSpPr>
           <p:spPr>
             <a:xfrm>
-              <a:off x="8640714" y="1295253"/>
-              <a:ext cx="1139168" cy="0"/>
+              <a:off x="8664197" y="1322769"/>
+              <a:ext cx="1124269" cy="0"/>
             </a:xfrm>
             <a:custGeom>
               <a:avLst/>
               <a:pathLst>
-                <a:path w="1139168" h="0">
+                <a:path w="1124269" h="0">
                   <a:moveTo>
                     <a:pt x="0" y="0"/>
                   </a:moveTo>
                   <a:lnTo>
-                    <a:pt x="1139168" y="0"/>
+                    <a:pt x="1124269" y="0"/>
                   </a:lnTo>
                 </a:path>
               </a:pathLst>
@@ -6696,8 +6696,8 @@
           </p:nvSpPr>
           <p:spPr>
             <a:xfrm>
-              <a:off x="9005593" y="2736890"/>
-              <a:ext cx="64276" cy="64276"/>
+              <a:off x="9023474" y="2661232"/>
+              <a:ext cx="65094" cy="65094"/>
             </a:xfrm>
             <a:prstGeom prst="ellipse">
               <a:avLst/>
@@ -6707,7 +6707,7 @@
                 <a:alpha val="100000"/>
               </a:srgbClr>
             </a:solidFill>
-            <a:ln w="7363" cap="rnd">
+            <a:ln w="8181" cap="rnd">
               <a:solidFill>
                 <a:srgbClr val="009E73">
                   <a:alpha val="100000"/>
@@ -6731,8 +6731,8 @@
           </p:nvSpPr>
           <p:spPr>
             <a:xfrm>
-              <a:off x="8949684" y="2000002"/>
-              <a:ext cx="64276" cy="64276"/>
+              <a:off x="8968297" y="1975727"/>
+              <a:ext cx="65094" cy="65094"/>
             </a:xfrm>
             <a:prstGeom prst="ellipse">
               <a:avLst/>
@@ -6742,7 +6742,7 @@
                 <a:alpha val="100000"/>
               </a:srgbClr>
             </a:solidFill>
-            <a:ln w="7363" cap="rnd">
+            <a:ln w="8181" cap="rnd">
               <a:solidFill>
                 <a:srgbClr val="E69F00">
                   <a:alpha val="100000"/>
@@ -6766,8 +6766,8 @@
           </p:nvSpPr>
           <p:spPr>
             <a:xfrm>
-              <a:off x="9129001" y="1263115"/>
-              <a:ext cx="64276" cy="64276"/>
+              <a:off x="9145269" y="1290222"/>
+              <a:ext cx="65094" cy="65094"/>
             </a:xfrm>
             <a:prstGeom prst="ellipse">
               <a:avLst/>
@@ -6777,7 +6777,7 @@
                 <a:alpha val="100000"/>
               </a:srgbClr>
             </a:solidFill>
-            <a:ln w="7363" cap="rnd">
+            <a:ln w="8181" cap="rnd">
               <a:solidFill>
                 <a:srgbClr val="0072B2">
                   <a:alpha val="100000"/>
@@ -6801,7 +6801,7 @@
           </p:nvSpPr>
           <p:spPr>
             <a:xfrm>
-              <a:off x="8953423" y="2644852"/>
+              <a:off x="8971714" y="2569604"/>
               <a:ext cx="168615" cy="62087"/>
             </a:xfrm>
             <a:prstGeom prst="rect">
@@ -6844,7 +6844,7 @@
           </p:nvSpPr>
           <p:spPr>
             <a:xfrm>
-              <a:off x="8897515" y="1907965"/>
+              <a:off x="8916537" y="1884098"/>
               <a:ext cx="168615" cy="62087"/>
             </a:xfrm>
             <a:prstGeom prst="rect">
@@ -6887,7 +6887,7 @@
           </p:nvSpPr>
           <p:spPr>
             <a:xfrm>
-              <a:off x="9076832" y="1171078"/>
+              <a:off x="9093508" y="1198593"/>
               <a:ext cx="168615" cy="62087"/>
             </a:xfrm>
             <a:prstGeom prst="rect">
@@ -6930,8 +6930,8 @@
           </p:nvSpPr>
           <p:spPr>
             <a:xfrm>
-              <a:off x="5997472" y="713754"/>
-              <a:ext cx="1219352" cy="81838"/>
+              <a:off x="6054111" y="756522"/>
+              <a:ext cx="1355140" cy="90982"/>
             </a:xfrm>
             <a:prstGeom prst="rect">
               <a:avLst/>
@@ -6951,7 +6951,7 @@
                 </a:spcAft>
               </a:pPr>
               <a:r>
-                <a:rPr sz="900" i="0" b="1">
+                <a:rPr sz="1000" i="0" b="1">
                   <a:solidFill>
                     <a:srgbClr val="1A1A1A">
                       <a:alpha val="100000"/>
@@ -6973,8 +6973,8 @@
           </p:nvSpPr>
           <p:spPr>
             <a:xfrm>
-              <a:off x="8268094" y="713754"/>
-              <a:ext cx="704910" cy="81838"/>
+              <a:off x="8302107" y="756522"/>
+              <a:ext cx="783732" cy="90982"/>
             </a:xfrm>
             <a:prstGeom prst="rect">
               <a:avLst/>
@@ -6994,7 +6994,7 @@
                 </a:spcAft>
               </a:pPr>
               <a:r>
-                <a:rPr sz="900" i="0" b="1">
+                <a:rPr sz="1000" i="0" b="1">
                   <a:solidFill>
                     <a:srgbClr val="1A1A1A">
                       <a:alpha val="100000"/>
@@ -7016,18 +7016,18 @@
           </p:nvSpPr>
           <p:spPr>
             <a:xfrm>
-              <a:off x="5951923" y="3211160"/>
-              <a:ext cx="2213685" cy="0"/>
+              <a:off x="6003501" y="3105082"/>
+              <a:ext cx="2184733" cy="0"/>
             </a:xfrm>
             <a:custGeom>
               <a:avLst/>
               <a:pathLst>
-                <a:path w="2213685" h="0">
+                <a:path w="2184733" h="0">
                   <a:moveTo>
                     <a:pt x="0" y="0"/>
                   </a:moveTo>
                   <a:lnTo>
-                    <a:pt x="2213685" y="0"/>
+                    <a:pt x="2184733" y="0"/>
                   </a:lnTo>
                 </a:path>
               </a:pathLst>
@@ -7056,15 +7056,15 @@
           </p:nvSpPr>
           <p:spPr>
             <a:xfrm>
-              <a:off x="6052545" y="3211160"/>
-              <a:ext cx="0" cy="28468"/>
+              <a:off x="6102807" y="3105082"/>
+              <a:ext cx="0" cy="31631"/>
             </a:xfrm>
             <a:custGeom>
               <a:avLst/>
               <a:pathLst>
-                <a:path w="0" h="28468">
+                <a:path w="0" h="31631">
                   <a:moveTo>
-                    <a:pt x="0" y="28468"/>
+                    <a:pt x="0" y="31631"/>
                   </a:moveTo>
                   <a:lnTo>
                     <a:pt x="0" y="0"/>
@@ -7096,15 +7096,15 @@
           </p:nvSpPr>
           <p:spPr>
             <a:xfrm>
-              <a:off x="6539987" y="3211160"/>
-              <a:ext cx="0" cy="28468"/>
+              <a:off x="6583873" y="3105082"/>
+              <a:ext cx="0" cy="31631"/>
             </a:xfrm>
             <a:custGeom>
               <a:avLst/>
               <a:pathLst>
-                <a:path w="0" h="28468">
+                <a:path w="0" h="31631">
                   <a:moveTo>
-                    <a:pt x="0" y="28468"/>
+                    <a:pt x="0" y="31631"/>
                   </a:moveTo>
                   <a:lnTo>
                     <a:pt x="0" y="0"/>
@@ -7136,15 +7136,15 @@
           </p:nvSpPr>
           <p:spPr>
             <a:xfrm>
-              <a:off x="7027428" y="3211160"/>
-              <a:ext cx="0" cy="28468"/>
+              <a:off x="7064940" y="3105082"/>
+              <a:ext cx="0" cy="31631"/>
             </a:xfrm>
             <a:custGeom>
               <a:avLst/>
               <a:pathLst>
-                <a:path w="0" h="28468">
+                <a:path w="0" h="31631">
                   <a:moveTo>
-                    <a:pt x="0" y="28468"/>
+                    <a:pt x="0" y="31631"/>
                   </a:moveTo>
                   <a:lnTo>
                     <a:pt x="0" y="0"/>
@@ -7176,15 +7176,15 @@
           </p:nvSpPr>
           <p:spPr>
             <a:xfrm>
-              <a:off x="7514870" y="3211160"/>
-              <a:ext cx="0" cy="28468"/>
+              <a:off x="7546007" y="3105082"/>
+              <a:ext cx="0" cy="31631"/>
             </a:xfrm>
             <a:custGeom>
               <a:avLst/>
               <a:pathLst>
-                <a:path w="0" h="28468">
+                <a:path w="0" h="31631">
                   <a:moveTo>
-                    <a:pt x="0" y="28468"/>
+                    <a:pt x="0" y="31631"/>
                   </a:moveTo>
                   <a:lnTo>
                     <a:pt x="0" y="0"/>
@@ -7216,15 +7216,15 @@
           </p:nvSpPr>
           <p:spPr>
             <a:xfrm>
-              <a:off x="8002312" y="3211160"/>
-              <a:ext cx="0" cy="28468"/>
+              <a:off x="8027073" y="3105082"/>
+              <a:ext cx="0" cy="31631"/>
             </a:xfrm>
             <a:custGeom>
               <a:avLst/>
               <a:pathLst>
-                <a:path w="0" h="28468">
+                <a:path w="0" h="31631">
                   <a:moveTo>
-                    <a:pt x="0" y="28468"/>
+                    <a:pt x="0" y="31631"/>
                   </a:moveTo>
                   <a:lnTo>
                     <a:pt x="0" y="0"/>
@@ -7256,8 +7256,8 @@
           </p:nvSpPr>
           <p:spPr>
             <a:xfrm>
-              <a:off x="5989131" y="3262403"/>
-              <a:ext cx="126827" cy="65379"/>
+              <a:off x="6032169" y="3162019"/>
+              <a:ext cx="141274" cy="72786"/>
             </a:xfrm>
             <a:prstGeom prst="rect">
               <a:avLst/>
@@ -7277,7 +7277,7 @@
                 </a:spcAft>
               </a:pPr>
               <a:r>
-                <a:rPr sz="720" i="0" b="0">
+                <a:rPr sz="800" i="0" b="0">
                   <a:solidFill>
                     <a:srgbClr val="262626">
                       <a:alpha val="100000"/>
@@ -7299,8 +7299,8 @@
           </p:nvSpPr>
           <p:spPr>
             <a:xfrm>
-              <a:off x="6476573" y="3262403"/>
-              <a:ext cx="126827" cy="65379"/>
+              <a:off x="6513236" y="3162019"/>
+              <a:ext cx="141274" cy="72786"/>
             </a:xfrm>
             <a:prstGeom prst="rect">
               <a:avLst/>
@@ -7320,7 +7320,7 @@
                 </a:spcAft>
               </a:pPr>
               <a:r>
-                <a:rPr sz="720" i="0" b="0">
+                <a:rPr sz="800" i="0" b="0">
                   <a:solidFill>
                     <a:srgbClr val="262626">
                       <a:alpha val="100000"/>
@@ -7342,8 +7342,8 @@
           </p:nvSpPr>
           <p:spPr>
             <a:xfrm>
-              <a:off x="6964015" y="3262403"/>
-              <a:ext cx="126827" cy="65379"/>
+              <a:off x="6994303" y="3162019"/>
+              <a:ext cx="141274" cy="72786"/>
             </a:xfrm>
             <a:prstGeom prst="rect">
               <a:avLst/>
@@ -7363,7 +7363,7 @@
                 </a:spcAft>
               </a:pPr>
               <a:r>
-                <a:rPr sz="720" i="0" b="0">
+                <a:rPr sz="800" i="0" b="0">
                   <a:solidFill>
                     <a:srgbClr val="262626">
                       <a:alpha val="100000"/>
@@ -7385,8 +7385,8 @@
           </p:nvSpPr>
           <p:spPr>
             <a:xfrm>
-              <a:off x="7451456" y="3262403"/>
-              <a:ext cx="126827" cy="65379"/>
+              <a:off x="7475369" y="3162019"/>
+              <a:ext cx="141274" cy="72786"/>
             </a:xfrm>
             <a:prstGeom prst="rect">
               <a:avLst/>
@@ -7406,7 +7406,7 @@
                 </a:spcAft>
               </a:pPr>
               <a:r>
-                <a:rPr sz="720" i="0" b="0">
+                <a:rPr sz="800" i="0" b="0">
                   <a:solidFill>
                     <a:srgbClr val="262626">
                       <a:alpha val="100000"/>
@@ -7428,8 +7428,8 @@
           </p:nvSpPr>
           <p:spPr>
             <a:xfrm>
-              <a:off x="7938898" y="3262403"/>
-              <a:ext cx="126827" cy="65379"/>
+              <a:off x="7956436" y="3162019"/>
+              <a:ext cx="141274" cy="72786"/>
             </a:xfrm>
             <a:prstGeom prst="rect">
               <a:avLst/>
@@ -7449,7 +7449,7 @@
                 </a:spcAft>
               </a:pPr>
               <a:r>
-                <a:rPr sz="720" i="0" b="0">
+                <a:rPr sz="800" i="0" b="0">
                   <a:solidFill>
                     <a:srgbClr val="262626">
                       <a:alpha val="100000"/>
@@ -7471,18 +7471,18 @@
           </p:nvSpPr>
           <p:spPr>
             <a:xfrm>
-              <a:off x="8222545" y="3211160"/>
-              <a:ext cx="2213685" cy="0"/>
+              <a:off x="8251497" y="3105082"/>
+              <a:ext cx="2184733" cy="0"/>
             </a:xfrm>
             <a:custGeom>
               <a:avLst/>
               <a:pathLst>
-                <a:path w="2213685" h="0">
+                <a:path w="2184733" h="0">
                   <a:moveTo>
                     <a:pt x="0" y="0"/>
                   </a:moveTo>
                   <a:lnTo>
-                    <a:pt x="2213685" y="0"/>
+                    <a:pt x="2184733" y="0"/>
                   </a:lnTo>
                 </a:path>
               </a:pathLst>
@@ -7511,15 +7511,15 @@
           </p:nvSpPr>
           <p:spPr>
             <a:xfrm>
-              <a:off x="8323167" y="3211160"/>
-              <a:ext cx="0" cy="28468"/>
+              <a:off x="8350803" y="3105082"/>
+              <a:ext cx="0" cy="31631"/>
             </a:xfrm>
             <a:custGeom>
               <a:avLst/>
               <a:pathLst>
-                <a:path w="0" h="28468">
+                <a:path w="0" h="31631">
                   <a:moveTo>
-                    <a:pt x="0" y="28468"/>
+                    <a:pt x="0" y="31631"/>
                   </a:moveTo>
                   <a:lnTo>
                     <a:pt x="0" y="0"/>
@@ -7551,15 +7551,15 @@
           </p:nvSpPr>
           <p:spPr>
             <a:xfrm>
-              <a:off x="8810608" y="3211160"/>
-              <a:ext cx="0" cy="28468"/>
+              <a:off x="8831869" y="3105082"/>
+              <a:ext cx="0" cy="31631"/>
             </a:xfrm>
             <a:custGeom>
               <a:avLst/>
               <a:pathLst>
-                <a:path w="0" h="28468">
+                <a:path w="0" h="31631">
                   <a:moveTo>
-                    <a:pt x="0" y="28468"/>
+                    <a:pt x="0" y="31631"/>
                   </a:moveTo>
                   <a:lnTo>
                     <a:pt x="0" y="0"/>
@@ -7591,15 +7591,15 @@
           </p:nvSpPr>
           <p:spPr>
             <a:xfrm>
-              <a:off x="9298050" y="3211160"/>
-              <a:ext cx="0" cy="28468"/>
+              <a:off x="9312936" y="3105082"/>
+              <a:ext cx="0" cy="31631"/>
             </a:xfrm>
             <a:custGeom>
               <a:avLst/>
               <a:pathLst>
-                <a:path w="0" h="28468">
+                <a:path w="0" h="31631">
                   <a:moveTo>
-                    <a:pt x="0" y="28468"/>
+                    <a:pt x="0" y="31631"/>
                   </a:moveTo>
                   <a:lnTo>
                     <a:pt x="0" y="0"/>
@@ -7631,15 +7631,15 @@
           </p:nvSpPr>
           <p:spPr>
             <a:xfrm>
-              <a:off x="9785492" y="3211160"/>
-              <a:ext cx="0" cy="28468"/>
+              <a:off x="9794003" y="3105082"/>
+              <a:ext cx="0" cy="31631"/>
             </a:xfrm>
             <a:custGeom>
               <a:avLst/>
               <a:pathLst>
-                <a:path w="0" h="28468">
+                <a:path w="0" h="31631">
                   <a:moveTo>
-                    <a:pt x="0" y="28468"/>
+                    <a:pt x="0" y="31631"/>
                   </a:moveTo>
                   <a:lnTo>
                     <a:pt x="0" y="0"/>
@@ -7671,15 +7671,15 @@
           </p:nvSpPr>
           <p:spPr>
             <a:xfrm>
-              <a:off x="10272934" y="3211160"/>
-              <a:ext cx="0" cy="28468"/>
+              <a:off x="10275069" y="3105082"/>
+              <a:ext cx="0" cy="31631"/>
             </a:xfrm>
             <a:custGeom>
               <a:avLst/>
               <a:pathLst>
-                <a:path w="0" h="28468">
+                <a:path w="0" h="31631">
                   <a:moveTo>
-                    <a:pt x="0" y="28468"/>
+                    <a:pt x="0" y="31631"/>
                   </a:moveTo>
                   <a:lnTo>
                     <a:pt x="0" y="0"/>
@@ -7711,8 +7711,8 @@
           </p:nvSpPr>
           <p:spPr>
             <a:xfrm>
-              <a:off x="8259753" y="3262403"/>
-              <a:ext cx="126827" cy="65379"/>
+              <a:off x="8280165" y="3162019"/>
+              <a:ext cx="141274" cy="72786"/>
             </a:xfrm>
             <a:prstGeom prst="rect">
               <a:avLst/>
@@ -7732,7 +7732,7 @@
                 </a:spcAft>
               </a:pPr>
               <a:r>
-                <a:rPr sz="720" i="0" b="0">
+                <a:rPr sz="800" i="0" b="0">
                   <a:solidFill>
                     <a:srgbClr val="262626">
                       <a:alpha val="100000"/>
@@ -7754,8 +7754,8 @@
           </p:nvSpPr>
           <p:spPr>
             <a:xfrm>
-              <a:off x="8747195" y="3262403"/>
-              <a:ext cx="126827" cy="65379"/>
+              <a:off x="8761232" y="3162019"/>
+              <a:ext cx="141274" cy="72786"/>
             </a:xfrm>
             <a:prstGeom prst="rect">
               <a:avLst/>
@@ -7775,7 +7775,7 @@
                 </a:spcAft>
               </a:pPr>
               <a:r>
-                <a:rPr sz="720" i="0" b="0">
+                <a:rPr sz="800" i="0" b="0">
                   <a:solidFill>
                     <a:srgbClr val="262626">
                       <a:alpha val="100000"/>
@@ -7797,8 +7797,8 @@
           </p:nvSpPr>
           <p:spPr>
             <a:xfrm>
-              <a:off x="9234636" y="3262403"/>
-              <a:ext cx="126827" cy="65379"/>
+              <a:off x="9242299" y="3162019"/>
+              <a:ext cx="141274" cy="72786"/>
             </a:xfrm>
             <a:prstGeom prst="rect">
               <a:avLst/>
@@ -7818,7 +7818,7 @@
                 </a:spcAft>
               </a:pPr>
               <a:r>
-                <a:rPr sz="720" i="0" b="0">
+                <a:rPr sz="800" i="0" b="0">
                   <a:solidFill>
                     <a:srgbClr val="262626">
                       <a:alpha val="100000"/>
@@ -7840,8 +7840,8 @@
           </p:nvSpPr>
           <p:spPr>
             <a:xfrm>
-              <a:off x="9722078" y="3262403"/>
-              <a:ext cx="126827" cy="65379"/>
+              <a:off x="9723365" y="3162019"/>
+              <a:ext cx="141274" cy="72786"/>
             </a:xfrm>
             <a:prstGeom prst="rect">
               <a:avLst/>
@@ -7861,7 +7861,7 @@
                 </a:spcAft>
               </a:pPr>
               <a:r>
-                <a:rPr sz="720" i="0" b="0">
+                <a:rPr sz="800" i="0" b="0">
                   <a:solidFill>
                     <a:srgbClr val="262626">
                       <a:alpha val="100000"/>
@@ -7883,8 +7883,8 @@
           </p:nvSpPr>
           <p:spPr>
             <a:xfrm>
-              <a:off x="10209520" y="3262403"/>
-              <a:ext cx="126827" cy="65379"/>
+              <a:off x="10204432" y="3162019"/>
+              <a:ext cx="141274" cy="72786"/>
             </a:xfrm>
             <a:prstGeom prst="rect">
               <a:avLst/>
@@ -7904,7 +7904,7 @@
                 </a:spcAft>
               </a:pPr>
               <a:r>
-                <a:rPr sz="720" i="0" b="0">
+                <a:rPr sz="800" i="0" b="0">
                   <a:solidFill>
                     <a:srgbClr val="262626">
                       <a:alpha val="100000"/>
@@ -7926,15 +7926,15 @@
           </p:nvSpPr>
           <p:spPr>
             <a:xfrm>
-              <a:off x="5951923" y="853121"/>
-              <a:ext cx="0" cy="2358039"/>
+              <a:off x="6003501" y="911466"/>
+              <a:ext cx="0" cy="2193616"/>
             </a:xfrm>
             <a:custGeom>
               <a:avLst/>
               <a:pathLst>
-                <a:path w="0" h="2358039">
+                <a:path w="0" h="2193616">
                   <a:moveTo>
-                    <a:pt x="0" y="2358039"/>
+                    <a:pt x="0" y="2193616"/>
                   </a:moveTo>
                   <a:lnTo>
                     <a:pt x="0" y="0"/>
@@ -7966,8 +7966,8 @@
           </p:nvSpPr>
           <p:spPr>
             <a:xfrm>
-              <a:off x="5540498" y="2736338"/>
-              <a:ext cx="360182" cy="65379"/>
+              <a:off x="5545508" y="2657386"/>
+              <a:ext cx="401055" cy="72786"/>
             </a:xfrm>
             <a:prstGeom prst="rect">
               <a:avLst/>
@@ -7987,7 +7987,7 @@
                 </a:spcAft>
               </a:pPr>
               <a:r>
-                <a:rPr sz="720" i="0" b="0">
+                <a:rPr sz="800" i="0" b="0">
                   <a:solidFill>
                     <a:srgbClr val="262626">
                       <a:alpha val="100000"/>
@@ -8009,8 +8009,8 @@
           </p:nvSpPr>
           <p:spPr>
             <a:xfrm>
-              <a:off x="5641996" y="1999451"/>
-              <a:ext cx="258683" cy="65379"/>
+              <a:off x="5658528" y="1971881"/>
+              <a:ext cx="288036" cy="72786"/>
             </a:xfrm>
             <a:prstGeom prst="rect">
               <a:avLst/>
@@ -8030,7 +8030,7 @@
                 </a:spcAft>
               </a:pPr>
               <a:r>
-                <a:rPr sz="720" i="0" b="0">
+                <a:rPr sz="800" i="0" b="0">
                   <a:solidFill>
                     <a:srgbClr val="262626">
                       <a:alpha val="100000"/>
@@ -8052,8 +8052,8 @@
           </p:nvSpPr>
           <p:spPr>
             <a:xfrm>
-              <a:off x="5327443" y="1262563"/>
-              <a:ext cx="573237" cy="65379"/>
+              <a:off x="5308130" y="1286376"/>
+              <a:ext cx="638434" cy="72786"/>
             </a:xfrm>
             <a:prstGeom prst="rect">
               <a:avLst/>
@@ -8073,7 +8073,7 @@
                 </a:spcAft>
               </a:pPr>
               <a:r>
-                <a:rPr sz="720" i="0" b="0">
+                <a:rPr sz="800" i="0" b="0">
                   <a:solidFill>
                     <a:srgbClr val="262626">
                       <a:alpha val="100000"/>
@@ -8095,18 +8095,18 @@
           </p:nvSpPr>
           <p:spPr>
             <a:xfrm>
-              <a:off x="5923455" y="2769028"/>
-              <a:ext cx="28468" cy="0"/>
+              <a:off x="5971869" y="2693779"/>
+              <a:ext cx="31631" cy="0"/>
             </a:xfrm>
             <a:custGeom>
               <a:avLst/>
               <a:pathLst>
-                <a:path w="28468" h="0">
+                <a:path w="31631" h="0">
                   <a:moveTo>
                     <a:pt x="0" y="0"/>
                   </a:moveTo>
                   <a:lnTo>
-                    <a:pt x="28468" y="0"/>
+                    <a:pt x="31631" y="0"/>
                   </a:lnTo>
                 </a:path>
               </a:pathLst>
@@ -8135,18 +8135,18 @@
           </p:nvSpPr>
           <p:spPr>
             <a:xfrm>
-              <a:off x="5923455" y="2032140"/>
-              <a:ext cx="28468" cy="0"/>
+              <a:off x="5971869" y="2008274"/>
+              <a:ext cx="31631" cy="0"/>
             </a:xfrm>
             <a:custGeom>
               <a:avLst/>
               <a:pathLst>
-                <a:path w="28468" h="0">
+                <a:path w="31631" h="0">
                   <a:moveTo>
                     <a:pt x="0" y="0"/>
                   </a:moveTo>
                   <a:lnTo>
-                    <a:pt x="28468" y="0"/>
+                    <a:pt x="31631" y="0"/>
                   </a:lnTo>
                 </a:path>
               </a:pathLst>
@@ -8175,18 +8175,18 @@
           </p:nvSpPr>
           <p:spPr>
             <a:xfrm>
-              <a:off x="5923455" y="1295253"/>
-              <a:ext cx="28468" cy="0"/>
+              <a:off x="5971869" y="1322769"/>
+              <a:ext cx="31631" cy="0"/>
             </a:xfrm>
             <a:custGeom>
               <a:avLst/>
               <a:pathLst>
-                <a:path w="28468" h="0">
+                <a:path w="31631" h="0">
                   <a:moveTo>
                     <a:pt x="0" y="0"/>
                   </a:moveTo>
                   <a:lnTo>
-                    <a:pt x="28468" y="0"/>
+                    <a:pt x="31631" y="0"/>
                   </a:lnTo>
                 </a:path>
               </a:pathLst>
@@ -8215,8 +8215,8 @@
           </p:nvSpPr>
           <p:spPr>
             <a:xfrm>
-              <a:off x="7400240" y="3548367"/>
-              <a:ext cx="1587672" cy="81838"/>
+              <a:off x="7337149" y="3480511"/>
+              <a:ext cx="1765432" cy="90982"/>
             </a:xfrm>
             <a:prstGeom prst="rect">
               <a:avLst/>
@@ -8236,7 +8236,7 @@
                 </a:spcAft>
               </a:pPr>
               <a:r>
-                <a:rPr sz="900" i="0" b="0">
+                <a:rPr sz="1000" i="0" b="0">
                   <a:solidFill>
                     <a:srgbClr val="0D0D0D">
                       <a:alpha val="100000"/>
@@ -8258,8 +8258,8 @@
           </p:nvSpPr>
           <p:spPr>
             <a:xfrm>
-              <a:off x="5951923" y="503004"/>
-              <a:ext cx="3421136" cy="74432"/>
+              <a:off x="6003501" y="521126"/>
+              <a:ext cx="3840571" cy="83576"/>
             </a:xfrm>
             <a:prstGeom prst="rect">
               <a:avLst/>
@@ -8279,7 +8279,7 @@
                 </a:spcAft>
               </a:pPr>
               <a:r>
-                <a:rPr sz="819" i="0" b="0">
+                <a:rPr sz="919" i="0" b="0">
                   <a:solidFill>
                     <a:srgbClr val="4D4D4D">
                       <a:alpha val="100000"/>
@@ -8301,8 +8301,8 @@
           </p:nvSpPr>
           <p:spPr>
             <a:xfrm>
-              <a:off x="5951923" y="328384"/>
-              <a:ext cx="2499055" cy="90982"/>
+              <a:off x="6003501" y="328384"/>
+              <a:ext cx="2749052" cy="100035"/>
             </a:xfrm>
             <a:prstGeom prst="rect">
               <a:avLst/>
@@ -8322,7 +8322,7 @@
                 </a:spcAft>
               </a:pPr>
               <a:r>
-                <a:rPr sz="1000" i="0" b="1">
+                <a:rPr sz="1100" i="0" b="1">
                   <a:solidFill>
                     <a:srgbClr val="000000">
                       <a:alpha val="100000"/>
@@ -8344,8 +8344,8 @@
           </p:nvSpPr>
           <p:spPr>
             <a:xfrm>
-              <a:off x="5306444" y="323681"/>
-              <a:ext cx="93085" cy="109179"/>
+              <a:off x="5283341" y="318315"/>
+              <a:ext cx="100858" cy="118231"/>
             </a:xfrm>
             <a:prstGeom prst="rect">
               <a:avLst/>
@@ -8365,7 +8365,7 @@
                 </a:spcAft>
               </a:pPr>
               <a:r>
-                <a:rPr sz="1200" i="0" b="1">
+                <a:rPr sz="1300" i="0" b="1">
                   <a:solidFill>
                     <a:srgbClr val="000000">
                       <a:alpha val="100000"/>
@@ -8387,8 +8387,8 @@
           </p:nvSpPr>
           <p:spPr>
             <a:xfrm>
-              <a:off x="252469" y="3730078"/>
-              <a:ext cx="4973753" cy="3332652"/>
+              <a:off x="252469" y="3674109"/>
+              <a:ext cx="4954441" cy="3388621"/>
             </a:xfrm>
             <a:prstGeom prst="rect">
               <a:avLst/>
@@ -8398,7 +8398,7 @@
                 <a:alpha val="100000"/>
               </a:srgbClr>
             </a:solidFill>
-            <a:ln w="11086" cap="rnd">
+            <a:ln w="12318" cap="rnd">
               <a:solidFill>
                 <a:srgbClr val="FFFFFF">
                   <a:alpha val="100000"/>
@@ -8422,8 +8422,8 @@
           </p:nvSpPr>
           <p:spPr>
             <a:xfrm>
-              <a:off x="5226222" y="3730078"/>
-              <a:ext cx="5311228" cy="3332652"/>
+              <a:off x="5206910" y="3674109"/>
+              <a:ext cx="5330540" cy="3388621"/>
             </a:xfrm>
             <a:prstGeom prst="rect">
               <a:avLst/>
@@ -8433,7 +8433,7 @@
                 <a:alpha val="100000"/>
               </a:srgbClr>
             </a:solidFill>
-            <a:ln w="11086" cap="rnd">
+            <a:ln w="12318" cap="rnd">
               <a:solidFill>
                 <a:srgbClr val="FFFFFF">
                   <a:alpha val="100000"/>
@@ -8457,8 +8457,8 @@
           </p:nvSpPr>
           <p:spPr>
             <a:xfrm>
-              <a:off x="640695" y="4358778"/>
-              <a:ext cx="4484307" cy="2358039"/>
+              <a:off x="672960" y="4492764"/>
+              <a:ext cx="4432729" cy="2193616"/>
             </a:xfrm>
             <a:prstGeom prst="rect">
               <a:avLst/>
@@ -8483,21 +8483,21 @@
           </p:nvSpPr>
           <p:spPr>
             <a:xfrm>
-              <a:off x="640695" y="6716817"/>
-              <a:ext cx="4484307" cy="0"/>
+              <a:off x="672960" y="6686381"/>
+              <a:ext cx="4432729" cy="0"/>
             </a:xfrm>
             <a:custGeom>
               <a:avLst/>
               <a:pathLst>
-                <a:path w="4484307" h="0">
+                <a:path w="4432729" h="0">
                   <a:moveTo>
                     <a:pt x="0" y="0"/>
                   </a:moveTo>
                   <a:lnTo>
-                    <a:pt x="4484307" y="0"/>
+                    <a:pt x="4432729" y="0"/>
                   </a:lnTo>
                   <a:lnTo>
-                    <a:pt x="4484307" y="0"/>
+                    <a:pt x="4432729" y="0"/>
                   </a:lnTo>
                 </a:path>
               </a:pathLst>
@@ -8526,21 +8526,21 @@
           </p:nvSpPr>
           <p:spPr>
             <a:xfrm>
-              <a:off x="640695" y="6130153"/>
-              <a:ext cx="4484307" cy="0"/>
+              <a:off x="672960" y="6140624"/>
+              <a:ext cx="4432729" cy="0"/>
             </a:xfrm>
             <a:custGeom>
               <a:avLst/>
               <a:pathLst>
-                <a:path w="4484307" h="0">
+                <a:path w="4432729" h="0">
                   <a:moveTo>
                     <a:pt x="0" y="0"/>
                   </a:moveTo>
                   <a:lnTo>
-                    <a:pt x="4484307" y="0"/>
+                    <a:pt x="4432729" y="0"/>
                   </a:lnTo>
                   <a:lnTo>
-                    <a:pt x="4484307" y="0"/>
+                    <a:pt x="4432729" y="0"/>
                   </a:lnTo>
                 </a:path>
               </a:pathLst>
@@ -8569,21 +8569,21 @@
           </p:nvSpPr>
           <p:spPr>
             <a:xfrm>
-              <a:off x="640695" y="5543488"/>
-              <a:ext cx="4484307" cy="0"/>
+              <a:off x="672960" y="5594866"/>
+              <a:ext cx="4432729" cy="0"/>
             </a:xfrm>
             <a:custGeom>
               <a:avLst/>
               <a:pathLst>
-                <a:path w="4484307" h="0">
+                <a:path w="4432729" h="0">
                   <a:moveTo>
                     <a:pt x="0" y="0"/>
                   </a:moveTo>
                   <a:lnTo>
-                    <a:pt x="4484307" y="0"/>
+                    <a:pt x="4432729" y="0"/>
                   </a:lnTo>
                   <a:lnTo>
-                    <a:pt x="4484307" y="0"/>
+                    <a:pt x="4432729" y="0"/>
                   </a:lnTo>
                 </a:path>
               </a:pathLst>
@@ -8612,21 +8612,21 @@
           </p:nvSpPr>
           <p:spPr>
             <a:xfrm>
-              <a:off x="640695" y="4956824"/>
-              <a:ext cx="4484307" cy="0"/>
+              <a:off x="672960" y="5049109"/>
+              <a:ext cx="4432729" cy="0"/>
             </a:xfrm>
             <a:custGeom>
               <a:avLst/>
               <a:pathLst>
-                <a:path w="4484307" h="0">
+                <a:path w="4432729" h="0">
                   <a:moveTo>
                     <a:pt x="0" y="0"/>
                   </a:moveTo>
                   <a:lnTo>
-                    <a:pt x="4484307" y="0"/>
+                    <a:pt x="4432729" y="0"/>
                   </a:lnTo>
                   <a:lnTo>
-                    <a:pt x="4484307" y="0"/>
+                    <a:pt x="4432729" y="0"/>
                   </a:lnTo>
                 </a:path>
               </a:pathLst>
@@ -8655,21 +8655,21 @@
           </p:nvSpPr>
           <p:spPr>
             <a:xfrm>
-              <a:off x="640695" y="4370160"/>
-              <a:ext cx="4484307" cy="0"/>
+              <a:off x="672960" y="4503352"/>
+              <a:ext cx="4432729" cy="0"/>
             </a:xfrm>
             <a:custGeom>
               <a:avLst/>
               <a:pathLst>
-                <a:path w="4484307" h="0">
+                <a:path w="4432729" h="0">
                   <a:moveTo>
                     <a:pt x="0" y="0"/>
                   </a:moveTo>
                   <a:lnTo>
-                    <a:pt x="4484307" y="0"/>
+                    <a:pt x="4432729" y="0"/>
                   </a:lnTo>
                   <a:lnTo>
-                    <a:pt x="4484307" y="0"/>
+                    <a:pt x="4432729" y="0"/>
                   </a:lnTo>
                 </a:path>
               </a:pathLst>
@@ -8698,8 +8698,8 @@
           </p:nvSpPr>
           <p:spPr>
             <a:xfrm>
-              <a:off x="850444" y="4898158"/>
-              <a:ext cx="448430" cy="1818659"/>
+              <a:off x="880297" y="4994533"/>
+              <a:ext cx="443272" cy="1691847"/>
             </a:xfrm>
             <a:prstGeom prst="rect">
               <a:avLst/>
@@ -8724,8 +8724,8 @@
           </p:nvSpPr>
           <p:spPr>
             <a:xfrm>
-              <a:off x="1573720" y="6716817"/>
-              <a:ext cx="448430" cy="0"/>
+              <a:off x="1595254" y="6686381"/>
+              <a:ext cx="443272" cy="0"/>
             </a:xfrm>
             <a:prstGeom prst="rect">
               <a:avLst/>
@@ -8750,8 +8750,8 @@
           </p:nvSpPr>
           <p:spPr>
             <a:xfrm>
-              <a:off x="2296995" y="5757621"/>
-              <a:ext cx="448430" cy="959196"/>
+              <a:off x="2310210" y="5794068"/>
+              <a:ext cx="443272" cy="892313"/>
             </a:xfrm>
             <a:prstGeom prst="rect">
               <a:avLst/>
@@ -8776,8 +8776,8 @@
           </p:nvSpPr>
           <p:spPr>
             <a:xfrm>
-              <a:off x="3020270" y="5637355"/>
-              <a:ext cx="448430" cy="1079462"/>
+              <a:off x="3025166" y="5682188"/>
+              <a:ext cx="443272" cy="1004193"/>
             </a:xfrm>
             <a:prstGeom prst="rect">
               <a:avLst/>
@@ -8802,8 +8802,8 @@
           </p:nvSpPr>
           <p:spPr>
             <a:xfrm>
-              <a:off x="3743546" y="4684025"/>
-              <a:ext cx="448430" cy="2032792"/>
+              <a:off x="3740123" y="4795332"/>
+              <a:ext cx="443272" cy="1891048"/>
             </a:xfrm>
             <a:prstGeom prst="rect">
               <a:avLst/>
@@ -8828,8 +8828,8 @@
           </p:nvSpPr>
           <p:spPr>
             <a:xfrm>
-              <a:off x="4466821" y="5473089"/>
-              <a:ext cx="448430" cy="1243728"/>
+              <a:off x="4455079" y="5529375"/>
+              <a:ext cx="443272" cy="1157005"/>
             </a:xfrm>
             <a:prstGeom prst="rect">
               <a:avLst/>
@@ -8854,7 +8854,7 @@
           </p:nvSpPr>
           <p:spPr>
             <a:xfrm>
-              <a:off x="1009417" y="4804066"/>
+              <a:off x="1036691" y="4900442"/>
               <a:ext cx="130484" cy="67208"/>
             </a:xfrm>
             <a:prstGeom prst="rect">
@@ -8897,7 +8897,7 @@
           </p:nvSpPr>
           <p:spPr>
             <a:xfrm>
-              <a:off x="1732693" y="6622726"/>
+              <a:off x="1751648" y="6592289"/>
               <a:ext cx="130484" cy="67208"/>
             </a:xfrm>
             <a:prstGeom prst="rect">
@@ -8940,7 +8940,7 @@
           </p:nvSpPr>
           <p:spPr>
             <a:xfrm>
-              <a:off x="2455968" y="5663529"/>
+              <a:off x="2466604" y="5699976"/>
               <a:ext cx="130484" cy="67208"/>
             </a:xfrm>
             <a:prstGeom prst="rect">
@@ -8983,7 +8983,7 @@
           </p:nvSpPr>
           <p:spPr>
             <a:xfrm>
-              <a:off x="3179243" y="5543263"/>
+              <a:off x="3181560" y="5588096"/>
               <a:ext cx="130484" cy="67208"/>
             </a:xfrm>
             <a:prstGeom prst="rect">
@@ -9026,7 +9026,7 @@
           </p:nvSpPr>
           <p:spPr>
             <a:xfrm>
-              <a:off x="3902519" y="4589933"/>
+              <a:off x="3896517" y="4701240"/>
               <a:ext cx="130484" cy="67208"/>
             </a:xfrm>
             <a:prstGeom prst="rect">
@@ -9069,7 +9069,7 @@
           </p:nvSpPr>
           <p:spPr>
             <a:xfrm>
-              <a:off x="4625794" y="5378997"/>
+              <a:off x="4611473" y="5435284"/>
               <a:ext cx="130484" cy="67208"/>
             </a:xfrm>
             <a:prstGeom prst="rect">
@@ -9112,7 +9112,7 @@
           </p:nvSpPr>
           <p:spPr>
             <a:xfrm>
-              <a:off x="2366357" y="6511100"/>
+              <a:off x="2376993" y="6492936"/>
               <a:ext cx="309707" cy="59436"/>
             </a:xfrm>
             <a:prstGeom prst="rect">
@@ -9155,7 +9155,7 @@
           </p:nvSpPr>
           <p:spPr>
             <a:xfrm>
-              <a:off x="3089632" y="6511100"/>
+              <a:off x="3091949" y="6492936"/>
               <a:ext cx="309707" cy="59436"/>
             </a:xfrm>
             <a:prstGeom prst="rect">
@@ -9198,7 +9198,7 @@
           </p:nvSpPr>
           <p:spPr>
             <a:xfrm>
-              <a:off x="3812908" y="6511100"/>
+              <a:off x="3806905" y="6492936"/>
               <a:ext cx="309707" cy="59436"/>
             </a:xfrm>
             <a:prstGeom prst="rect">
@@ -9241,7 +9241,7 @@
           </p:nvSpPr>
           <p:spPr>
             <a:xfrm>
-              <a:off x="4536183" y="6511100"/>
+              <a:off x="4521862" y="6492936"/>
               <a:ext cx="309707" cy="59436"/>
             </a:xfrm>
             <a:prstGeom prst="rect">
@@ -9284,15 +9284,15 @@
           </p:nvSpPr>
           <p:spPr>
             <a:xfrm>
-              <a:off x="640695" y="4358778"/>
-              <a:ext cx="0" cy="2358039"/>
+              <a:off x="672960" y="4492764"/>
+              <a:ext cx="0" cy="2193616"/>
             </a:xfrm>
             <a:custGeom>
               <a:avLst/>
               <a:pathLst>
-                <a:path w="0" h="2358039">
+                <a:path w="0" h="2193616">
                   <a:moveTo>
-                    <a:pt x="0" y="2358039"/>
+                    <a:pt x="0" y="2193616"/>
                   </a:moveTo>
                   <a:lnTo>
                     <a:pt x="0" y="0"/>
@@ -9324,8 +9324,8 @@
           </p:nvSpPr>
           <p:spPr>
             <a:xfrm>
-              <a:off x="538702" y="6684128"/>
-              <a:ext cx="50749" cy="65379"/>
+              <a:off x="559514" y="6649988"/>
+              <a:ext cx="56509" cy="72786"/>
             </a:xfrm>
             <a:prstGeom prst="rect">
               <a:avLst/>
@@ -9345,7 +9345,7 @@
                 </a:spcAft>
               </a:pPr>
               <a:r>
-                <a:rPr sz="720" i="0" b="0">
+                <a:rPr sz="800" i="0" b="0">
                   <a:solidFill>
                     <a:srgbClr val="262626">
                       <a:alpha val="100000"/>
@@ -9367,8 +9367,8 @@
           </p:nvSpPr>
           <p:spPr>
             <a:xfrm>
-              <a:off x="538702" y="6097463"/>
-              <a:ext cx="50749" cy="65379"/>
+              <a:off x="559514" y="6104230"/>
+              <a:ext cx="56509" cy="72786"/>
             </a:xfrm>
             <a:prstGeom prst="rect">
               <a:avLst/>
@@ -9388,7 +9388,7 @@
                 </a:spcAft>
               </a:pPr>
               <a:r>
-                <a:rPr sz="720" i="0" b="0">
+                <a:rPr sz="800" i="0" b="0">
                   <a:solidFill>
                     <a:srgbClr val="262626">
                       <a:alpha val="100000"/>
@@ -9410,8 +9410,8 @@
           </p:nvSpPr>
           <p:spPr>
             <a:xfrm>
-              <a:off x="538702" y="5510799"/>
-              <a:ext cx="50749" cy="65379"/>
+              <a:off x="559514" y="5558473"/>
+              <a:ext cx="56509" cy="72786"/>
             </a:xfrm>
             <a:prstGeom prst="rect">
               <a:avLst/>
@@ -9431,7 +9431,7 @@
                 </a:spcAft>
               </a:pPr>
               <a:r>
-                <a:rPr sz="720" i="0" b="0">
+                <a:rPr sz="800" i="0" b="0">
                   <a:solidFill>
                     <a:srgbClr val="262626">
                       <a:alpha val="100000"/>
@@ -9453,8 +9453,8 @@
           </p:nvSpPr>
           <p:spPr>
             <a:xfrm>
-              <a:off x="538702" y="4924134"/>
-              <a:ext cx="50749" cy="65379"/>
+              <a:off x="559514" y="5012716"/>
+              <a:ext cx="56509" cy="72786"/>
             </a:xfrm>
             <a:prstGeom prst="rect">
               <a:avLst/>
@@ -9474,7 +9474,7 @@
                 </a:spcAft>
               </a:pPr>
               <a:r>
-                <a:rPr sz="720" i="0" b="0">
+                <a:rPr sz="800" i="0" b="0">
                   <a:solidFill>
                     <a:srgbClr val="262626">
                       <a:alpha val="100000"/>
@@ -9496,8 +9496,8 @@
           </p:nvSpPr>
           <p:spPr>
             <a:xfrm>
-              <a:off x="538702" y="4337470"/>
-              <a:ext cx="50749" cy="65379"/>
+              <a:off x="559514" y="4466959"/>
+              <a:ext cx="56509" cy="72786"/>
             </a:xfrm>
             <a:prstGeom prst="rect">
               <a:avLst/>
@@ -9517,7 +9517,7 @@
                 </a:spcAft>
               </a:pPr>
               <a:r>
-                <a:rPr sz="720" i="0" b="0">
+                <a:rPr sz="800" i="0" b="0">
                   <a:solidFill>
                     <a:srgbClr val="262626">
                       <a:alpha val="100000"/>
@@ -9539,18 +9539,18 @@
           </p:nvSpPr>
           <p:spPr>
             <a:xfrm>
-              <a:off x="612226" y="6716817"/>
-              <a:ext cx="28468" cy="0"/>
+              <a:off x="641329" y="6686381"/>
+              <a:ext cx="31631" cy="0"/>
             </a:xfrm>
             <a:custGeom>
               <a:avLst/>
               <a:pathLst>
-                <a:path w="28468" h="0">
+                <a:path w="31631" h="0">
                   <a:moveTo>
                     <a:pt x="0" y="0"/>
                   </a:moveTo>
                   <a:lnTo>
-                    <a:pt x="28468" y="0"/>
+                    <a:pt x="31631" y="0"/>
                   </a:lnTo>
                 </a:path>
               </a:pathLst>
@@ -9579,18 +9579,18 @@
           </p:nvSpPr>
           <p:spPr>
             <a:xfrm>
-              <a:off x="612226" y="6130153"/>
-              <a:ext cx="28468" cy="0"/>
+              <a:off x="641329" y="6140624"/>
+              <a:ext cx="31631" cy="0"/>
             </a:xfrm>
             <a:custGeom>
               <a:avLst/>
               <a:pathLst>
-                <a:path w="28468" h="0">
+                <a:path w="31631" h="0">
                   <a:moveTo>
                     <a:pt x="0" y="0"/>
                   </a:moveTo>
                   <a:lnTo>
-                    <a:pt x="28468" y="0"/>
+                    <a:pt x="31631" y="0"/>
                   </a:lnTo>
                 </a:path>
               </a:pathLst>
@@ -9619,18 +9619,18 @@
           </p:nvSpPr>
           <p:spPr>
             <a:xfrm>
-              <a:off x="612226" y="5543488"/>
-              <a:ext cx="28468" cy="0"/>
+              <a:off x="641329" y="5594866"/>
+              <a:ext cx="31631" cy="0"/>
             </a:xfrm>
             <a:custGeom>
               <a:avLst/>
               <a:pathLst>
-                <a:path w="28468" h="0">
+                <a:path w="31631" h="0">
                   <a:moveTo>
                     <a:pt x="0" y="0"/>
                   </a:moveTo>
                   <a:lnTo>
-                    <a:pt x="28468" y="0"/>
+                    <a:pt x="31631" y="0"/>
                   </a:lnTo>
                 </a:path>
               </a:pathLst>
@@ -9659,18 +9659,18 @@
           </p:nvSpPr>
           <p:spPr>
             <a:xfrm>
-              <a:off x="612226" y="4956824"/>
-              <a:ext cx="28468" cy="0"/>
+              <a:off x="641329" y="5049109"/>
+              <a:ext cx="31631" cy="0"/>
             </a:xfrm>
             <a:custGeom>
               <a:avLst/>
               <a:pathLst>
-                <a:path w="28468" h="0">
+                <a:path w="31631" h="0">
                   <a:moveTo>
                     <a:pt x="0" y="0"/>
                   </a:moveTo>
                   <a:lnTo>
-                    <a:pt x="28468" y="0"/>
+                    <a:pt x="31631" y="0"/>
                   </a:lnTo>
                 </a:path>
               </a:pathLst>
@@ -9699,18 +9699,18 @@
           </p:nvSpPr>
           <p:spPr>
             <a:xfrm>
-              <a:off x="612226" y="4370160"/>
-              <a:ext cx="28468" cy="0"/>
+              <a:off x="641329" y="4503352"/>
+              <a:ext cx="31631" cy="0"/>
             </a:xfrm>
             <a:custGeom>
               <a:avLst/>
               <a:pathLst>
-                <a:path w="28468" h="0">
+                <a:path w="31631" h="0">
                   <a:moveTo>
                     <a:pt x="0" y="0"/>
                   </a:moveTo>
                   <a:lnTo>
-                    <a:pt x="28468" y="0"/>
+                    <a:pt x="31631" y="0"/>
                   </a:lnTo>
                 </a:path>
               </a:pathLst>
@@ -9739,18 +9739,18 @@
           </p:nvSpPr>
           <p:spPr>
             <a:xfrm>
-              <a:off x="640695" y="6716817"/>
-              <a:ext cx="4484307" cy="0"/>
+              <a:off x="672960" y="6686381"/>
+              <a:ext cx="4432729" cy="0"/>
             </a:xfrm>
             <a:custGeom>
               <a:avLst/>
               <a:pathLst>
-                <a:path w="4484307" h="0">
+                <a:path w="4432729" h="0">
                   <a:moveTo>
                     <a:pt x="0" y="0"/>
                   </a:moveTo>
                   <a:lnTo>
-                    <a:pt x="4484307" y="0"/>
+                    <a:pt x="4432729" y="0"/>
                   </a:lnTo>
                 </a:path>
               </a:pathLst>
@@ -9779,15 +9779,15 @@
           </p:nvSpPr>
           <p:spPr>
             <a:xfrm>
-              <a:off x="1074660" y="6716817"/>
-              <a:ext cx="0" cy="28468"/>
+              <a:off x="1101934" y="6686381"/>
+              <a:ext cx="0" cy="31631"/>
             </a:xfrm>
             <a:custGeom>
               <a:avLst/>
               <a:pathLst>
-                <a:path w="0" h="28468">
+                <a:path w="0" h="31631">
                   <a:moveTo>
-                    <a:pt x="0" y="28468"/>
+                    <a:pt x="0" y="31631"/>
                   </a:moveTo>
                   <a:lnTo>
                     <a:pt x="0" y="0"/>
@@ -9819,15 +9819,15 @@
           </p:nvSpPr>
           <p:spPr>
             <a:xfrm>
-              <a:off x="1797935" y="6716817"/>
-              <a:ext cx="0" cy="28468"/>
+              <a:off x="1816890" y="6686381"/>
+              <a:ext cx="0" cy="31631"/>
             </a:xfrm>
             <a:custGeom>
               <a:avLst/>
               <a:pathLst>
-                <a:path w="0" h="28468">
+                <a:path w="0" h="31631">
                   <a:moveTo>
-                    <a:pt x="0" y="28468"/>
+                    <a:pt x="0" y="31631"/>
                   </a:moveTo>
                   <a:lnTo>
                     <a:pt x="0" y="0"/>
@@ -9859,15 +9859,15 @@
           </p:nvSpPr>
           <p:spPr>
             <a:xfrm>
-              <a:off x="2521210" y="6716817"/>
-              <a:ext cx="0" cy="28468"/>
+              <a:off x="2531846" y="6686381"/>
+              <a:ext cx="0" cy="31631"/>
             </a:xfrm>
             <a:custGeom>
               <a:avLst/>
               <a:pathLst>
-                <a:path w="0" h="28468">
+                <a:path w="0" h="31631">
                   <a:moveTo>
-                    <a:pt x="0" y="28468"/>
+                    <a:pt x="0" y="31631"/>
                   </a:moveTo>
                   <a:lnTo>
                     <a:pt x="0" y="0"/>
@@ -9899,15 +9899,15 @@
           </p:nvSpPr>
           <p:spPr>
             <a:xfrm>
-              <a:off x="3244486" y="6716817"/>
-              <a:ext cx="0" cy="28468"/>
+              <a:off x="3246803" y="6686381"/>
+              <a:ext cx="0" cy="31631"/>
             </a:xfrm>
             <a:custGeom>
               <a:avLst/>
               <a:pathLst>
-                <a:path w="0" h="28468">
+                <a:path w="0" h="31631">
                   <a:moveTo>
-                    <a:pt x="0" y="28468"/>
+                    <a:pt x="0" y="31631"/>
                   </a:moveTo>
                   <a:lnTo>
                     <a:pt x="0" y="0"/>
@@ -9939,15 +9939,15 @@
           </p:nvSpPr>
           <p:spPr>
             <a:xfrm>
-              <a:off x="3967761" y="6716817"/>
-              <a:ext cx="0" cy="28468"/>
+              <a:off x="3961759" y="6686381"/>
+              <a:ext cx="0" cy="31631"/>
             </a:xfrm>
             <a:custGeom>
               <a:avLst/>
               <a:pathLst>
-                <a:path w="0" h="28468">
+                <a:path w="0" h="31631">
                   <a:moveTo>
-                    <a:pt x="0" y="28468"/>
+                    <a:pt x="0" y="31631"/>
                   </a:moveTo>
                   <a:lnTo>
                     <a:pt x="0" y="0"/>
@@ -9979,15 +9979,15 @@
           </p:nvSpPr>
           <p:spPr>
             <a:xfrm>
-              <a:off x="4691037" y="6716817"/>
-              <a:ext cx="0" cy="28468"/>
+              <a:off x="4676715" y="6686381"/>
+              <a:ext cx="0" cy="31631"/>
             </a:xfrm>
             <a:custGeom>
               <a:avLst/>
               <a:pathLst>
-                <a:path w="0" h="28468">
+                <a:path w="0" h="31631">
                   <a:moveTo>
-                    <a:pt x="0" y="28468"/>
+                    <a:pt x="0" y="31631"/>
                   </a:moveTo>
                   <a:lnTo>
                     <a:pt x="0" y="0"/>
@@ -10019,8 +10019,8 @@
           </p:nvSpPr>
           <p:spPr>
             <a:xfrm>
-              <a:off x="1011292" y="6768060"/>
-              <a:ext cx="126735" cy="65379"/>
+              <a:off x="1031388" y="6743317"/>
+              <a:ext cx="141091" cy="72786"/>
             </a:xfrm>
             <a:prstGeom prst="rect">
               <a:avLst/>
@@ -10040,7 +10040,7 @@
                 </a:spcAft>
               </a:pPr>
               <a:r>
-                <a:rPr sz="720" i="0" b="0">
+                <a:rPr sz="800" i="0" b="0">
                   <a:solidFill>
                     <a:srgbClr val="262626">
                       <a:alpha val="100000"/>
@@ -10062,8 +10062,8 @@
           </p:nvSpPr>
           <p:spPr>
             <a:xfrm>
-              <a:off x="1734567" y="6768060"/>
-              <a:ext cx="126735" cy="65379"/>
+              <a:off x="1746344" y="6743317"/>
+              <a:ext cx="141091" cy="72786"/>
             </a:xfrm>
             <a:prstGeom prst="rect">
               <a:avLst/>
@@ -10083,7 +10083,7 @@
                 </a:spcAft>
               </a:pPr>
               <a:r>
-                <a:rPr sz="720" i="0" b="0">
+                <a:rPr sz="800" i="0" b="0">
                   <a:solidFill>
                     <a:srgbClr val="262626">
                       <a:alpha val="100000"/>
@@ -10105,8 +10105,8 @@
           </p:nvSpPr>
           <p:spPr>
             <a:xfrm>
-              <a:off x="2457843" y="6768060"/>
-              <a:ext cx="126735" cy="65379"/>
+              <a:off x="2461300" y="6743317"/>
+              <a:ext cx="141091" cy="72786"/>
             </a:xfrm>
             <a:prstGeom prst="rect">
               <a:avLst/>
@@ -10126,7 +10126,7 @@
                 </a:spcAft>
               </a:pPr>
               <a:r>
-                <a:rPr sz="720" i="0" b="0">
+                <a:rPr sz="800" i="0" b="0">
                   <a:solidFill>
                     <a:srgbClr val="262626">
                       <a:alpha val="100000"/>
@@ -10148,8 +10148,8 @@
           </p:nvSpPr>
           <p:spPr>
             <a:xfrm>
-              <a:off x="3181118" y="6768060"/>
-              <a:ext cx="126735" cy="65379"/>
+              <a:off x="3176257" y="6743317"/>
+              <a:ext cx="141091" cy="72786"/>
             </a:xfrm>
             <a:prstGeom prst="rect">
               <a:avLst/>
@@ -10169,7 +10169,7 @@
                 </a:spcAft>
               </a:pPr>
               <a:r>
-                <a:rPr sz="720" i="0" b="0">
+                <a:rPr sz="800" i="0" b="0">
                   <a:solidFill>
                     <a:srgbClr val="262626">
                       <a:alpha val="100000"/>
@@ -10191,8 +10191,8 @@
           </p:nvSpPr>
           <p:spPr>
             <a:xfrm>
-              <a:off x="3904393" y="6768060"/>
-              <a:ext cx="126735" cy="65379"/>
+              <a:off x="3891213" y="6743317"/>
+              <a:ext cx="141091" cy="72786"/>
             </a:xfrm>
             <a:prstGeom prst="rect">
               <a:avLst/>
@@ -10212,7 +10212,7 @@
                 </a:spcAft>
               </a:pPr>
               <a:r>
-                <a:rPr sz="720" i="0" b="0">
+                <a:rPr sz="800" i="0" b="0">
                   <a:solidFill>
                     <a:srgbClr val="262626">
                       <a:alpha val="100000"/>
@@ -10234,8 +10234,8 @@
           </p:nvSpPr>
           <p:spPr>
             <a:xfrm>
-              <a:off x="4627669" y="6768060"/>
-              <a:ext cx="126735" cy="65379"/>
+              <a:off x="4606170" y="6743317"/>
+              <a:ext cx="141091" cy="72786"/>
             </a:xfrm>
             <a:prstGeom prst="rect">
               <a:avLst/>
@@ -10255,7 +10255,7 @@
                 </a:spcAft>
               </a:pPr>
               <a:r>
-                <a:rPr sz="720" i="0" b="0">
+                <a:rPr sz="800" i="0" b="0">
                   <a:solidFill>
                     <a:srgbClr val="262626">
                       <a:alpha val="100000"/>
@@ -10277,8 +10277,8 @@
           </p:nvSpPr>
           <p:spPr>
             <a:xfrm rot="-5400000">
-              <a:off x="153207" y="5496878"/>
-              <a:ext cx="482803" cy="81838"/>
+              <a:off x="130895" y="5544081"/>
+              <a:ext cx="536569" cy="90982"/>
             </a:xfrm>
             <a:prstGeom prst="rect">
               <a:avLst/>
@@ -10298,7 +10298,7 @@
                 </a:spcAft>
               </a:pPr>
               <a:r>
-                <a:rPr sz="900" i="0" b="0">
+                <a:rPr sz="1000" i="0" b="0">
                   <a:solidFill>
                     <a:srgbClr val="0D0D0D">
                       <a:alpha val="100000"/>
@@ -10320,8 +10320,8 @@
           </p:nvSpPr>
           <p:spPr>
             <a:xfrm>
-              <a:off x="640695" y="3980613"/>
-              <a:ext cx="4436485" cy="74432"/>
+              <a:off x="672960" y="3942766"/>
+              <a:ext cx="4980736" cy="83576"/>
             </a:xfrm>
             <a:prstGeom prst="rect">
               <a:avLst/>
@@ -10341,7 +10341,7 @@
                 </a:spcAft>
               </a:pPr>
               <a:r>
-                <a:rPr sz="819" i="0" b="0">
+                <a:rPr sz="919" i="0" b="0">
                   <a:solidFill>
                     <a:srgbClr val="4D4D4D">
                       <a:alpha val="100000"/>
@@ -10363,8 +10363,8 @@
           </p:nvSpPr>
           <p:spPr>
             <a:xfrm>
-              <a:off x="640695" y="4093084"/>
-              <a:ext cx="4181642" cy="74432"/>
+              <a:off x="672960" y="4068954"/>
+              <a:ext cx="4694621" cy="83576"/>
             </a:xfrm>
             <a:prstGeom prst="rect">
               <a:avLst/>
@@ -10384,7 +10384,7 @@
                 </a:spcAft>
               </a:pPr>
               <a:r>
-                <a:rPr sz="819" i="0" b="0">
+                <a:rPr sz="919" i="0" b="0">
                   <a:solidFill>
                     <a:srgbClr val="4D4D4D">
                       <a:alpha val="100000"/>
@@ -10406,8 +10406,8 @@
           </p:nvSpPr>
           <p:spPr>
             <a:xfrm>
-              <a:off x="640695" y="3805993"/>
-              <a:ext cx="3183849" cy="90982"/>
+              <a:off x="672960" y="3750025"/>
+              <a:ext cx="3502243" cy="100035"/>
             </a:xfrm>
             <a:prstGeom prst="rect">
               <a:avLst/>
@@ -10427,7 +10427,7 @@
                 </a:spcAft>
               </a:pPr>
               <a:r>
-                <a:rPr sz="1000" i="0" b="1">
+                <a:rPr sz="1100" i="0" b="1">
                   <a:solidFill>
                     <a:srgbClr val="000000">
                       <a:alpha val="100000"/>
@@ -10449,8 +10449,8 @@
           </p:nvSpPr>
           <p:spPr>
             <a:xfrm>
-              <a:off x="335163" y="3799116"/>
-              <a:ext cx="84764" cy="109179"/>
+              <a:off x="331546" y="3739460"/>
+              <a:ext cx="91805" cy="118231"/>
             </a:xfrm>
             <a:prstGeom prst="rect">
               <a:avLst/>
@@ -10470,7 +10470,7 @@
                 </a:spcAft>
               </a:pPr>
               <a:r>
-                <a:rPr sz="1200" i="0" b="1">
+                <a:rPr sz="1300" i="0" b="1">
                   <a:solidFill>
                     <a:srgbClr val="000000">
                       <a:alpha val="100000"/>
@@ -10492,8 +10492,8 @@
           </p:nvSpPr>
           <p:spPr>
             <a:xfrm>
-              <a:off x="5951923" y="4358778"/>
-              <a:ext cx="4484307" cy="2358039"/>
+              <a:off x="6003501" y="4492764"/>
+              <a:ext cx="4432729" cy="2193616"/>
             </a:xfrm>
             <a:prstGeom prst="rect">
               <a:avLst/>
@@ -10518,15 +10518,15 @@
           </p:nvSpPr>
           <p:spPr>
             <a:xfrm>
-              <a:off x="8446421" y="4358778"/>
-              <a:ext cx="0" cy="2358039"/>
+              <a:off x="8469307" y="4492764"/>
+              <a:ext cx="0" cy="2193616"/>
             </a:xfrm>
             <a:custGeom>
               <a:avLst/>
               <a:pathLst>
-                <a:path w="0" h="2358039">
+                <a:path w="0" h="2193616">
                   <a:moveTo>
-                    <a:pt x="0" y="2358039"/>
+                    <a:pt x="0" y="2193616"/>
                   </a:moveTo>
                   <a:lnTo>
                     <a:pt x="0" y="0"/>
@@ -10561,18 +10561,18 @@
           </p:nvSpPr>
           <p:spPr>
             <a:xfrm>
-              <a:off x="7082664" y="6274685"/>
-              <a:ext cx="2226407" cy="0"/>
+              <a:off x="7121236" y="6275078"/>
+              <a:ext cx="2200799" cy="0"/>
             </a:xfrm>
             <a:custGeom>
               <a:avLst/>
               <a:pathLst>
-                <a:path w="2226407" h="0">
+                <a:path w="2200799" h="0">
                   <a:moveTo>
                     <a:pt x="0" y="0"/>
                   </a:moveTo>
                   <a:lnTo>
-                    <a:pt x="2226407" y="0"/>
+                    <a:pt x="2200799" y="0"/>
                   </a:lnTo>
                 </a:path>
               </a:pathLst>
@@ -10601,18 +10601,18 @@
           </p:nvSpPr>
           <p:spPr>
             <a:xfrm>
-              <a:off x="7577093" y="5537798"/>
-              <a:ext cx="2655304" cy="0"/>
+              <a:off x="7609979" y="5589573"/>
+              <a:ext cx="2624763" cy="0"/>
             </a:xfrm>
             <a:custGeom>
               <a:avLst/>
               <a:pathLst>
-                <a:path w="2655304" h="0">
+                <a:path w="2624763" h="0">
                   <a:moveTo>
                     <a:pt x="0" y="0"/>
                   </a:moveTo>
                   <a:lnTo>
-                    <a:pt x="2655304" y="0"/>
+                    <a:pt x="2624763" y="0"/>
                   </a:lnTo>
                 </a:path>
               </a:pathLst>
@@ -10641,18 +10641,18 @@
           </p:nvSpPr>
           <p:spPr>
             <a:xfrm>
-              <a:off x="6155755" y="4800911"/>
-              <a:ext cx="1693481" cy="0"/>
+              <a:off x="6204988" y="4904067"/>
+              <a:ext cx="1674003" cy="0"/>
             </a:xfrm>
             <a:custGeom>
               <a:avLst/>
               <a:pathLst>
-                <a:path w="1693481" h="0">
+                <a:path w="1674003" h="0">
                   <a:moveTo>
                     <a:pt x="0" y="0"/>
                   </a:moveTo>
                   <a:lnTo>
-                    <a:pt x="1693481" y="0"/>
+                    <a:pt x="1674003" y="0"/>
                   </a:lnTo>
                 </a:path>
               </a:pathLst>
@@ -10681,13 +10681,13 @@
           </p:nvSpPr>
           <p:spPr>
             <a:xfrm>
-              <a:off x="8055169" y="6239837"/>
-              <a:ext cx="69696" cy="69696"/>
+              <a:off x="8081746" y="6239820"/>
+              <a:ext cx="70514" cy="70514"/>
             </a:xfrm>
             <a:prstGeom prst="ellipse">
               <a:avLst/>
             </a:prstGeom>
-            <a:ln w="7363" cap="rnd">
+            <a:ln w="8181" cap="rnd">
               <a:solidFill>
                 <a:srgbClr val="009E73">
                   <a:alpha val="100000"/>
@@ -10711,13 +10711,13 @@
           </p:nvSpPr>
           <p:spPr>
             <a:xfrm>
-              <a:off x="8735306" y="5502950"/>
-              <a:ext cx="69696" cy="69696"/>
+              <a:off x="8754059" y="5554315"/>
+              <a:ext cx="70514" cy="70514"/>
             </a:xfrm>
             <a:prstGeom prst="ellipse">
               <a:avLst/>
             </a:prstGeom>
-            <a:ln w="7363" cap="rnd">
+            <a:ln w="8181" cap="rnd">
               <a:solidFill>
                 <a:srgbClr val="E69F00">
                   <a:alpha val="100000"/>
@@ -10741,8 +10741,8 @@
           </p:nvSpPr>
           <p:spPr>
             <a:xfrm>
-              <a:off x="6890964" y="4766062"/>
-              <a:ext cx="69696" cy="69696"/>
+              <a:off x="6930931" y="4868810"/>
+              <a:ext cx="70514" cy="70514"/>
             </a:xfrm>
             <a:prstGeom prst="ellipse">
               <a:avLst/>
@@ -10767,7 +10767,7 @@
           </p:nvSpPr>
           <p:spPr>
             <a:xfrm>
-              <a:off x="7778893" y="6150510"/>
+              <a:off x="7805879" y="6150902"/>
               <a:ext cx="622249" cy="62087"/>
             </a:xfrm>
             <a:prstGeom prst="rect">
@@ -10810,7 +10810,7 @@
           </p:nvSpPr>
           <p:spPr>
             <a:xfrm>
-              <a:off x="8459029" y="5413622"/>
+              <a:off x="8478192" y="5465397"/>
               <a:ext cx="622249" cy="62087"/>
             </a:xfrm>
             <a:prstGeom prst="rect">
@@ -10853,7 +10853,7 @@
           </p:nvSpPr>
           <p:spPr>
             <a:xfrm>
-              <a:off x="6614688" y="4676735"/>
+              <a:off x="6655064" y="4779892"/>
               <a:ext cx="622249" cy="62087"/>
             </a:xfrm>
             <a:prstGeom prst="rect">
@@ -10896,15 +10896,15 @@
           </p:nvSpPr>
           <p:spPr>
             <a:xfrm>
-              <a:off x="5951923" y="4358778"/>
-              <a:ext cx="0" cy="2358039"/>
+              <a:off x="6003501" y="4492764"/>
+              <a:ext cx="0" cy="2193616"/>
             </a:xfrm>
             <a:custGeom>
               <a:avLst/>
               <a:pathLst>
-                <a:path w="0" h="2358039">
+                <a:path w="0" h="2193616">
                   <a:moveTo>
-                    <a:pt x="0" y="2358039"/>
+                    <a:pt x="0" y="2193616"/>
                   </a:moveTo>
                   <a:lnTo>
                     <a:pt x="0" y="0"/>
@@ -10936,8 +10936,8 @@
           </p:nvSpPr>
           <p:spPr>
             <a:xfrm>
-              <a:off x="5540498" y="6241995"/>
-              <a:ext cx="360182" cy="65379"/>
+              <a:off x="5545508" y="6238685"/>
+              <a:ext cx="401055" cy="72786"/>
             </a:xfrm>
             <a:prstGeom prst="rect">
               <a:avLst/>
@@ -10957,7 +10957,7 @@
                 </a:spcAft>
               </a:pPr>
               <a:r>
-                <a:rPr sz="720" i="0" b="0">
+                <a:rPr sz="800" i="0" b="0">
                   <a:solidFill>
                     <a:srgbClr val="262626">
                       <a:alpha val="100000"/>
@@ -10979,8 +10979,8 @@
           </p:nvSpPr>
           <p:spPr>
             <a:xfrm>
-              <a:off x="5641996" y="5505108"/>
-              <a:ext cx="258683" cy="65379"/>
+              <a:off x="5658528" y="5553179"/>
+              <a:ext cx="288036" cy="72786"/>
             </a:xfrm>
             <a:prstGeom prst="rect">
               <a:avLst/>
@@ -11000,7 +11000,7 @@
                 </a:spcAft>
               </a:pPr>
               <a:r>
-                <a:rPr sz="720" i="0" b="0">
+                <a:rPr sz="800" i="0" b="0">
                   <a:solidFill>
                     <a:srgbClr val="262626">
                       <a:alpha val="100000"/>
@@ -11022,8 +11022,8 @@
           </p:nvSpPr>
           <p:spPr>
             <a:xfrm>
-              <a:off x="5327443" y="4768221"/>
-              <a:ext cx="573237" cy="65379"/>
+              <a:off x="5308130" y="4867674"/>
+              <a:ext cx="638434" cy="72786"/>
             </a:xfrm>
             <a:prstGeom prst="rect">
               <a:avLst/>
@@ -11043,7 +11043,7 @@
                 </a:spcAft>
               </a:pPr>
               <a:r>
-                <a:rPr sz="720" i="0" b="0">
+                <a:rPr sz="800" i="0" b="0">
                   <a:solidFill>
                     <a:srgbClr val="262626">
                       <a:alpha val="100000"/>
@@ -11065,18 +11065,18 @@
           </p:nvSpPr>
           <p:spPr>
             <a:xfrm>
-              <a:off x="5923455" y="6274685"/>
-              <a:ext cx="28468" cy="0"/>
+              <a:off x="5971869" y="6275078"/>
+              <a:ext cx="31631" cy="0"/>
             </a:xfrm>
             <a:custGeom>
               <a:avLst/>
               <a:pathLst>
-                <a:path w="28468" h="0">
+                <a:path w="31631" h="0">
                   <a:moveTo>
                     <a:pt x="0" y="0"/>
                   </a:moveTo>
                   <a:lnTo>
-                    <a:pt x="28468" y="0"/>
+                    <a:pt x="31631" y="0"/>
                   </a:lnTo>
                 </a:path>
               </a:pathLst>
@@ -11105,18 +11105,18 @@
           </p:nvSpPr>
           <p:spPr>
             <a:xfrm>
-              <a:off x="5923455" y="5537798"/>
-              <a:ext cx="28468" cy="0"/>
+              <a:off x="5971869" y="5589573"/>
+              <a:ext cx="31631" cy="0"/>
             </a:xfrm>
             <a:custGeom>
               <a:avLst/>
               <a:pathLst>
-                <a:path w="28468" h="0">
+                <a:path w="31631" h="0">
                   <a:moveTo>
                     <a:pt x="0" y="0"/>
                   </a:moveTo>
                   <a:lnTo>
-                    <a:pt x="28468" y="0"/>
+                    <a:pt x="31631" y="0"/>
                   </a:lnTo>
                 </a:path>
               </a:pathLst>
@@ -11145,18 +11145,18 @@
           </p:nvSpPr>
           <p:spPr>
             <a:xfrm>
-              <a:off x="5923455" y="4800911"/>
-              <a:ext cx="28468" cy="0"/>
+              <a:off x="5971869" y="4904067"/>
+              <a:ext cx="31631" cy="0"/>
             </a:xfrm>
             <a:custGeom>
               <a:avLst/>
               <a:pathLst>
-                <a:path w="28468" h="0">
+                <a:path w="31631" h="0">
                   <a:moveTo>
                     <a:pt x="0" y="0"/>
                   </a:moveTo>
                   <a:lnTo>
-                    <a:pt x="28468" y="0"/>
+                    <a:pt x="31631" y="0"/>
                   </a:lnTo>
                 </a:path>
               </a:pathLst>
@@ -11185,18 +11185,18 @@
           </p:nvSpPr>
           <p:spPr>
             <a:xfrm>
-              <a:off x="5951923" y="6716817"/>
-              <a:ext cx="4484307" cy="0"/>
+              <a:off x="6003501" y="6686381"/>
+              <a:ext cx="4432729" cy="0"/>
             </a:xfrm>
             <a:custGeom>
               <a:avLst/>
               <a:pathLst>
-                <a:path w="4484307" h="0">
+                <a:path w="4432729" h="0">
                   <a:moveTo>
                     <a:pt x="0" y="0"/>
                   </a:moveTo>
                   <a:lnTo>
-                    <a:pt x="4484307" y="0"/>
+                    <a:pt x="4432729" y="0"/>
                   </a:lnTo>
                 </a:path>
               </a:pathLst>
@@ -11225,15 +11225,15 @@
           </p:nvSpPr>
           <p:spPr>
             <a:xfrm>
-              <a:off x="5983563" y="6716817"/>
-              <a:ext cx="0" cy="28468"/>
+              <a:off x="6034777" y="6686381"/>
+              <a:ext cx="0" cy="31631"/>
             </a:xfrm>
             <a:custGeom>
               <a:avLst/>
               <a:pathLst>
-                <a:path w="0" h="28468">
+                <a:path w="0" h="31631">
                   <a:moveTo>
-                    <a:pt x="0" y="28468"/>
+                    <a:pt x="0" y="31631"/>
                   </a:moveTo>
                   <a:lnTo>
                     <a:pt x="0" y="0"/>
@@ -11265,15 +11265,15 @@
           </p:nvSpPr>
           <p:spPr>
             <a:xfrm>
-              <a:off x="7214992" y="6716817"/>
-              <a:ext cx="0" cy="28468"/>
+              <a:off x="7252042" y="6686381"/>
+              <a:ext cx="0" cy="31631"/>
             </a:xfrm>
             <a:custGeom>
               <a:avLst/>
               <a:pathLst>
-                <a:path w="0" h="28468">
+                <a:path w="0" h="31631">
                   <a:moveTo>
-                    <a:pt x="0" y="28468"/>
+                    <a:pt x="0" y="31631"/>
                   </a:moveTo>
                   <a:lnTo>
                     <a:pt x="0" y="0"/>
@@ -11305,15 +11305,15 @@
           </p:nvSpPr>
           <p:spPr>
             <a:xfrm>
-              <a:off x="8446421" y="6716817"/>
-              <a:ext cx="0" cy="28468"/>
+              <a:off x="8469307" y="6686381"/>
+              <a:ext cx="0" cy="31631"/>
             </a:xfrm>
             <a:custGeom>
               <a:avLst/>
               <a:pathLst>
-                <a:path w="0" h="28468">
+                <a:path w="0" h="31631">
                   <a:moveTo>
-                    <a:pt x="0" y="28468"/>
+                    <a:pt x="0" y="31631"/>
                   </a:moveTo>
                   <a:lnTo>
                     <a:pt x="0" y="0"/>
@@ -11345,15 +11345,15 @@
           </p:nvSpPr>
           <p:spPr>
             <a:xfrm>
-              <a:off x="9677850" y="6716817"/>
-              <a:ext cx="0" cy="28468"/>
+              <a:off x="9686572" y="6686381"/>
+              <a:ext cx="0" cy="31631"/>
             </a:xfrm>
             <a:custGeom>
               <a:avLst/>
               <a:pathLst>
-                <a:path w="0" h="28468">
+                <a:path w="0" h="31631">
                   <a:moveTo>
-                    <a:pt x="0" y="28468"/>
+                    <a:pt x="0" y="31631"/>
                   </a:moveTo>
                   <a:lnTo>
                     <a:pt x="0" y="0"/>
@@ -11385,8 +11385,8 @@
           </p:nvSpPr>
           <p:spPr>
             <a:xfrm>
-              <a:off x="5920149" y="6768060"/>
-              <a:ext cx="126827" cy="65379"/>
+              <a:off x="5964140" y="6743317"/>
+              <a:ext cx="141274" cy="72786"/>
             </a:xfrm>
             <a:prstGeom prst="rect">
               <a:avLst/>
@@ -11406,7 +11406,7 @@
                 </a:spcAft>
               </a:pPr>
               <a:r>
-                <a:rPr sz="720" i="0" b="0">
+                <a:rPr sz="800" i="0" b="0">
                   <a:solidFill>
                     <a:srgbClr val="262626">
                       <a:alpha val="100000"/>
@@ -11428,8 +11428,8 @@
           </p:nvSpPr>
           <p:spPr>
             <a:xfrm>
-              <a:off x="7151578" y="6768060"/>
-              <a:ext cx="126827" cy="65379"/>
+              <a:off x="7181405" y="6743317"/>
+              <a:ext cx="141274" cy="72786"/>
             </a:xfrm>
             <a:prstGeom prst="rect">
               <a:avLst/>
@@ -11449,7 +11449,7 @@
                 </a:spcAft>
               </a:pPr>
               <a:r>
-                <a:rPr sz="720" i="0" b="0">
+                <a:rPr sz="800" i="0" b="0">
                   <a:solidFill>
                     <a:srgbClr val="262626">
                       <a:alpha val="100000"/>
@@ -11471,8 +11471,8 @@
           </p:nvSpPr>
           <p:spPr>
             <a:xfrm>
-              <a:off x="8383007" y="6768060"/>
-              <a:ext cx="126827" cy="65379"/>
+              <a:off x="8398670" y="6743317"/>
+              <a:ext cx="141274" cy="72786"/>
             </a:xfrm>
             <a:prstGeom prst="rect">
               <a:avLst/>
@@ -11492,7 +11492,7 @@
                 </a:spcAft>
               </a:pPr>
               <a:r>
-                <a:rPr sz="720" i="0" b="0">
+                <a:rPr sz="800" i="0" b="0">
                   <a:solidFill>
                     <a:srgbClr val="262626">
                       <a:alpha val="100000"/>
@@ -11514,8 +11514,8 @@
           </p:nvSpPr>
           <p:spPr>
             <a:xfrm>
-              <a:off x="9614436" y="6768060"/>
-              <a:ext cx="126827" cy="65379"/>
+              <a:off x="9615935" y="6743317"/>
+              <a:ext cx="141274" cy="72786"/>
             </a:xfrm>
             <a:prstGeom prst="rect">
               <a:avLst/>
@@ -11535,7 +11535,7 @@
                 </a:spcAft>
               </a:pPr>
               <a:r>
-                <a:rPr sz="720" i="0" b="0">
+                <a:rPr sz="800" i="0" b="0">
                   <a:solidFill>
                     <a:srgbClr val="262626">
                       <a:alpha val="100000"/>
@@ -11557,8 +11557,8 @@
           </p:nvSpPr>
           <p:spPr>
             <a:xfrm>
-              <a:off x="7219326" y="6881019"/>
-              <a:ext cx="1949500" cy="81838"/>
+              <a:off x="7135844" y="6869132"/>
+              <a:ext cx="2168042" cy="90982"/>
             </a:xfrm>
             <a:prstGeom prst="rect">
               <a:avLst/>
@@ -11578,7 +11578,7 @@
                 </a:spcAft>
               </a:pPr>
               <a:r>
-                <a:rPr sz="900" i="0" b="0">
+                <a:rPr sz="1000" i="0" b="0">
                   <a:solidFill>
                     <a:srgbClr val="0D0D0D">
                       <a:alpha val="100000"/>
@@ -11600,8 +11600,8 @@
           </p:nvSpPr>
           <p:spPr>
             <a:xfrm>
-              <a:off x="5951923" y="3980613"/>
-              <a:ext cx="3993276" cy="74432"/>
+              <a:off x="6003501" y="3942766"/>
+              <a:ext cx="3347526" cy="83576"/>
             </a:xfrm>
             <a:prstGeom prst="rect">
               <a:avLst/>
@@ -11621,7 +11621,7 @@
                 </a:spcAft>
               </a:pPr>
               <a:r>
-                <a:rPr sz="819" i="0" b="0">
+                <a:rPr sz="919" i="0" b="0">
                   <a:solidFill>
                     <a:srgbClr val="4D4D4D">
                       <a:alpha val="100000"/>
@@ -11630,7 +11630,7 @@
                   <a:latin typeface="Arial"/>
                   <a:cs typeface="Arial"/>
                 </a:rPr>
-                <a:t>The interaction is significant only among long-distance migrants, but the formal test for </a:t>
+                <a:t>The interaction is significant only among long-distance migrants, </a:t>
               </a:r>
             </a:p>
           </p:txBody>
@@ -11643,8 +11643,8 @@
           </p:nvSpPr>
           <p:spPr>
             <a:xfrm>
-              <a:off x="5951923" y="4093084"/>
-              <a:ext cx="4180179" cy="74432"/>
+              <a:off x="6003501" y="4068954"/>
+              <a:ext cx="3453140" cy="83576"/>
             </a:xfrm>
             <a:prstGeom prst="rect">
               <a:avLst/>
@@ -11664,7 +11664,7 @@
                 </a:spcAft>
               </a:pPr>
               <a:r>
-                <a:rPr sz="819" i="0" b="0">
+                <a:rPr sz="919" i="0" b="0">
                   <a:solidFill>
                     <a:srgbClr val="4D4D4D">
                       <a:alpha val="100000"/>
@@ -11673,7 +11673,7 @@
                   <a:latin typeface="Arial"/>
                   <a:cs typeface="Arial"/>
                 </a:rPr>
-                <a:t>heterogeneity is not (three-way LR P = 0.26; long-distance vs resident contrast P = 0.078). </a:t>
+                <a:t>but the formal test for heterogeneity is not (three-way LR P = 0.26; </a:t>
               </a:r>
             </a:p>
           </p:txBody>
@@ -11686,8 +11686,8 @@
           </p:nvSpPr>
           <p:spPr>
             <a:xfrm>
-              <a:off x="5951923" y="4205555"/>
-              <a:ext cx="4263024" cy="74432"/>
+              <a:off x="6003501" y="4195141"/>
+              <a:ext cx="3680094" cy="83576"/>
             </a:xfrm>
             <a:prstGeom prst="rect">
               <a:avLst/>
@@ -11707,7 +11707,7 @@
                 </a:spcAft>
               </a:pPr>
               <a:r>
-                <a:rPr sz="819" i="0" b="0">
+                <a:rPr sz="919" i="0" b="0">
                   <a:solidFill>
                     <a:srgbClr val="4D4D4D">
                       <a:alpha val="100000"/>
@@ -11716,7 +11716,7 @@
                   <a:latin typeface="Arial"/>
                   <a:cs typeface="Arial"/>
                 </a:rPr>
-                <a:t>With 156-218 events per group the design cannot resolve group differences in an interaction.</a:t>
+                <a:t>long-distance vs resident contrast P = 0.078). With 156-218 events per </a:t>
               </a:r>
             </a:p>
           </p:txBody>
@@ -11729,8 +11729,8 @@
           </p:nvSpPr>
           <p:spPr>
             <a:xfrm>
-              <a:off x="5951923" y="3805993"/>
-              <a:ext cx="1110264" cy="90982"/>
+              <a:off x="6003501" y="4321328"/>
+              <a:ext cx="3482583" cy="83576"/>
             </a:xfrm>
             <a:prstGeom prst="rect">
               <a:avLst/>
@@ -11750,7 +11750,50 @@
                 </a:spcAft>
               </a:pPr>
               <a:r>
-                <a:rPr sz="1000" i="0" b="1">
+                <a:rPr sz="919" i="0" b="0">
+                  <a:solidFill>
+                    <a:srgbClr val="4D4D4D">
+                      <a:alpha val="100000"/>
+                    </a:srgbClr>
+                  </a:solidFill>
+                  <a:latin typeface="Arial"/>
+                  <a:cs typeface="Arial"/>
+                </a:rPr>
+                <a:t>group the design cannot resolve group differences in an interaction.</a:t>
+              </a:r>
+            </a:p>
+          </p:txBody>
+        </p:sp>
+        <p:sp>
+          <p:nvSpPr>
+            <p:cNvPr id="242" name="tx242"/>
+            <p:cNvSpPr/>
+            <p:nvPr/>
+          </p:nvSpPr>
+          <p:spPr>
+            <a:xfrm>
+              <a:off x="6003501" y="3750025"/>
+              <a:ext cx="1221455" cy="100035"/>
+            </a:xfrm>
+            <a:prstGeom prst="rect">
+              <a:avLst/>
+            </a:prstGeom>
+            <a:noFill/>
+          </p:spPr>
+          <p:txBody>
+            <a:bodyPr lIns="0" rIns="0" tIns="0" bIns="0" anchorCtr="1" anchor="ctr" wrap="none"/>
+            <a:lstStyle/>
+            <a:p>
+              <a:pPr algn="l" marL="0" marR="0" indent="0">
+                <a:spcBef>
+                  <a:spcPts val="0"/>
+                </a:spcBef>
+                <a:spcAft>
+                  <a:spcPts val="0"/>
+                </a:spcAft>
+              </a:pPr>
+              <a:r>
+                <a:rPr sz="1100" i="0" b="1">
                   <a:solidFill>
                     <a:srgbClr val="000000">
                       <a:alpha val="100000"/>
@@ -11766,14 +11809,14 @@
         </p:sp>
         <p:sp>
           <p:nvSpPr>
-            <p:cNvPr id="242" name="tx242"/>
-            <p:cNvSpPr/>
-            <p:nvPr/>
-          </p:nvSpPr>
-          <p:spPr>
-            <a:xfrm>
-              <a:off x="5306444" y="3799116"/>
-              <a:ext cx="93085" cy="109179"/>
+            <p:cNvPr id="243" name="tx243"/>
+            <p:cNvSpPr/>
+            <p:nvPr/>
+          </p:nvSpPr>
+          <p:spPr>
+            <a:xfrm>
+              <a:off x="5283341" y="3739460"/>
+              <a:ext cx="100858" cy="118231"/>
             </a:xfrm>
             <a:prstGeom prst="rect">
               <a:avLst/>
@@ -11793,7 +11836,7 @@
                 </a:spcAft>
               </a:pPr>
               <a:r>
-                <a:rPr sz="1200" i="0" b="1">
+                <a:rPr sz="1300" i="0" b="1">
                   <a:solidFill>
                     <a:srgbClr val="000000">
                       <a:alpha val="100000"/>

--- a/figures/Fig8_migratory_strategy_v2.pptx
+++ b/figures/Fig8_migratory_strategy_v2.pptx
@@ -2445,7 +2445,7 @@
           </p:nvSpPr>
           <p:spPr>
             <a:xfrm>
-              <a:off x="672960" y="2534492"/>
+              <a:off x="672960" y="2533578"/>
               <a:ext cx="1284423" cy="0"/>
             </a:xfrm>
             <a:custGeom>
@@ -2488,7 +2488,7 @@
           </p:nvSpPr>
           <p:spPr>
             <a:xfrm>
-              <a:off x="672960" y="1963903"/>
+              <a:off x="672960" y="1962075"/>
               <a:ext cx="1284423" cy="0"/>
             </a:xfrm>
             <a:custGeom>
@@ -2531,7 +2531,7 @@
           </p:nvSpPr>
           <p:spPr>
             <a:xfrm>
-              <a:off x="672960" y="1393313"/>
+              <a:off x="672960" y="1390571"/>
               <a:ext cx="1284423" cy="0"/>
             </a:xfrm>
             <a:custGeom>
@@ -2600,8 +2600,8 @@
           </p:nvSpPr>
           <p:spPr>
             <a:xfrm>
-              <a:off x="1190743" y="2038621"/>
-              <a:ext cx="248857" cy="1066460"/>
+              <a:off x="1190743" y="2038513"/>
+              <a:ext cx="248857" cy="1066568"/>
             </a:xfrm>
             <a:prstGeom prst="rect">
               <a:avLst/>
@@ -2626,8 +2626,8 @@
           </p:nvSpPr>
           <p:spPr>
             <a:xfrm>
-              <a:off x="1592126" y="1405038"/>
-              <a:ext cx="248857" cy="1700043"/>
+              <a:off x="1592126" y="1404687"/>
+              <a:ext cx="248857" cy="1700395"/>
             </a:xfrm>
             <a:prstGeom prst="rect">
               <a:avLst/>
@@ -2695,7 +2695,7 @@
           </p:nvSpPr>
           <p:spPr>
             <a:xfrm>
-              <a:off x="1242386" y="1951346"/>
+              <a:off x="1242386" y="1951238"/>
               <a:ext cx="145572" cy="64648"/>
             </a:xfrm>
             <a:prstGeom prst="rect">
@@ -2738,7 +2738,7 @@
           </p:nvSpPr>
           <p:spPr>
             <a:xfrm>
-              <a:off x="1643768" y="1317763"/>
+              <a:off x="1643768" y="1317412"/>
               <a:ext cx="145572" cy="64648"/>
             </a:xfrm>
             <a:prstGeom prst="rect">
@@ -5666,7 +5666,7 @@
           </p:nvSpPr>
           <p:spPr>
             <a:xfrm>
-              <a:off x="503004" y="2498099"/>
+              <a:off x="503004" y="2497185"/>
               <a:ext cx="113019" cy="72786"/>
             </a:xfrm>
             <a:prstGeom prst="rect">
@@ -5709,7 +5709,7 @@
           </p:nvSpPr>
           <p:spPr>
             <a:xfrm>
-              <a:off x="503004" y="1927509"/>
+              <a:off x="503004" y="1925682"/>
               <a:ext cx="113019" cy="72786"/>
             </a:xfrm>
             <a:prstGeom prst="rect">
@@ -5752,7 +5752,7 @@
           </p:nvSpPr>
           <p:spPr>
             <a:xfrm>
-              <a:off x="503004" y="1356920"/>
+              <a:off x="503004" y="1354178"/>
               <a:ext cx="113019" cy="72786"/>
             </a:xfrm>
             <a:prstGeom prst="rect">
@@ -5835,7 +5835,7 @@
           </p:nvSpPr>
           <p:spPr>
             <a:xfrm>
-              <a:off x="641329" y="2534492"/>
+              <a:off x="641329" y="2533578"/>
               <a:ext cx="31631" cy="0"/>
             </a:xfrm>
             <a:custGeom>
@@ -5875,7 +5875,7 @@
           </p:nvSpPr>
           <p:spPr>
             <a:xfrm>
-              <a:off x="641329" y="1963903"/>
+              <a:off x="641329" y="1962075"/>
               <a:ext cx="31631" cy="0"/>
             </a:xfrm>
             <a:custGeom>
@@ -5915,7 +5915,7 @@
           </p:nvSpPr>
           <p:spPr>
             <a:xfrm>
-              <a:off x="641329" y="1393313"/>
+              <a:off x="641329" y="1390571"/>
               <a:ext cx="31631" cy="0"/>
             </a:xfrm>
             <a:custGeom>
@@ -6153,18 +6153,18 @@
           </p:nvSpPr>
           <p:spPr>
             <a:xfrm>
-              <a:off x="6482426" y="2693779"/>
-              <a:ext cx="1074657" cy="0"/>
+              <a:off x="6476944" y="2693779"/>
+              <a:ext cx="1057962" cy="0"/>
             </a:xfrm>
             <a:custGeom>
               <a:avLst/>
               <a:pathLst>
-                <a:path w="1074657" h="0">
+                <a:path w="1057962" h="0">
                   <a:moveTo>
                     <a:pt x="0" y="0"/>
                   </a:moveTo>
                   <a:lnTo>
-                    <a:pt x="1074657" y="0"/>
+                    <a:pt x="1057962" y="0"/>
                   </a:lnTo>
                 </a:path>
               </a:pathLst>
@@ -6193,18 +6193,18 @@
           </p:nvSpPr>
           <p:spPr>
             <a:xfrm>
-              <a:off x="6690909" y="2008274"/>
-              <a:ext cx="1398018" cy="0"/>
+              <a:off x="6680196" y="2008274"/>
+              <a:ext cx="1408731" cy="0"/>
             </a:xfrm>
             <a:custGeom>
               <a:avLst/>
               <a:pathLst>
-                <a:path w="1398018" h="0">
+                <a:path w="1408731" h="0">
                   <a:moveTo>
                     <a:pt x="0" y="0"/>
                   </a:moveTo>
                   <a:lnTo>
-                    <a:pt x="1398018" y="0"/>
+                    <a:pt x="1408731" y="0"/>
                   </a:lnTo>
                 </a:path>
               </a:pathLst>
@@ -6233,18 +6233,18 @@
           </p:nvSpPr>
           <p:spPr>
             <a:xfrm>
-              <a:off x="6740018" y="1322769"/>
-              <a:ext cx="1316752" cy="0"/>
+              <a:off x="6728818" y="1322769"/>
+              <a:ext cx="1294225" cy="0"/>
             </a:xfrm>
             <a:custGeom>
               <a:avLst/>
               <a:pathLst>
-                <a:path w="1316752" h="0">
+                <a:path w="1294225" h="0">
                   <a:moveTo>
                     <a:pt x="0" y="0"/>
                   </a:moveTo>
                   <a:lnTo>
-                    <a:pt x="1316752" y="0"/>
+                    <a:pt x="1294225" y="0"/>
                   </a:lnTo>
                 </a:path>
               </a:pathLst>
@@ -6273,7 +6273,7 @@
           </p:nvSpPr>
           <p:spPr>
             <a:xfrm>
-              <a:off x="6943467" y="2661232"/>
+              <a:off x="6930385" y="2661232"/>
               <a:ext cx="65094" cy="65094"/>
             </a:xfrm>
             <a:prstGeom prst="ellipse">
@@ -6308,7 +6308,7 @@
           </p:nvSpPr>
           <p:spPr>
             <a:xfrm>
-              <a:off x="7290604" y="1975727"/>
+              <a:off x="7283491" y="1975727"/>
               <a:ext cx="65094" cy="65094"/>
             </a:xfrm>
             <a:prstGeom prst="ellipse">
@@ -6343,7 +6343,7 @@
           </p:nvSpPr>
           <p:spPr>
             <a:xfrm>
-              <a:off x="7306815" y="1290222"/>
+              <a:off x="7285493" y="1290222"/>
               <a:ext cx="65094" cy="65094"/>
             </a:xfrm>
             <a:prstGeom prst="ellipse">
@@ -6378,7 +6378,7 @@
           </p:nvSpPr>
           <p:spPr>
             <a:xfrm>
-              <a:off x="6891707" y="2569604"/>
+              <a:off x="6878625" y="2569604"/>
               <a:ext cx="168615" cy="62087"/>
             </a:xfrm>
             <a:prstGeom prst="rect">
@@ -6421,7 +6421,7 @@
           </p:nvSpPr>
           <p:spPr>
             <a:xfrm>
-              <a:off x="7238843" y="1884098"/>
+              <a:off x="7231730" y="1884098"/>
               <a:ext cx="168615" cy="62087"/>
             </a:xfrm>
             <a:prstGeom prst="rect">
@@ -6464,7 +6464,7 @@
           </p:nvSpPr>
           <p:spPr>
             <a:xfrm>
-              <a:off x="7255055" y="1198593"/>
+              <a:off x="7233733" y="1198593"/>
               <a:ext cx="168615" cy="62087"/>
             </a:xfrm>
             <a:prstGeom prst="rect">
@@ -6576,18 +6576,18 @@
           </p:nvSpPr>
           <p:spPr>
             <a:xfrm>
-              <a:off x="8615703" y="2693779"/>
-              <a:ext cx="953244" cy="0"/>
+              <a:off x="8599047" y="2693779"/>
+              <a:ext cx="934957" cy="0"/>
             </a:xfrm>
             <a:custGeom>
               <a:avLst/>
               <a:pathLst>
-                <a:path w="953244" h="0">
+                <a:path w="934957" h="0">
                   <a:moveTo>
                     <a:pt x="0" y="0"/>
                   </a:moveTo>
                   <a:lnTo>
-                    <a:pt x="953244" y="0"/>
+                    <a:pt x="934957" y="0"/>
                   </a:lnTo>
                 </a:path>
               </a:pathLst>
@@ -6616,18 +6616,18 @@
           </p:nvSpPr>
           <p:spPr>
             <a:xfrm>
-              <a:off x="8423218" y="2008274"/>
-              <a:ext cx="1289912" cy="0"/>
+              <a:off x="8550546" y="2008274"/>
+              <a:ext cx="1343961" cy="0"/>
             </a:xfrm>
             <a:custGeom>
               <a:avLst/>
               <a:pathLst>
-                <a:path w="1289912" h="0">
+                <a:path w="1343961" h="0">
                   <a:moveTo>
                     <a:pt x="0" y="0"/>
                   </a:moveTo>
                   <a:lnTo>
-                    <a:pt x="1289912" y="0"/>
+                    <a:pt x="1343961" y="0"/>
                   </a:lnTo>
                 </a:path>
               </a:pathLst>
@@ -6656,18 +6656,18 @@
           </p:nvSpPr>
           <p:spPr>
             <a:xfrm>
-              <a:off x="8664197" y="1322769"/>
-              <a:ext cx="1124269" cy="0"/>
+              <a:off x="8639857" y="1322769"/>
+              <a:ext cx="1097032" cy="0"/>
             </a:xfrm>
             <a:custGeom>
               <a:avLst/>
               <a:pathLst>
-                <a:path w="1124269" h="0">
+                <a:path w="1097032" h="0">
                   <a:moveTo>
                     <a:pt x="0" y="0"/>
                   </a:moveTo>
                   <a:lnTo>
-                    <a:pt x="1124269" y="0"/>
+                    <a:pt x="1097032" y="0"/>
                   </a:lnTo>
                 </a:path>
               </a:pathLst>
@@ -6696,7 +6696,7 @@
           </p:nvSpPr>
           <p:spPr>
             <a:xfrm>
-              <a:off x="9023474" y="2661232"/>
+              <a:off x="8998393" y="2661232"/>
               <a:ext cx="65094" cy="65094"/>
             </a:xfrm>
             <a:prstGeom prst="ellipse">
@@ -6731,7 +6731,7 @@
           </p:nvSpPr>
           <p:spPr>
             <a:xfrm>
-              <a:off x="8968297" y="1975727"/>
+              <a:off x="9119626" y="1975727"/>
               <a:ext cx="65094" cy="65094"/>
             </a:xfrm>
             <a:prstGeom prst="ellipse">
@@ -6766,7 +6766,7 @@
           </p:nvSpPr>
           <p:spPr>
             <a:xfrm>
-              <a:off x="9145269" y="1290222"/>
+              <a:off x="9108618" y="1290222"/>
               <a:ext cx="65094" cy="65094"/>
             </a:xfrm>
             <a:prstGeom prst="ellipse">
@@ -6801,7 +6801,7 @@
           </p:nvSpPr>
           <p:spPr>
             <a:xfrm>
-              <a:off x="8971714" y="2569604"/>
+              <a:off x="8946633" y="2569604"/>
               <a:ext cx="168615" cy="62087"/>
             </a:xfrm>
             <a:prstGeom prst="rect">
@@ -6844,50 +6844,7 @@
           </p:nvSpPr>
           <p:spPr>
             <a:xfrm>
-              <a:off x="8916537" y="1884098"/>
-              <a:ext cx="168615" cy="62087"/>
-            </a:xfrm>
-            <a:prstGeom prst="rect">
-              <a:avLst/>
-            </a:prstGeom>
-            <a:noFill/>
-          </p:spPr>
-          <p:txBody>
-            <a:bodyPr lIns="0" rIns="0" tIns="0" bIns="0" anchorCtr="1" anchor="ctr" wrap="none"/>
-            <a:lstStyle/>
-            <a:p>
-              <a:pPr algn="l" marL="0" marR="0" indent="0">
-                <a:spcBef>
-                  <a:spcPts val="0"/>
-                </a:spcBef>
-                <a:spcAft>
-                  <a:spcPts val="0"/>
-                </a:spcAft>
-              </a:pPr>
-              <a:r>
-                <a:rPr sz="682" i="0" b="0">
-                  <a:solidFill>
-                    <a:srgbClr val="333333">
-                      <a:alpha val="100000"/>
-                    </a:srgbClr>
-                  </a:solidFill>
-                  <a:latin typeface="Arial"/>
-                  <a:cs typeface="Arial"/>
-                </a:rPr>
-                <a:t>1.27</a:t>
-              </a:r>
-            </a:p>
-          </p:txBody>
-        </p:sp>
-        <p:sp>
-          <p:nvSpPr>
-            <p:cNvPr id="121" name="tx121"/>
-            <p:cNvSpPr/>
-            <p:nvPr/>
-          </p:nvSpPr>
-          <p:spPr>
-            <a:xfrm>
-              <a:off x="9093508" y="1198593"/>
+              <a:off x="9067866" y="1884098"/>
               <a:ext cx="168615" cy="62087"/>
             </a:xfrm>
             <a:prstGeom prst="rect">
@@ -6918,6 +6875,49 @@
                   <a:cs typeface="Arial"/>
                 </a:rPr>
                 <a:t>1.34</a:t>
+              </a:r>
+            </a:p>
+          </p:txBody>
+        </p:sp>
+        <p:sp>
+          <p:nvSpPr>
+            <p:cNvPr id="121" name="tx121"/>
+            <p:cNvSpPr/>
+            <p:nvPr/>
+          </p:nvSpPr>
+          <p:spPr>
+            <a:xfrm>
+              <a:off x="9056857" y="1198593"/>
+              <a:ext cx="168615" cy="62087"/>
+            </a:xfrm>
+            <a:prstGeom prst="rect">
+              <a:avLst/>
+            </a:prstGeom>
+            <a:noFill/>
+          </p:spPr>
+          <p:txBody>
+            <a:bodyPr lIns="0" rIns="0" tIns="0" bIns="0" anchorCtr="1" anchor="ctr" wrap="none"/>
+            <a:lstStyle/>
+            <a:p>
+              <a:pPr algn="l" marL="0" marR="0" indent="0">
+                <a:spcBef>
+                  <a:spcPts val="0"/>
+                </a:spcBef>
+                <a:spcAft>
+                  <a:spcPts val="0"/>
+                </a:spcAft>
+              </a:pPr>
+              <a:r>
+                <a:rPr sz="682" i="0" b="0">
+                  <a:solidFill>
+                    <a:srgbClr val="333333">
+                      <a:alpha val="100000"/>
+                    </a:srgbClr>
+                  </a:solidFill>
+                  <a:latin typeface="Arial"/>
+                  <a:cs typeface="Arial"/>
+                </a:rPr>
+                <a:t>1.33</a:t>
               </a:r>
             </a:p>
           </p:txBody>
@@ -7096,7 +7096,7 @@
           </p:nvSpPr>
           <p:spPr>
             <a:xfrm>
-              <a:off x="6583873" y="3105082"/>
+              <a:off x="6577335" y="3105082"/>
               <a:ext cx="0" cy="31631"/>
             </a:xfrm>
             <a:custGeom>
@@ -7136,7 +7136,7 @@
           </p:nvSpPr>
           <p:spPr>
             <a:xfrm>
-              <a:off x="7064940" y="3105082"/>
+              <a:off x="7051864" y="3105082"/>
               <a:ext cx="0" cy="31631"/>
             </a:xfrm>
             <a:custGeom>
@@ -7176,7 +7176,7 @@
           </p:nvSpPr>
           <p:spPr>
             <a:xfrm>
-              <a:off x="7546007" y="3105082"/>
+              <a:off x="7526392" y="3105082"/>
               <a:ext cx="0" cy="31631"/>
             </a:xfrm>
             <a:custGeom>
@@ -7216,7 +7216,7 @@
           </p:nvSpPr>
           <p:spPr>
             <a:xfrm>
-              <a:off x="8027073" y="3105082"/>
+              <a:off x="8000920" y="3105082"/>
               <a:ext cx="0" cy="31631"/>
             </a:xfrm>
             <a:custGeom>
@@ -7299,7 +7299,7 @@
           </p:nvSpPr>
           <p:spPr>
             <a:xfrm>
-              <a:off x="6513236" y="3162019"/>
+              <a:off x="6506698" y="3162019"/>
               <a:ext cx="141274" cy="72786"/>
             </a:xfrm>
             <a:prstGeom prst="rect">
@@ -7342,7 +7342,7 @@
           </p:nvSpPr>
           <p:spPr>
             <a:xfrm>
-              <a:off x="6994303" y="3162019"/>
+              <a:off x="6981226" y="3162019"/>
               <a:ext cx="141274" cy="72786"/>
             </a:xfrm>
             <a:prstGeom prst="rect">
@@ -7385,7 +7385,7 @@
           </p:nvSpPr>
           <p:spPr>
             <a:xfrm>
-              <a:off x="7475369" y="3162019"/>
+              <a:off x="7455755" y="3162019"/>
               <a:ext cx="141274" cy="72786"/>
             </a:xfrm>
             <a:prstGeom prst="rect">
@@ -7428,7 +7428,7 @@
           </p:nvSpPr>
           <p:spPr>
             <a:xfrm>
-              <a:off x="7956436" y="3162019"/>
+              <a:off x="7930283" y="3162019"/>
               <a:ext cx="141274" cy="72786"/>
             </a:xfrm>
             <a:prstGeom prst="rect">
@@ -7551,7 +7551,7 @@
           </p:nvSpPr>
           <p:spPr>
             <a:xfrm>
-              <a:off x="8831869" y="3105082"/>
+              <a:off x="8825331" y="3105082"/>
               <a:ext cx="0" cy="31631"/>
             </a:xfrm>
             <a:custGeom>
@@ -7591,7 +7591,7 @@
           </p:nvSpPr>
           <p:spPr>
             <a:xfrm>
-              <a:off x="9312936" y="3105082"/>
+              <a:off x="9299860" y="3105082"/>
               <a:ext cx="0" cy="31631"/>
             </a:xfrm>
             <a:custGeom>
@@ -7631,7 +7631,7 @@
           </p:nvSpPr>
           <p:spPr>
             <a:xfrm>
-              <a:off x="9794003" y="3105082"/>
+              <a:off x="9774388" y="3105082"/>
               <a:ext cx="0" cy="31631"/>
             </a:xfrm>
             <a:custGeom>
@@ -7671,7 +7671,7 @@
           </p:nvSpPr>
           <p:spPr>
             <a:xfrm>
-              <a:off x="10275069" y="3105082"/>
+              <a:off x="10248916" y="3105082"/>
               <a:ext cx="0" cy="31631"/>
             </a:xfrm>
             <a:custGeom>
@@ -7754,7 +7754,7 @@
           </p:nvSpPr>
           <p:spPr>
             <a:xfrm>
-              <a:off x="8761232" y="3162019"/>
+              <a:off x="8754694" y="3162019"/>
               <a:ext cx="141274" cy="72786"/>
             </a:xfrm>
             <a:prstGeom prst="rect">
@@ -7797,7 +7797,7 @@
           </p:nvSpPr>
           <p:spPr>
             <a:xfrm>
-              <a:off x="9242299" y="3162019"/>
+              <a:off x="9229222" y="3162019"/>
               <a:ext cx="141274" cy="72786"/>
             </a:xfrm>
             <a:prstGeom prst="rect">
@@ -7840,7 +7840,7 @@
           </p:nvSpPr>
           <p:spPr>
             <a:xfrm>
-              <a:off x="9723365" y="3162019"/>
+              <a:off x="9703751" y="3162019"/>
               <a:ext cx="141274" cy="72786"/>
             </a:xfrm>
             <a:prstGeom prst="rect">
@@ -7883,7 +7883,7 @@
           </p:nvSpPr>
           <p:spPr>
             <a:xfrm>
-              <a:off x="10204432" y="3162019"/>
+              <a:off x="10178279" y="3162019"/>
               <a:ext cx="141274" cy="72786"/>
             </a:xfrm>
             <a:prstGeom prst="rect">
@@ -8526,7 +8526,7 @@
           </p:nvSpPr>
           <p:spPr>
             <a:xfrm>
-              <a:off x="672960" y="6140624"/>
+              <a:off x="672960" y="6086999"/>
               <a:ext cx="4432729" cy="0"/>
             </a:xfrm>
             <a:custGeom>
@@ -8569,7 +8569,7 @@
           </p:nvSpPr>
           <p:spPr>
             <a:xfrm>
-              <a:off x="672960" y="5594866"/>
+              <a:off x="672960" y="5487618"/>
               <a:ext cx="4432729" cy="0"/>
             </a:xfrm>
             <a:custGeom>
@@ -8612,7 +8612,7 @@
           </p:nvSpPr>
           <p:spPr>
             <a:xfrm>
-              <a:off x="672960" y="5049109"/>
+              <a:off x="672960" y="4888236"/>
               <a:ext cx="4432729" cy="0"/>
             </a:xfrm>
             <a:custGeom>
@@ -8649,57 +8649,14 @@
         </p:sp>
         <p:sp>
           <p:nvSpPr>
-            <p:cNvPr id="164" name="pl164"/>
-            <p:cNvSpPr/>
-            <p:nvPr/>
-          </p:nvSpPr>
-          <p:spPr>
-            <a:xfrm>
-              <a:off x="672960" y="4503352"/>
-              <a:ext cx="4432729" cy="0"/>
-            </a:xfrm>
-            <a:custGeom>
-              <a:avLst/>
-              <a:pathLst>
-                <a:path w="4432729" h="0">
-                  <a:moveTo>
-                    <a:pt x="0" y="0"/>
-                  </a:moveTo>
-                  <a:lnTo>
-                    <a:pt x="4432729" y="0"/>
-                  </a:lnTo>
-                  <a:lnTo>
-                    <a:pt x="4432729" y="0"/>
-                  </a:lnTo>
-                </a:path>
-              </a:pathLst>
-            </a:custGeom>
-            <a:ln w="6775" cap="flat">
-              <a:solidFill>
-                <a:srgbClr val="EBEBEB">
-                  <a:alpha val="100000"/>
-                </a:srgbClr>
-              </a:solidFill>
-              <a:prstDash val="solid"/>
-              <a:round/>
-            </a:ln>
-          </p:spPr>
-          <p:txBody>
-            <a:bodyPr/>
-            <a:lstStyle/>
-            <a:p/>
-          </p:txBody>
-        </p:sp>
-        <p:sp>
-          <p:nvSpPr>
-            <p:cNvPr id="165" name="rc165"/>
-            <p:cNvSpPr/>
-            <p:nvPr/>
-          </p:nvSpPr>
-          <p:spPr>
-            <a:xfrm>
-              <a:off x="880297" y="4994533"/>
-              <a:ext cx="443272" cy="1691847"/>
+            <p:cNvPr id="164" name="rc164"/>
+            <p:cNvSpPr/>
+            <p:nvPr/>
+          </p:nvSpPr>
+          <p:spPr>
+            <a:xfrm>
+              <a:off x="880297" y="4831295"/>
+              <a:ext cx="443272" cy="1855085"/>
             </a:xfrm>
             <a:prstGeom prst="rect">
               <a:avLst/>
@@ -8718,7 +8675,7 @@
         </p:sp>
         <p:sp>
           <p:nvSpPr>
-            <p:cNvPr id="166" name="rc166"/>
+            <p:cNvPr id="165" name="rc165"/>
             <p:cNvSpPr/>
             <p:nvPr/>
           </p:nvSpPr>
@@ -8744,14 +8701,14 @@
         </p:sp>
         <p:sp>
           <p:nvSpPr>
-            <p:cNvPr id="167" name="rc167"/>
-            <p:cNvSpPr/>
-            <p:nvPr/>
-          </p:nvSpPr>
-          <p:spPr>
-            <a:xfrm>
-              <a:off x="2310210" y="5794068"/>
-              <a:ext cx="443272" cy="892313"/>
+            <p:cNvPr id="166" name="rc166"/>
+            <p:cNvSpPr/>
+            <p:nvPr/>
+          </p:nvSpPr>
+          <p:spPr>
+            <a:xfrm>
+              <a:off x="2310210" y="5709389"/>
+              <a:ext cx="443272" cy="976991"/>
             </a:xfrm>
             <a:prstGeom prst="rect">
               <a:avLst/>
@@ -8770,14 +8727,14 @@
         </p:sp>
         <p:sp>
           <p:nvSpPr>
-            <p:cNvPr id="168" name="rc168"/>
-            <p:cNvSpPr/>
-            <p:nvPr/>
-          </p:nvSpPr>
-          <p:spPr>
-            <a:xfrm>
-              <a:off x="3025166" y="5682188"/>
-              <a:ext cx="443272" cy="1004193"/>
+            <p:cNvPr id="167" name="rc167"/>
+            <p:cNvSpPr/>
+            <p:nvPr/>
+          </p:nvSpPr>
+          <p:spPr>
+            <a:xfrm>
+              <a:off x="3025166" y="5757339"/>
+              <a:ext cx="443272" cy="929041"/>
             </a:xfrm>
             <a:prstGeom prst="rect">
               <a:avLst/>
@@ -8796,7 +8753,7 @@
         </p:sp>
         <p:sp>
           <p:nvSpPr>
-            <p:cNvPr id="169" name="rc169"/>
+            <p:cNvPr id="168" name="rc168"/>
             <p:cNvSpPr/>
             <p:nvPr/>
           </p:nvSpPr>
@@ -8822,14 +8779,14 @@
         </p:sp>
         <p:sp>
           <p:nvSpPr>
-            <p:cNvPr id="170" name="rc170"/>
-            <p:cNvSpPr/>
-            <p:nvPr/>
-          </p:nvSpPr>
-          <p:spPr>
-            <a:xfrm>
-              <a:off x="4455079" y="5529375"/>
-              <a:ext cx="443272" cy="1157005"/>
+            <p:cNvPr id="169" name="rc169"/>
+            <p:cNvSpPr/>
+            <p:nvPr/>
+          </p:nvSpPr>
+          <p:spPr>
+            <a:xfrm>
+              <a:off x="4455079" y="5400707"/>
+              <a:ext cx="443272" cy="1285673"/>
             </a:xfrm>
             <a:prstGeom prst="rect">
               <a:avLst/>
@@ -8848,13 +8805,13 @@
         </p:sp>
         <p:sp>
           <p:nvSpPr>
-            <p:cNvPr id="171" name="tx171"/>
-            <p:cNvSpPr/>
-            <p:nvPr/>
-          </p:nvSpPr>
-          <p:spPr>
-            <a:xfrm>
-              <a:off x="1036691" y="4900442"/>
+            <p:cNvPr id="170" name="tx170"/>
+            <p:cNvSpPr/>
+            <p:nvPr/>
+          </p:nvSpPr>
+          <p:spPr>
+            <a:xfrm>
+              <a:off x="1036691" y="4737203"/>
               <a:ext cx="130484" cy="67208"/>
             </a:xfrm>
             <a:prstGeom prst="rect">
@@ -8891,7 +8848,7 @@
         </p:sp>
         <p:sp>
           <p:nvSpPr>
-            <p:cNvPr id="172" name="tx172"/>
+            <p:cNvPr id="171" name="tx171"/>
             <p:cNvSpPr/>
             <p:nvPr/>
           </p:nvSpPr>
@@ -8934,13 +8891,13 @@
         </p:sp>
         <p:sp>
           <p:nvSpPr>
-            <p:cNvPr id="173" name="tx173"/>
-            <p:cNvSpPr/>
-            <p:nvPr/>
-          </p:nvSpPr>
-          <p:spPr>
-            <a:xfrm>
-              <a:off x="2466604" y="5699976"/>
+            <p:cNvPr id="172" name="tx172"/>
+            <p:cNvSpPr/>
+            <p:nvPr/>
+          </p:nvSpPr>
+          <p:spPr>
+            <a:xfrm>
+              <a:off x="2466604" y="5615297"/>
               <a:ext cx="130484" cy="67208"/>
             </a:xfrm>
             <a:prstGeom prst="rect">
@@ -8977,13 +8934,13 @@
         </p:sp>
         <p:sp>
           <p:nvSpPr>
-            <p:cNvPr id="174" name="tx174"/>
-            <p:cNvSpPr/>
-            <p:nvPr/>
-          </p:nvSpPr>
-          <p:spPr>
-            <a:xfrm>
-              <a:off x="3181560" y="5588096"/>
+            <p:cNvPr id="173" name="tx173"/>
+            <p:cNvSpPr/>
+            <p:nvPr/>
+          </p:nvSpPr>
+          <p:spPr>
+            <a:xfrm>
+              <a:off x="3181560" y="5663248"/>
               <a:ext cx="130484" cy="67208"/>
             </a:xfrm>
             <a:prstGeom prst="rect">
@@ -9013,14 +8970,14 @@
                   <a:latin typeface="Arial"/>
                   <a:cs typeface="Arial"/>
                 </a:rPr>
-                <a:t>3.7</a:t>
+                <a:t>3.1</a:t>
               </a:r>
             </a:p>
           </p:txBody>
         </p:sp>
         <p:sp>
           <p:nvSpPr>
-            <p:cNvPr id="175" name="tx175"/>
+            <p:cNvPr id="174" name="tx174"/>
             <p:cNvSpPr/>
             <p:nvPr/>
           </p:nvSpPr>
@@ -9056,20 +9013,20 @@
                   <a:latin typeface="Arial"/>
                   <a:cs typeface="Arial"/>
                 </a:rPr>
-                <a:t>6.9</a:t>
+                <a:t>6.3</a:t>
               </a:r>
             </a:p>
           </p:txBody>
         </p:sp>
         <p:sp>
           <p:nvSpPr>
-            <p:cNvPr id="176" name="tx176"/>
-            <p:cNvSpPr/>
-            <p:nvPr/>
-          </p:nvSpPr>
-          <p:spPr>
-            <a:xfrm>
-              <a:off x="4611473" y="5435284"/>
+            <p:cNvPr id="175" name="tx175"/>
+            <p:cNvSpPr/>
+            <p:nvPr/>
+          </p:nvSpPr>
+          <p:spPr>
+            <a:xfrm>
+              <a:off x="4611473" y="5306616"/>
               <a:ext cx="130484" cy="67208"/>
             </a:xfrm>
             <a:prstGeom prst="rect">
@@ -9099,20 +9056,20 @@
                   <a:latin typeface="Arial"/>
                   <a:cs typeface="Arial"/>
                 </a:rPr>
-                <a:t>4.2</a:t>
+                <a:t>4.3</a:t>
               </a:r>
             </a:p>
           </p:txBody>
         </p:sp>
         <p:sp>
           <p:nvSpPr>
-            <p:cNvPr id="177" name="tx177"/>
-            <p:cNvSpPr/>
-            <p:nvPr/>
-          </p:nvSpPr>
-          <p:spPr>
-            <a:xfrm>
-              <a:off x="2376993" y="6492936"/>
+            <p:cNvPr id="176" name="tx176"/>
+            <p:cNvSpPr/>
+            <p:nvPr/>
+          </p:nvSpPr>
+          <p:spPr>
+            <a:xfrm>
+              <a:off x="2376993" y="6476848"/>
               <a:ext cx="309707" cy="59436"/>
             </a:xfrm>
             <a:prstGeom prst="rect">
@@ -9149,13 +9106,13 @@
         </p:sp>
         <p:sp>
           <p:nvSpPr>
-            <p:cNvPr id="178" name="tx178"/>
-            <p:cNvSpPr/>
-            <p:nvPr/>
-          </p:nvSpPr>
-          <p:spPr>
-            <a:xfrm>
-              <a:off x="3091949" y="6492936"/>
+            <p:cNvPr id="177" name="tx177"/>
+            <p:cNvSpPr/>
+            <p:nvPr/>
+          </p:nvSpPr>
+          <p:spPr>
+            <a:xfrm>
+              <a:off x="3091949" y="6476848"/>
               <a:ext cx="309707" cy="59436"/>
             </a:xfrm>
             <a:prstGeom prst="rect">
@@ -9185,20 +9142,20 @@
                   <a:latin typeface="Arial"/>
                   <a:cs typeface="Arial"/>
                 </a:rPr>
-                <a:t>P = 0.85</a:t>
+                <a:t>P = 0.64</a:t>
               </a:r>
             </a:p>
           </p:txBody>
         </p:sp>
         <p:sp>
           <p:nvSpPr>
-            <p:cNvPr id="179" name="tx179"/>
-            <p:cNvSpPr/>
-            <p:nvPr/>
-          </p:nvSpPr>
-          <p:spPr>
-            <a:xfrm>
-              <a:off x="3806905" y="6492936"/>
+            <p:cNvPr id="178" name="tx178"/>
+            <p:cNvSpPr/>
+            <p:nvPr/>
+          </p:nvSpPr>
+          <p:spPr>
+            <a:xfrm>
+              <a:off x="3806905" y="6476848"/>
               <a:ext cx="309707" cy="59436"/>
             </a:xfrm>
             <a:prstGeom prst="rect">
@@ -9228,20 +9185,20 @@
                   <a:latin typeface="Arial"/>
                   <a:cs typeface="Arial"/>
                 </a:rPr>
-                <a:t>P = 0.90</a:t>
+                <a:t>P = 0.79</a:t>
               </a:r>
             </a:p>
           </p:txBody>
         </p:sp>
         <p:sp>
           <p:nvSpPr>
-            <p:cNvPr id="180" name="tx180"/>
-            <p:cNvSpPr/>
-            <p:nvPr/>
-          </p:nvSpPr>
-          <p:spPr>
-            <a:xfrm>
-              <a:off x="4521862" y="6492936"/>
+            <p:cNvPr id="179" name="tx179"/>
+            <p:cNvSpPr/>
+            <p:nvPr/>
+          </p:nvSpPr>
+          <p:spPr>
+            <a:xfrm>
+              <a:off x="4521862" y="6476848"/>
               <a:ext cx="309707" cy="59436"/>
             </a:xfrm>
             <a:prstGeom prst="rect">
@@ -9278,7 +9235,7 @@
         </p:sp>
         <p:sp>
           <p:nvSpPr>
-            <p:cNvPr id="181" name="pl181"/>
+            <p:cNvPr id="180" name="pl180"/>
             <p:cNvSpPr/>
             <p:nvPr/>
           </p:nvSpPr>
@@ -9318,7 +9275,7 @@
         </p:sp>
         <p:sp>
           <p:nvSpPr>
-            <p:cNvPr id="182" name="tx182"/>
+            <p:cNvPr id="181" name="tx181"/>
             <p:cNvSpPr/>
             <p:nvPr/>
           </p:nvSpPr>
@@ -9361,13 +9318,13 @@
         </p:sp>
         <p:sp>
           <p:nvSpPr>
-            <p:cNvPr id="183" name="tx183"/>
-            <p:cNvSpPr/>
-            <p:nvPr/>
-          </p:nvSpPr>
-          <p:spPr>
-            <a:xfrm>
-              <a:off x="559514" y="6104230"/>
+            <p:cNvPr id="182" name="tx182"/>
+            <p:cNvSpPr/>
+            <p:nvPr/>
+          </p:nvSpPr>
+          <p:spPr>
+            <a:xfrm>
+              <a:off x="559514" y="6050606"/>
               <a:ext cx="56509" cy="72786"/>
             </a:xfrm>
             <a:prstGeom prst="rect">
@@ -9404,13 +9361,13 @@
         </p:sp>
         <p:sp>
           <p:nvSpPr>
-            <p:cNvPr id="184" name="tx184"/>
-            <p:cNvSpPr/>
-            <p:nvPr/>
-          </p:nvSpPr>
-          <p:spPr>
-            <a:xfrm>
-              <a:off x="559514" y="5558473"/>
+            <p:cNvPr id="183" name="tx183"/>
+            <p:cNvSpPr/>
+            <p:nvPr/>
+          </p:nvSpPr>
+          <p:spPr>
+            <a:xfrm>
+              <a:off x="559514" y="5451225"/>
               <a:ext cx="56509" cy="72786"/>
             </a:xfrm>
             <a:prstGeom prst="rect">
@@ -9447,13 +9404,13 @@
         </p:sp>
         <p:sp>
           <p:nvSpPr>
-            <p:cNvPr id="185" name="tx185"/>
-            <p:cNvSpPr/>
-            <p:nvPr/>
-          </p:nvSpPr>
-          <p:spPr>
-            <a:xfrm>
-              <a:off x="559514" y="5012716"/>
+            <p:cNvPr id="184" name="tx184"/>
+            <p:cNvSpPr/>
+            <p:nvPr/>
+          </p:nvSpPr>
+          <p:spPr>
+            <a:xfrm>
+              <a:off x="559514" y="4851843"/>
               <a:ext cx="56509" cy="72786"/>
             </a:xfrm>
             <a:prstGeom prst="rect">
@@ -9490,50 +9447,7 @@
         </p:sp>
         <p:sp>
           <p:nvSpPr>
-            <p:cNvPr id="186" name="tx186"/>
-            <p:cNvSpPr/>
-            <p:nvPr/>
-          </p:nvSpPr>
-          <p:spPr>
-            <a:xfrm>
-              <a:off x="559514" y="4466959"/>
-              <a:ext cx="56509" cy="72786"/>
-            </a:xfrm>
-            <a:prstGeom prst="rect">
-              <a:avLst/>
-            </a:prstGeom>
-            <a:noFill/>
-          </p:spPr>
-          <p:txBody>
-            <a:bodyPr lIns="0" rIns="0" tIns="0" bIns="0" anchorCtr="1" anchor="ctr" wrap="none"/>
-            <a:lstStyle/>
-            <a:p>
-              <a:pPr algn="l" marL="0" marR="0" indent="0">
-                <a:spcBef>
-                  <a:spcPts val="0"/>
-                </a:spcBef>
-                <a:spcAft>
-                  <a:spcPts val="0"/>
-                </a:spcAft>
-              </a:pPr>
-              <a:r>
-                <a:rPr sz="800" i="0" b="0">
-                  <a:solidFill>
-                    <a:srgbClr val="262626">
-                      <a:alpha val="100000"/>
-                    </a:srgbClr>
-                  </a:solidFill>
-                  <a:latin typeface="Arial"/>
-                  <a:cs typeface="Arial"/>
-                </a:rPr>
-                <a:t>8</a:t>
-              </a:r>
-            </a:p>
-          </p:txBody>
-        </p:sp>
-        <p:sp>
-          <p:nvSpPr>
-            <p:cNvPr id="187" name="pl187"/>
+            <p:cNvPr id="185" name="pl185"/>
             <p:cNvSpPr/>
             <p:nvPr/>
           </p:nvSpPr>
@@ -9573,13 +9487,13 @@
         </p:sp>
         <p:sp>
           <p:nvSpPr>
-            <p:cNvPr id="188" name="pl188"/>
-            <p:cNvSpPr/>
-            <p:nvPr/>
-          </p:nvSpPr>
-          <p:spPr>
-            <a:xfrm>
-              <a:off x="641329" y="6140624"/>
+            <p:cNvPr id="186" name="pl186"/>
+            <p:cNvSpPr/>
+            <p:nvPr/>
+          </p:nvSpPr>
+          <p:spPr>
+            <a:xfrm>
+              <a:off x="641329" y="6086999"/>
               <a:ext cx="31631" cy="0"/>
             </a:xfrm>
             <a:custGeom>
@@ -9613,13 +9527,13 @@
         </p:sp>
         <p:sp>
           <p:nvSpPr>
-            <p:cNvPr id="189" name="pl189"/>
-            <p:cNvSpPr/>
-            <p:nvPr/>
-          </p:nvSpPr>
-          <p:spPr>
-            <a:xfrm>
-              <a:off x="641329" y="5594866"/>
+            <p:cNvPr id="187" name="pl187"/>
+            <p:cNvSpPr/>
+            <p:nvPr/>
+          </p:nvSpPr>
+          <p:spPr>
+            <a:xfrm>
+              <a:off x="641329" y="5487618"/>
               <a:ext cx="31631" cy="0"/>
             </a:xfrm>
             <a:custGeom>
@@ -9653,13 +9567,13 @@
         </p:sp>
         <p:sp>
           <p:nvSpPr>
-            <p:cNvPr id="190" name="pl190"/>
-            <p:cNvSpPr/>
-            <p:nvPr/>
-          </p:nvSpPr>
-          <p:spPr>
-            <a:xfrm>
-              <a:off x="641329" y="5049109"/>
+            <p:cNvPr id="188" name="pl188"/>
+            <p:cNvSpPr/>
+            <p:nvPr/>
+          </p:nvSpPr>
+          <p:spPr>
+            <a:xfrm>
+              <a:off x="641329" y="4888236"/>
               <a:ext cx="31631" cy="0"/>
             </a:xfrm>
             <a:custGeom>
@@ -9693,47 +9607,7 @@
         </p:sp>
         <p:sp>
           <p:nvSpPr>
-            <p:cNvPr id="191" name="pl191"/>
-            <p:cNvSpPr/>
-            <p:nvPr/>
-          </p:nvSpPr>
-          <p:spPr>
-            <a:xfrm>
-              <a:off x="641329" y="4503352"/>
-              <a:ext cx="31631" cy="0"/>
-            </a:xfrm>
-            <a:custGeom>
-              <a:avLst/>
-              <a:pathLst>
-                <a:path w="31631" h="0">
-                  <a:moveTo>
-                    <a:pt x="0" y="0"/>
-                  </a:moveTo>
-                  <a:lnTo>
-                    <a:pt x="31631" y="0"/>
-                  </a:lnTo>
-                </a:path>
-              </a:pathLst>
-            </a:custGeom>
-            <a:ln w="8130" cap="flat">
-              <a:solidFill>
-                <a:srgbClr val="333333">
-                  <a:alpha val="100000"/>
-                </a:srgbClr>
-              </a:solidFill>
-              <a:prstDash val="solid"/>
-              <a:round/>
-            </a:ln>
-          </p:spPr>
-          <p:txBody>
-            <a:bodyPr/>
-            <a:lstStyle/>
-            <a:p/>
-          </p:txBody>
-        </p:sp>
-        <p:sp>
-          <p:nvSpPr>
-            <p:cNvPr id="192" name="pl192"/>
+            <p:cNvPr id="189" name="pl189"/>
             <p:cNvSpPr/>
             <p:nvPr/>
           </p:nvSpPr>
@@ -9773,7 +9647,7 @@
         </p:sp>
         <p:sp>
           <p:nvSpPr>
-            <p:cNvPr id="193" name="pl193"/>
+            <p:cNvPr id="190" name="pl190"/>
             <p:cNvSpPr/>
             <p:nvPr/>
           </p:nvSpPr>
@@ -9813,7 +9687,7 @@
         </p:sp>
         <p:sp>
           <p:nvSpPr>
-            <p:cNvPr id="194" name="pl194"/>
+            <p:cNvPr id="191" name="pl191"/>
             <p:cNvSpPr/>
             <p:nvPr/>
           </p:nvSpPr>
@@ -9853,7 +9727,7 @@
         </p:sp>
         <p:sp>
           <p:nvSpPr>
-            <p:cNvPr id="195" name="pl195"/>
+            <p:cNvPr id="192" name="pl192"/>
             <p:cNvSpPr/>
             <p:nvPr/>
           </p:nvSpPr>
@@ -9893,7 +9767,7 @@
         </p:sp>
         <p:sp>
           <p:nvSpPr>
-            <p:cNvPr id="196" name="pl196"/>
+            <p:cNvPr id="193" name="pl193"/>
             <p:cNvSpPr/>
             <p:nvPr/>
           </p:nvSpPr>
@@ -9933,7 +9807,7 @@
         </p:sp>
         <p:sp>
           <p:nvSpPr>
-            <p:cNvPr id="197" name="pl197"/>
+            <p:cNvPr id="194" name="pl194"/>
             <p:cNvSpPr/>
             <p:nvPr/>
           </p:nvSpPr>
@@ -9973,7 +9847,7 @@
         </p:sp>
         <p:sp>
           <p:nvSpPr>
-            <p:cNvPr id="198" name="pl198"/>
+            <p:cNvPr id="195" name="pl195"/>
             <p:cNvSpPr/>
             <p:nvPr/>
           </p:nvSpPr>
@@ -10013,7 +9887,7 @@
         </p:sp>
         <p:sp>
           <p:nvSpPr>
-            <p:cNvPr id="199" name="tx199"/>
+            <p:cNvPr id="196" name="tx196"/>
             <p:cNvSpPr/>
             <p:nvPr/>
           </p:nvSpPr>
@@ -10056,7 +9930,7 @@
         </p:sp>
         <p:sp>
           <p:nvSpPr>
-            <p:cNvPr id="200" name="tx200"/>
+            <p:cNvPr id="197" name="tx197"/>
             <p:cNvSpPr/>
             <p:nvPr/>
           </p:nvSpPr>
@@ -10099,7 +9973,7 @@
         </p:sp>
         <p:sp>
           <p:nvSpPr>
-            <p:cNvPr id="201" name="tx201"/>
+            <p:cNvPr id="198" name="tx198"/>
             <p:cNvSpPr/>
             <p:nvPr/>
           </p:nvSpPr>
@@ -10142,7 +10016,7 @@
         </p:sp>
         <p:sp>
           <p:nvSpPr>
-            <p:cNvPr id="202" name="tx202"/>
+            <p:cNvPr id="199" name="tx199"/>
             <p:cNvSpPr/>
             <p:nvPr/>
           </p:nvSpPr>
@@ -10185,7 +10059,7 @@
         </p:sp>
         <p:sp>
           <p:nvSpPr>
-            <p:cNvPr id="203" name="tx203"/>
+            <p:cNvPr id="200" name="tx200"/>
             <p:cNvSpPr/>
             <p:nvPr/>
           </p:nvSpPr>
@@ -10228,7 +10102,7 @@
         </p:sp>
         <p:sp>
           <p:nvSpPr>
-            <p:cNvPr id="204" name="tx204"/>
+            <p:cNvPr id="201" name="tx201"/>
             <p:cNvSpPr/>
             <p:nvPr/>
           </p:nvSpPr>
@@ -10271,7 +10145,7 @@
         </p:sp>
         <p:sp>
           <p:nvSpPr>
-            <p:cNvPr id="205" name="tx205"/>
+            <p:cNvPr id="202" name="tx202"/>
             <p:cNvSpPr/>
             <p:nvPr/>
           </p:nvSpPr>
@@ -10314,7 +10188,7 @@
         </p:sp>
         <p:sp>
           <p:nvSpPr>
-            <p:cNvPr id="206" name="tx206"/>
+            <p:cNvPr id="203" name="tx203"/>
             <p:cNvSpPr/>
             <p:nvPr/>
           </p:nvSpPr>
@@ -10357,7 +10231,7 @@
         </p:sp>
         <p:sp>
           <p:nvSpPr>
-            <p:cNvPr id="207" name="tx207"/>
+            <p:cNvPr id="204" name="tx204"/>
             <p:cNvSpPr/>
             <p:nvPr/>
           </p:nvSpPr>
@@ -10400,7 +10274,7 @@
         </p:sp>
         <p:sp>
           <p:nvSpPr>
-            <p:cNvPr id="208" name="tx208"/>
+            <p:cNvPr id="205" name="tx205"/>
             <p:cNvSpPr/>
             <p:nvPr/>
           </p:nvSpPr>
@@ -10443,7 +10317,7 @@
         </p:sp>
         <p:sp>
           <p:nvSpPr>
-            <p:cNvPr id="209" name="tx209"/>
+            <p:cNvPr id="206" name="tx206"/>
             <p:cNvSpPr/>
             <p:nvPr/>
           </p:nvSpPr>
@@ -10486,7 +10360,7 @@
         </p:sp>
         <p:sp>
           <p:nvSpPr>
-            <p:cNvPr id="210" name="rc210"/>
+            <p:cNvPr id="207" name="rc207"/>
             <p:cNvSpPr/>
             <p:nvPr/>
           </p:nvSpPr>
@@ -10512,13 +10386,13 @@
         </p:sp>
         <p:sp>
           <p:nvSpPr>
-            <p:cNvPr id="211" name="pl211"/>
-            <p:cNvSpPr/>
-            <p:nvPr/>
-          </p:nvSpPr>
-          <p:spPr>
-            <a:xfrm>
-              <a:off x="8469307" y="4492764"/>
+            <p:cNvPr id="208" name="pl208"/>
+            <p:cNvSpPr/>
+            <p:nvPr/>
+          </p:nvSpPr>
+          <p:spPr>
+            <a:xfrm>
+              <a:off x="8569624" y="4492764"/>
               <a:ext cx="0" cy="2193616"/>
             </a:xfrm>
             <a:custGeom>
@@ -10555,24 +10429,24 @@
         </p:sp>
         <p:sp>
           <p:nvSpPr>
-            <p:cNvPr id="212" name="pl212"/>
-            <p:cNvSpPr/>
-            <p:nvPr/>
-          </p:nvSpPr>
-          <p:spPr>
-            <a:xfrm>
-              <a:off x="7121236" y="6275078"/>
-              <a:ext cx="2200799" cy="0"/>
+            <p:cNvPr id="209" name="pl209"/>
+            <p:cNvSpPr/>
+            <p:nvPr/>
+          </p:nvSpPr>
+          <p:spPr>
+            <a:xfrm>
+              <a:off x="7156325" y="6275078"/>
+              <a:ext cx="2297010" cy="0"/>
             </a:xfrm>
             <a:custGeom>
               <a:avLst/>
               <a:pathLst>
-                <a:path w="2200799" h="0">
+                <a:path w="2297010" h="0">
                   <a:moveTo>
                     <a:pt x="0" y="0"/>
                   </a:moveTo>
                   <a:lnTo>
-                    <a:pt x="2200799" y="0"/>
+                    <a:pt x="2297010" y="0"/>
                   </a:lnTo>
                 </a:path>
               </a:pathLst>
@@ -10595,24 +10469,24 @@
         </p:sp>
         <p:sp>
           <p:nvSpPr>
-            <p:cNvPr id="213" name="pl213"/>
-            <p:cNvSpPr/>
-            <p:nvPr/>
-          </p:nvSpPr>
-          <p:spPr>
-            <a:xfrm>
-              <a:off x="7609979" y="5589573"/>
-              <a:ext cx="2624763" cy="0"/>
+            <p:cNvPr id="210" name="pl210"/>
+            <p:cNvSpPr/>
+            <p:nvPr/>
+          </p:nvSpPr>
+          <p:spPr>
+            <a:xfrm>
+              <a:off x="7551071" y="5589573"/>
+              <a:ext cx="2683671" cy="0"/>
             </a:xfrm>
             <a:custGeom>
               <a:avLst/>
               <a:pathLst>
-                <a:path w="2624763" h="0">
+                <a:path w="2683671" h="0">
                   <a:moveTo>
                     <a:pt x="0" y="0"/>
                   </a:moveTo>
                   <a:lnTo>
-                    <a:pt x="2624763" y="0"/>
+                    <a:pt x="2683671" y="0"/>
                   </a:lnTo>
                 </a:path>
               </a:pathLst>
@@ -10635,24 +10509,24 @@
         </p:sp>
         <p:sp>
           <p:nvSpPr>
-            <p:cNvPr id="214" name="pl214"/>
+            <p:cNvPr id="211" name="pl211"/>
             <p:cNvSpPr/>
             <p:nvPr/>
           </p:nvSpPr>
           <p:spPr>
             <a:xfrm>
               <a:off x="6204988" y="4904067"/>
-              <a:ext cx="1674003" cy="0"/>
+              <a:ext cx="1745606" cy="0"/>
             </a:xfrm>
             <a:custGeom>
               <a:avLst/>
               <a:pathLst>
-                <a:path w="1674003" h="0">
+                <a:path w="1745606" h="0">
                   <a:moveTo>
                     <a:pt x="0" y="0"/>
                   </a:moveTo>
                   <a:lnTo>
-                    <a:pt x="1674003" y="0"/>
+                    <a:pt x="1745606" y="0"/>
                   </a:lnTo>
                 </a:path>
               </a:pathLst>
@@ -10675,13 +10549,13 @@
         </p:sp>
         <p:sp>
           <p:nvSpPr>
-            <p:cNvPr id="215" name="pt215"/>
-            <p:cNvSpPr/>
-            <p:nvPr/>
-          </p:nvSpPr>
-          <p:spPr>
-            <a:xfrm>
-              <a:off x="8081746" y="6239820"/>
+            <p:cNvPr id="212" name="pt212"/>
+            <p:cNvSpPr/>
+            <p:nvPr/>
+          </p:nvSpPr>
+          <p:spPr>
+            <a:xfrm>
+              <a:off x="8160153" y="6239820"/>
               <a:ext cx="70514" cy="70514"/>
             </a:xfrm>
             <a:prstGeom prst="ellipse">
@@ -10705,13 +10579,13 @@
         </p:sp>
         <p:sp>
           <p:nvSpPr>
-            <p:cNvPr id="216" name="pt216"/>
-            <p:cNvSpPr/>
-            <p:nvPr/>
-          </p:nvSpPr>
-          <p:spPr>
-            <a:xfrm>
-              <a:off x="8754059" y="5554315"/>
+            <p:cNvPr id="213" name="pt213"/>
+            <p:cNvSpPr/>
+            <p:nvPr/>
+          </p:nvSpPr>
+          <p:spPr>
+            <a:xfrm>
+              <a:off x="8721290" y="5554315"/>
               <a:ext cx="70514" cy="70514"/>
             </a:xfrm>
             <a:prstGeom prst="ellipse">
@@ -10735,13 +10609,13 @@
         </p:sp>
         <p:sp>
           <p:nvSpPr>
-            <p:cNvPr id="217" name="pt217"/>
-            <p:cNvSpPr/>
-            <p:nvPr/>
-          </p:nvSpPr>
-          <p:spPr>
-            <a:xfrm>
-              <a:off x="6930931" y="4868810"/>
+            <p:cNvPr id="214" name="pt214"/>
+            <p:cNvSpPr/>
+            <p:nvPr/>
+          </p:nvSpPr>
+          <p:spPr>
+            <a:xfrm>
+              <a:off x="6963439" y="4868810"/>
               <a:ext cx="70514" cy="70514"/>
             </a:xfrm>
             <a:prstGeom prst="ellipse">
@@ -10761,13 +10635,13 @@
         </p:sp>
         <p:sp>
           <p:nvSpPr>
-            <p:cNvPr id="218" name="tx218"/>
-            <p:cNvSpPr/>
-            <p:nvPr/>
-          </p:nvSpPr>
-          <p:spPr>
-            <a:xfrm>
-              <a:off x="7805879" y="6150902"/>
+            <p:cNvPr id="215" name="tx215"/>
+            <p:cNvSpPr/>
+            <p:nvPr/>
+          </p:nvSpPr>
+          <p:spPr>
+            <a:xfrm>
+              <a:off x="7884286" y="6150902"/>
               <a:ext cx="622249" cy="62087"/>
             </a:xfrm>
             <a:prstGeom prst="rect">
@@ -10797,20 +10671,20 @@
                   <a:latin typeface="Arial"/>
                   <a:cs typeface="Arial"/>
                 </a:rPr>
-                <a:t>0.94 (P = 0.540)</a:t>
+                <a:t>0.94 (P = 0.533)</a:t>
               </a:r>
             </a:p>
           </p:txBody>
         </p:sp>
         <p:sp>
           <p:nvSpPr>
-            <p:cNvPr id="219" name="tx219"/>
-            <p:cNvSpPr/>
-            <p:nvPr/>
-          </p:nvSpPr>
-          <p:spPr>
-            <a:xfrm>
-              <a:off x="8478192" y="5465397"/>
+            <p:cNvPr id="216" name="tx216"/>
+            <p:cNvSpPr/>
+            <p:nvPr/>
+          </p:nvSpPr>
+          <p:spPr>
+            <a:xfrm>
+              <a:off x="8445423" y="5465397"/>
               <a:ext cx="622249" cy="62087"/>
             </a:xfrm>
             <a:prstGeom prst="rect">
@@ -10840,20 +10714,20 @@
                   <a:latin typeface="Arial"/>
                   <a:cs typeface="Arial"/>
                 </a:rPr>
-                <a:t>1.05 (P = 0.622)</a:t>
+                <a:t>1.03 (P = 0.780)</a:t>
               </a:r>
             </a:p>
           </p:txBody>
         </p:sp>
         <p:sp>
           <p:nvSpPr>
-            <p:cNvPr id="220" name="tx220"/>
-            <p:cNvSpPr/>
-            <p:nvPr/>
-          </p:nvSpPr>
-          <p:spPr>
-            <a:xfrm>
-              <a:off x="6655064" y="4779892"/>
+            <p:cNvPr id="217" name="tx217"/>
+            <p:cNvSpPr/>
+            <p:nvPr/>
+          </p:nvSpPr>
+          <p:spPr>
+            <a:xfrm>
+              <a:off x="6687572" y="4779892"/>
               <a:ext cx="622249" cy="62087"/>
             </a:xfrm>
             <a:prstGeom prst="rect">
@@ -10890,7 +10764,7 @@
         </p:sp>
         <p:sp>
           <p:nvSpPr>
-            <p:cNvPr id="221" name="pl221"/>
+            <p:cNvPr id="218" name="pl218"/>
             <p:cNvSpPr/>
             <p:nvPr/>
           </p:nvSpPr>
@@ -10930,7 +10804,7 @@
         </p:sp>
         <p:sp>
           <p:nvSpPr>
-            <p:cNvPr id="222" name="tx222"/>
+            <p:cNvPr id="219" name="tx219"/>
             <p:cNvSpPr/>
             <p:nvPr/>
           </p:nvSpPr>
@@ -10973,7 +10847,7 @@
         </p:sp>
         <p:sp>
           <p:nvSpPr>
-            <p:cNvPr id="223" name="tx223"/>
+            <p:cNvPr id="220" name="tx220"/>
             <p:cNvSpPr/>
             <p:nvPr/>
           </p:nvSpPr>
@@ -11016,7 +10890,7 @@
         </p:sp>
         <p:sp>
           <p:nvSpPr>
-            <p:cNvPr id="224" name="tx224"/>
+            <p:cNvPr id="221" name="tx221"/>
             <p:cNvSpPr/>
             <p:nvPr/>
           </p:nvSpPr>
@@ -11059,7 +10933,7 @@
         </p:sp>
         <p:sp>
           <p:nvSpPr>
-            <p:cNvPr id="225" name="pl225"/>
+            <p:cNvPr id="222" name="pl222"/>
             <p:cNvSpPr/>
             <p:nvPr/>
           </p:nvSpPr>
@@ -11099,7 +10973,7 @@
         </p:sp>
         <p:sp>
           <p:nvSpPr>
-            <p:cNvPr id="226" name="pl226"/>
+            <p:cNvPr id="223" name="pl223"/>
             <p:cNvSpPr/>
             <p:nvPr/>
           </p:nvSpPr>
@@ -11139,7 +11013,7 @@
         </p:sp>
         <p:sp>
           <p:nvSpPr>
-            <p:cNvPr id="227" name="pl227"/>
+            <p:cNvPr id="224" name="pl224"/>
             <p:cNvSpPr/>
             <p:nvPr/>
           </p:nvSpPr>
@@ -11179,7 +11053,7 @@
         </p:sp>
         <p:sp>
           <p:nvSpPr>
-            <p:cNvPr id="228" name="pl228"/>
+            <p:cNvPr id="225" name="pl225"/>
             <p:cNvSpPr/>
             <p:nvPr/>
           </p:nvSpPr>
@@ -11219,13 +11093,13 @@
         </p:sp>
         <p:sp>
           <p:nvSpPr>
-            <p:cNvPr id="229" name="pl229"/>
-            <p:cNvSpPr/>
-            <p:nvPr/>
-          </p:nvSpPr>
-          <p:spPr>
-            <a:xfrm>
-              <a:off x="6034777" y="6686381"/>
+            <p:cNvPr id="226" name="pl226"/>
+            <p:cNvSpPr/>
+            <p:nvPr/>
+          </p:nvSpPr>
+          <p:spPr>
+            <a:xfrm>
+              <a:off x="6030819" y="6686381"/>
               <a:ext cx="0" cy="31631"/>
             </a:xfrm>
             <a:custGeom>
@@ -11259,13 +11133,13 @@
         </p:sp>
         <p:sp>
           <p:nvSpPr>
-            <p:cNvPr id="230" name="pl230"/>
-            <p:cNvSpPr/>
-            <p:nvPr/>
-          </p:nvSpPr>
-          <p:spPr>
-            <a:xfrm>
-              <a:off x="7252042" y="6686381"/>
+            <p:cNvPr id="227" name="pl227"/>
+            <p:cNvSpPr/>
+            <p:nvPr/>
+          </p:nvSpPr>
+          <p:spPr>
+            <a:xfrm>
+              <a:off x="7300222" y="6686381"/>
               <a:ext cx="0" cy="31631"/>
             </a:xfrm>
             <a:custGeom>
@@ -11299,13 +11173,13 @@
         </p:sp>
         <p:sp>
           <p:nvSpPr>
-            <p:cNvPr id="231" name="pl231"/>
-            <p:cNvSpPr/>
-            <p:nvPr/>
-          </p:nvSpPr>
-          <p:spPr>
-            <a:xfrm>
-              <a:off x="8469307" y="6686381"/>
+            <p:cNvPr id="228" name="pl228"/>
+            <p:cNvSpPr/>
+            <p:nvPr/>
+          </p:nvSpPr>
+          <p:spPr>
+            <a:xfrm>
+              <a:off x="8569624" y="6686381"/>
               <a:ext cx="0" cy="31631"/>
             </a:xfrm>
             <a:custGeom>
@@ -11339,13 +11213,13 @@
         </p:sp>
         <p:sp>
           <p:nvSpPr>
-            <p:cNvPr id="232" name="pl232"/>
-            <p:cNvSpPr/>
-            <p:nvPr/>
-          </p:nvSpPr>
-          <p:spPr>
-            <a:xfrm>
-              <a:off x="9686572" y="6686381"/>
+            <p:cNvPr id="229" name="pl229"/>
+            <p:cNvSpPr/>
+            <p:nvPr/>
+          </p:nvSpPr>
+          <p:spPr>
+            <a:xfrm>
+              <a:off x="9839026" y="6686381"/>
               <a:ext cx="0" cy="31631"/>
             </a:xfrm>
             <a:custGeom>
@@ -11379,13 +11253,13 @@
         </p:sp>
         <p:sp>
           <p:nvSpPr>
-            <p:cNvPr id="233" name="tx233"/>
-            <p:cNvSpPr/>
-            <p:nvPr/>
-          </p:nvSpPr>
-          <p:spPr>
-            <a:xfrm>
-              <a:off x="5964140" y="6743317"/>
+            <p:cNvPr id="230" name="tx230"/>
+            <p:cNvSpPr/>
+            <p:nvPr/>
+          </p:nvSpPr>
+          <p:spPr>
+            <a:xfrm>
+              <a:off x="5960182" y="6743317"/>
               <a:ext cx="141274" cy="72786"/>
             </a:xfrm>
             <a:prstGeom prst="rect">
@@ -11422,13 +11296,13 @@
         </p:sp>
         <p:sp>
           <p:nvSpPr>
-            <p:cNvPr id="234" name="tx234"/>
-            <p:cNvSpPr/>
-            <p:nvPr/>
-          </p:nvSpPr>
-          <p:spPr>
-            <a:xfrm>
-              <a:off x="7181405" y="6743317"/>
+            <p:cNvPr id="231" name="tx231"/>
+            <p:cNvSpPr/>
+            <p:nvPr/>
+          </p:nvSpPr>
+          <p:spPr>
+            <a:xfrm>
+              <a:off x="7229584" y="6743317"/>
               <a:ext cx="141274" cy="72786"/>
             </a:xfrm>
             <a:prstGeom prst="rect">
@@ -11465,13 +11339,13 @@
         </p:sp>
         <p:sp>
           <p:nvSpPr>
-            <p:cNvPr id="235" name="tx235"/>
-            <p:cNvSpPr/>
-            <p:nvPr/>
-          </p:nvSpPr>
-          <p:spPr>
-            <a:xfrm>
-              <a:off x="8398670" y="6743317"/>
+            <p:cNvPr id="232" name="tx232"/>
+            <p:cNvSpPr/>
+            <p:nvPr/>
+          </p:nvSpPr>
+          <p:spPr>
+            <a:xfrm>
+              <a:off x="8498986" y="6743317"/>
               <a:ext cx="141274" cy="72786"/>
             </a:xfrm>
             <a:prstGeom prst="rect">
@@ -11508,13 +11382,13 @@
         </p:sp>
         <p:sp>
           <p:nvSpPr>
-            <p:cNvPr id="236" name="tx236"/>
-            <p:cNvSpPr/>
-            <p:nvPr/>
-          </p:nvSpPr>
-          <p:spPr>
-            <a:xfrm>
-              <a:off x="9615935" y="6743317"/>
+            <p:cNvPr id="233" name="tx233"/>
+            <p:cNvSpPr/>
+            <p:nvPr/>
+          </p:nvSpPr>
+          <p:spPr>
+            <a:xfrm>
+              <a:off x="9768389" y="6743317"/>
               <a:ext cx="141274" cy="72786"/>
             </a:xfrm>
             <a:prstGeom prst="rect">
@@ -11551,7 +11425,7 @@
         </p:sp>
         <p:sp>
           <p:nvSpPr>
-            <p:cNvPr id="237" name="tx237"/>
+            <p:cNvPr id="234" name="tx234"/>
             <p:cNvSpPr/>
             <p:nvPr/>
           </p:nvSpPr>
@@ -11594,7 +11468,7 @@
         </p:sp>
         <p:sp>
           <p:nvSpPr>
-            <p:cNvPr id="238" name="tx238"/>
+            <p:cNvPr id="235" name="tx235"/>
             <p:cNvSpPr/>
             <p:nvPr/>
           </p:nvSpPr>
@@ -11637,7 +11511,7 @@
         </p:sp>
         <p:sp>
           <p:nvSpPr>
-            <p:cNvPr id="239" name="tx239"/>
+            <p:cNvPr id="236" name="tx236"/>
             <p:cNvSpPr/>
             <p:nvPr/>
           </p:nvSpPr>
@@ -11680,7 +11554,7 @@
         </p:sp>
         <p:sp>
           <p:nvSpPr>
-            <p:cNvPr id="240" name="tx240"/>
+            <p:cNvPr id="237" name="tx237"/>
             <p:cNvSpPr/>
             <p:nvPr/>
           </p:nvSpPr>
@@ -11723,7 +11597,7 @@
         </p:sp>
         <p:sp>
           <p:nvSpPr>
-            <p:cNvPr id="241" name="tx241"/>
+            <p:cNvPr id="238" name="tx238"/>
             <p:cNvSpPr/>
             <p:nvPr/>
           </p:nvSpPr>
@@ -11766,7 +11640,7 @@
         </p:sp>
         <p:sp>
           <p:nvSpPr>
-            <p:cNvPr id="242" name="tx242"/>
+            <p:cNvPr id="239" name="tx239"/>
             <p:cNvSpPr/>
             <p:nvPr/>
           </p:nvSpPr>
@@ -11809,7 +11683,7 @@
         </p:sp>
         <p:sp>
           <p:nvSpPr>
-            <p:cNvPr id="243" name="tx243"/>
+            <p:cNvPr id="240" name="tx240"/>
             <p:cNvSpPr/>
             <p:nvPr/>
           </p:nvSpPr>
